--- a/apps/EMS/EMS-phase2.pptx
+++ b/apps/EMS/EMS-phase2.pptx
@@ -282,7 +282,7 @@
               <a:pPr>
                 <a:defRPr/>
               </a:pPr>
-              <a:t>10/22/2025</a:t>
+              <a:t>10/23/2025</a:t>
             </a:fld>
             <a:endParaRPr lang="en-US"/>
           </a:p>
@@ -480,7 +480,7 @@
               <a:pPr>
                 <a:defRPr/>
               </a:pPr>
-              <a:t>22/10/2025</a:t>
+              <a:t>23/10/2025</a:t>
             </a:fld>
             <a:endParaRPr lang="en-GB" altLang="en-US"/>
           </a:p>
@@ -5399,7 +5399,7 @@
               <a:pPr>
                 <a:defRPr/>
               </a:pPr>
-              <a:t>10/22/2025</a:t>
+              <a:t>10/23/2025</a:t>
             </a:fld>
             <a:endParaRPr lang="en-US" altLang="en-US"/>
           </a:p>
@@ -5691,7 +5691,7 @@
               <a:pPr>
                 <a:defRPr/>
               </a:pPr>
-              <a:t>10/22/2025</a:t>
+              <a:t>10/23/2025</a:t>
             </a:fld>
             <a:endParaRPr lang="en-US" altLang="en-US"/>
           </a:p>
@@ -20828,11 +20828,11 @@
                 <a:latin typeface="Gotham Medium"/>
                 <a:cs typeface="Gotham Medium"/>
               </a:rPr>
-              <a:t>EMS apps: c</a:t>
+              <a:t>EMS apps: implemented demo c</a:t>
             </a:r>
             <a:r>
               <a:rPr lang="en-US" sz="2800" dirty="0"/>
-              <a:t>onfiguration</a:t>
+              <a:t>onfiguration concept</a:t>
             </a:r>
           </a:p>
           <a:p>

--- a/apps/EMS/EMS-phase2.pptx
+++ b/apps/EMS/EMS-phase2.pptx
@@ -5,10 +5,10 @@
     <p:sldMasterId id="2147483648" r:id="rId1"/>
   </p:sldMasterIdLst>
   <p:notesMasterIdLst>
-    <p:notesMasterId r:id="rId19"/>
+    <p:notesMasterId r:id="rId22"/>
   </p:notesMasterIdLst>
   <p:handoutMasterIdLst>
-    <p:handoutMasterId r:id="rId20"/>
+    <p:handoutMasterId r:id="rId23"/>
   </p:handoutMasterIdLst>
   <p:sldIdLst>
     <p:sldId id="256" r:id="rId2"/>
@@ -17,17 +17,20 @@
     <p:sldId id="327" r:id="rId5"/>
     <p:sldId id="328" r:id="rId6"/>
     <p:sldId id="330" r:id="rId7"/>
-    <p:sldId id="329" r:id="rId8"/>
+    <p:sldId id="337" r:id="rId8"/>
     <p:sldId id="332" r:id="rId9"/>
-    <p:sldId id="333" r:id="rId10"/>
-    <p:sldId id="339" r:id="rId11"/>
+    <p:sldId id="335" r:id="rId10"/>
+    <p:sldId id="329" r:id="rId11"/>
     <p:sldId id="334" r:id="rId12"/>
-    <p:sldId id="337" r:id="rId13"/>
-    <p:sldId id="335" r:id="rId14"/>
-    <p:sldId id="338" r:id="rId15"/>
-    <p:sldId id="336" r:id="rId16"/>
-    <p:sldId id="340" r:id="rId17"/>
-    <p:sldId id="326" r:id="rId18"/>
+    <p:sldId id="341" r:id="rId13"/>
+    <p:sldId id="342" r:id="rId14"/>
+    <p:sldId id="343" r:id="rId15"/>
+    <p:sldId id="344" r:id="rId16"/>
+    <p:sldId id="345" r:id="rId17"/>
+    <p:sldId id="338" r:id="rId18"/>
+    <p:sldId id="336" r:id="rId19"/>
+    <p:sldId id="340" r:id="rId20"/>
+    <p:sldId id="326" r:id="rId21"/>
   </p:sldIdLst>
   <p:sldSz cx="12190413" cy="6859588"/>
   <p:notesSz cx="6858000" cy="9144000"/>
@@ -282,7 +285,7 @@
               <a:pPr>
                 <a:defRPr/>
               </a:pPr>
-              <a:t>10/23/2025</a:t>
+              <a:t>10/29/2025</a:t>
             </a:fld>
             <a:endParaRPr lang="en-US"/>
           </a:p>
@@ -480,7 +483,7 @@
               <a:pPr>
                 <a:defRPr/>
               </a:pPr>
-              <a:t>23/10/2025</a:t>
+              <a:t>29/10/2025</a:t>
             </a:fld>
             <a:endParaRPr lang="en-GB" altLang="en-US"/>
           </a:p>
@@ -5399,7 +5402,7 @@
               <a:pPr>
                 <a:defRPr/>
               </a:pPr>
-              <a:t>10/23/2025</a:t>
+              <a:t>10/29/2025</a:t>
             </a:fld>
             <a:endParaRPr lang="en-US" altLang="en-US"/>
           </a:p>
@@ -5691,7 +5694,7 @@
               <a:pPr>
                 <a:defRPr/>
               </a:pPr>
-              <a:t>10/23/2025</a:t>
+              <a:t>10/29/2025</a:t>
             </a:fld>
             <a:endParaRPr lang="en-US" altLang="en-US"/>
           </a:p>
@@ -6484,7 +6487,7 @@
         <p:cNvPr id="1" name="">
           <a:extLst>
             <a:ext uri="{FF2B5EF4-FFF2-40B4-BE49-F238E27FC236}">
-              <a16:creationId xmlns:a16="http://schemas.microsoft.com/office/drawing/2014/main" id="{65E41429-39F7-D82E-C459-A0EA896AC512}"/>
+              <a16:creationId xmlns:a16="http://schemas.microsoft.com/office/drawing/2014/main" id="{FC555A5F-F8FD-66FE-4E8C-28F4B253EC30}"/>
             </a:ext>
           </a:extLst>
         </p:cNvPr>
@@ -6504,7 +6507,7 @@
           <p:cNvPr id="4098" name="Picture 3">
             <a:extLst>
               <a:ext uri="{FF2B5EF4-FFF2-40B4-BE49-F238E27FC236}">
-                <a16:creationId xmlns:a16="http://schemas.microsoft.com/office/drawing/2014/main" id="{997518FE-643F-2A25-34C8-2C2966CF6967}"/>
+                <a16:creationId xmlns:a16="http://schemas.microsoft.com/office/drawing/2014/main" id="{98C3EBC2-C3F2-A507-55E0-BC2B55B1450F}"/>
               </a:ext>
             </a:extLst>
           </p:cNvPr>
@@ -6564,7 +6567,7 @@
           <p:cNvPr id="11" name="Rectángulo 17">
             <a:extLst>
               <a:ext uri="{FF2B5EF4-FFF2-40B4-BE49-F238E27FC236}">
-                <a16:creationId xmlns:a16="http://schemas.microsoft.com/office/drawing/2014/main" id="{DA1DF02A-9F86-F210-FED5-9A57CEF06A23}"/>
+                <a16:creationId xmlns:a16="http://schemas.microsoft.com/office/drawing/2014/main" id="{6C89F901-6D96-80B0-E762-E477BBAC4269}"/>
               </a:ext>
             </a:extLst>
           </p:cNvPr>
@@ -6726,7 +6729,7 @@
           <p:cNvPr id="13" name="TextBox 7">
             <a:extLst>
               <a:ext uri="{FF2B5EF4-FFF2-40B4-BE49-F238E27FC236}">
-                <a16:creationId xmlns:a16="http://schemas.microsoft.com/office/drawing/2014/main" id="{CC03FF23-0BAB-FAA1-81D3-825393396EDE}"/>
+                <a16:creationId xmlns:a16="http://schemas.microsoft.com/office/drawing/2014/main" id="{78EF7164-A043-A964-5E08-0B199EEA3DEC}"/>
               </a:ext>
             </a:extLst>
           </p:cNvPr>
@@ -6900,7 +6903,7 @@
           <p:cNvPr id="4101" name="Imagen 21" descr="Worldmap.jpg">
             <a:extLst>
               <a:ext uri="{FF2B5EF4-FFF2-40B4-BE49-F238E27FC236}">
-                <a16:creationId xmlns:a16="http://schemas.microsoft.com/office/drawing/2014/main" id="{C8E84F39-42EB-CE76-2904-00C6FBBDF3C8}"/>
+                <a16:creationId xmlns:a16="http://schemas.microsoft.com/office/drawing/2014/main" id="{3D7867E7-D612-4888-5375-28614498A8A8}"/>
               </a:ext>
             </a:extLst>
           </p:cNvPr>
@@ -6960,7 +6963,7 @@
           <p:cNvPr id="4102" name="TextBox 11">
             <a:extLst>
               <a:ext uri="{FF2B5EF4-FFF2-40B4-BE49-F238E27FC236}">
-                <a16:creationId xmlns:a16="http://schemas.microsoft.com/office/drawing/2014/main" id="{DCB93A5E-3650-DF27-45B2-835700E904EF}"/>
+                <a16:creationId xmlns:a16="http://schemas.microsoft.com/office/drawing/2014/main" id="{C3680392-1160-B15F-FDEF-5F08E3D0FF7E}"/>
               </a:ext>
             </a:extLst>
           </p:cNvPr>
@@ -7197,7 +7200,7 @@
           <p:cNvPr id="15" name="TextBox 14">
             <a:extLst>
               <a:ext uri="{FF2B5EF4-FFF2-40B4-BE49-F238E27FC236}">
-                <a16:creationId xmlns:a16="http://schemas.microsoft.com/office/drawing/2014/main" id="{645EA035-2E0D-ADD0-AE63-E48EAD4AD2C2}"/>
+                <a16:creationId xmlns:a16="http://schemas.microsoft.com/office/drawing/2014/main" id="{B761114D-893F-8CC2-5800-584F36DAE58A}"/>
               </a:ext>
             </a:extLst>
           </p:cNvPr>
@@ -7207,7 +7210,7 @@
         <p:spPr>
           <a:xfrm>
             <a:off x="690473" y="1296825"/>
-            <a:ext cx="8420073" cy="954107"/>
+            <a:ext cx="8420073" cy="523220"/>
           </a:xfrm>
           <a:prstGeom prst="rect">
             <a:avLst/>
@@ -7220,6 +7223,7 @@
           </a:bodyPr>
           <a:lstStyle/>
           <a:p>
+            <a:pPr algn="l"/>
             <a:r>
               <a:rPr lang="en-US" sz="2800" dirty="0">
                 <a:solidFill>
@@ -7231,27 +7235,7 @@
                 <a:latin typeface="Gotham Medium"/>
                 <a:cs typeface="Gotham Medium"/>
               </a:rPr>
-              <a:t>C</a:t>
-            </a:r>
-            <a:r>
-              <a:rPr lang="en-US" sz="2800" dirty="0"/>
-              <a:t>onfiguration concept/principle</a:t>
-            </a:r>
-          </a:p>
-          <a:p>
-            <a:pPr algn="l"/>
-            <a:r>
-              <a:rPr lang="en-US" sz="2800" dirty="0">
-                <a:solidFill>
-                  <a:schemeClr val="tx1">
-                    <a:lumMod val="75000"/>
-                    <a:lumOff val="25000"/>
-                  </a:schemeClr>
-                </a:solidFill>
-                <a:latin typeface="Gotham Medium"/>
-                <a:cs typeface="Gotham Medium"/>
-              </a:rPr>
-              <a:t> </a:t>
+              <a:t>Central Energy Manager (CEM)</a:t>
             </a:r>
             <a:endParaRPr lang="en-US" sz="2500" dirty="0">
               <a:solidFill>
@@ -7268,308 +7252,10 @@
       </p:sp>
       <p:sp>
         <p:nvSpPr>
-          <p:cNvPr id="2" name="Rectangle 1">
+          <p:cNvPr id="16" name="TextBox 15">
             <a:extLst>
               <a:ext uri="{FF2B5EF4-FFF2-40B4-BE49-F238E27FC236}">
-                <a16:creationId xmlns:a16="http://schemas.microsoft.com/office/drawing/2014/main" id="{91B9C45F-29C0-A8EB-24B7-7626EE3A26EA}"/>
-              </a:ext>
-            </a:extLst>
-          </p:cNvPr>
-          <p:cNvSpPr/>
-          <p:nvPr/>
-        </p:nvSpPr>
-        <p:spPr>
-          <a:xfrm>
-            <a:off x="1287599" y="2793028"/>
-            <a:ext cx="1335783" cy="660893"/>
-          </a:xfrm>
-          <a:prstGeom prst="rect">
-            <a:avLst/>
-          </a:prstGeom>
-          <a:solidFill>
-            <a:schemeClr val="accent6">
-              <a:lumMod val="60000"/>
-              <a:lumOff val="40000"/>
-            </a:schemeClr>
-          </a:solidFill>
-        </p:spPr>
-        <p:style>
-          <a:lnRef idx="1">
-            <a:schemeClr val="accent1"/>
-          </a:lnRef>
-          <a:fillRef idx="3">
-            <a:schemeClr val="accent1"/>
-          </a:fillRef>
-          <a:effectRef idx="2">
-            <a:schemeClr val="accent1"/>
-          </a:effectRef>
-          <a:fontRef idx="minor">
-            <a:schemeClr val="lt1"/>
-          </a:fontRef>
-        </p:style>
-        <p:txBody>
-          <a:bodyPr rtlCol="0" anchor="ctr"/>
-          <a:lstStyle/>
-          <a:p>
-            <a:pPr algn="ctr"/>
-            <a:r>
-              <a:rPr lang="en-US" dirty="0"/>
-              <a:t>Serial nr.</a:t>
-            </a:r>
-          </a:p>
-        </p:txBody>
-      </p:sp>
-      <p:sp>
-        <p:nvSpPr>
-          <p:cNvPr id="3" name="Rectangle 2">
-            <a:extLst>
-              <a:ext uri="{FF2B5EF4-FFF2-40B4-BE49-F238E27FC236}">
-                <a16:creationId xmlns:a16="http://schemas.microsoft.com/office/drawing/2014/main" id="{BEA74CBD-5334-6FDC-6BB0-5B77768031D0}"/>
-              </a:ext>
-            </a:extLst>
-          </p:cNvPr>
-          <p:cNvSpPr/>
-          <p:nvPr/>
-        </p:nvSpPr>
-        <p:spPr>
-          <a:xfrm>
-            <a:off x="3648222" y="2793027"/>
-            <a:ext cx="1335783" cy="660893"/>
-          </a:xfrm>
-          <a:prstGeom prst="rect">
-            <a:avLst/>
-          </a:prstGeom>
-          <a:solidFill>
-            <a:schemeClr val="accent6">
-              <a:lumMod val="60000"/>
-              <a:lumOff val="40000"/>
-            </a:schemeClr>
-          </a:solidFill>
-        </p:spPr>
-        <p:style>
-          <a:lnRef idx="1">
-            <a:schemeClr val="accent1"/>
-          </a:lnRef>
-          <a:fillRef idx="3">
-            <a:schemeClr val="accent1"/>
-          </a:fillRef>
-          <a:effectRef idx="2">
-            <a:schemeClr val="accent1"/>
-          </a:effectRef>
-          <a:fontRef idx="minor">
-            <a:schemeClr val="lt1"/>
-          </a:fontRef>
-        </p:style>
-        <p:txBody>
-          <a:bodyPr rtlCol="0" anchor="ctr"/>
-          <a:lstStyle/>
-          <a:p>
-            <a:pPr algn="ctr"/>
-            <a:r>
-              <a:rPr lang="en-US" dirty="0"/>
-              <a:t>Link</a:t>
-            </a:r>
-          </a:p>
-        </p:txBody>
-      </p:sp>
-      <p:cxnSp>
-        <p:nvCxnSpPr>
-          <p:cNvPr id="4" name="Straight Arrow Connector 3">
-            <a:extLst>
-              <a:ext uri="{FF2B5EF4-FFF2-40B4-BE49-F238E27FC236}">
-                <a16:creationId xmlns:a16="http://schemas.microsoft.com/office/drawing/2014/main" id="{CE34C447-AEB6-D959-1F54-51CF386DCD12}"/>
-              </a:ext>
-            </a:extLst>
-          </p:cNvPr>
-          <p:cNvCxnSpPr>
-            <a:cxnSpLocks/>
-            <a:stCxn id="2" idx="3"/>
-            <a:endCxn id="3" idx="1"/>
-          </p:cNvCxnSpPr>
-          <p:nvPr/>
-        </p:nvCxnSpPr>
-        <p:spPr>
-          <a:xfrm flipV="1">
-            <a:off x="2623382" y="3123474"/>
-            <a:ext cx="1024840" cy="1"/>
-          </a:xfrm>
-          <a:prstGeom prst="straightConnector1">
-            <a:avLst/>
-          </a:prstGeom>
-          <a:ln>
-            <a:tailEnd type="triangle"/>
-          </a:ln>
-        </p:spPr>
-        <p:style>
-          <a:lnRef idx="2">
-            <a:schemeClr val="accent1"/>
-          </a:lnRef>
-          <a:fillRef idx="0">
-            <a:schemeClr val="accent1"/>
-          </a:fillRef>
-          <a:effectRef idx="1">
-            <a:schemeClr val="accent1"/>
-          </a:effectRef>
-          <a:fontRef idx="minor">
-            <a:schemeClr val="tx1"/>
-          </a:fontRef>
-        </p:style>
-      </p:cxnSp>
-      <p:sp>
-        <p:nvSpPr>
-          <p:cNvPr id="5" name="Rectangle 4">
-            <a:extLst>
-              <a:ext uri="{FF2B5EF4-FFF2-40B4-BE49-F238E27FC236}">
-                <a16:creationId xmlns:a16="http://schemas.microsoft.com/office/drawing/2014/main" id="{468F9EAA-3A2F-7A9C-319D-5FF3F39664FA}"/>
-              </a:ext>
-            </a:extLst>
-          </p:cNvPr>
-          <p:cNvSpPr/>
-          <p:nvPr/>
-        </p:nvSpPr>
-        <p:spPr>
-          <a:xfrm>
-            <a:off x="1287599" y="3784368"/>
-            <a:ext cx="1335783" cy="660893"/>
-          </a:xfrm>
-          <a:prstGeom prst="rect">
-            <a:avLst/>
-          </a:prstGeom>
-          <a:solidFill>
-            <a:schemeClr val="accent3">
-              <a:lumMod val="60000"/>
-              <a:lumOff val="40000"/>
-            </a:schemeClr>
-          </a:solidFill>
-        </p:spPr>
-        <p:style>
-          <a:lnRef idx="1">
-            <a:schemeClr val="accent1"/>
-          </a:lnRef>
-          <a:fillRef idx="3">
-            <a:schemeClr val="accent1"/>
-          </a:fillRef>
-          <a:effectRef idx="2">
-            <a:schemeClr val="accent1"/>
-          </a:effectRef>
-          <a:fontRef idx="minor">
-            <a:schemeClr val="lt1"/>
-          </a:fontRef>
-        </p:style>
-        <p:txBody>
-          <a:bodyPr rtlCol="0" anchor="ctr"/>
-          <a:lstStyle/>
-          <a:p>
-            <a:pPr algn="ctr"/>
-            <a:r>
-              <a:rPr lang="en-US" dirty="0"/>
-              <a:t>Link</a:t>
-            </a:r>
-          </a:p>
-        </p:txBody>
-      </p:sp>
-      <p:sp>
-        <p:nvSpPr>
-          <p:cNvPr id="6" name="Rectangle 5">
-            <a:extLst>
-              <a:ext uri="{FF2B5EF4-FFF2-40B4-BE49-F238E27FC236}">
-                <a16:creationId xmlns:a16="http://schemas.microsoft.com/office/drawing/2014/main" id="{2D226A1A-E890-B4E5-6A59-E246996E5A57}"/>
-              </a:ext>
-            </a:extLst>
-          </p:cNvPr>
-          <p:cNvSpPr/>
-          <p:nvPr/>
-        </p:nvSpPr>
-        <p:spPr>
-          <a:xfrm>
-            <a:off x="3648222" y="3784367"/>
-            <a:ext cx="1335783" cy="660893"/>
-          </a:xfrm>
-          <a:prstGeom prst="rect">
-            <a:avLst/>
-          </a:prstGeom>
-          <a:solidFill>
-            <a:schemeClr val="accent3">
-              <a:lumMod val="60000"/>
-              <a:lumOff val="40000"/>
-            </a:schemeClr>
-          </a:solidFill>
-        </p:spPr>
-        <p:style>
-          <a:lnRef idx="1">
-            <a:schemeClr val="accent1"/>
-          </a:lnRef>
-          <a:fillRef idx="3">
-            <a:schemeClr val="accent1"/>
-          </a:fillRef>
-          <a:effectRef idx="2">
-            <a:schemeClr val="accent1"/>
-          </a:effectRef>
-          <a:fontRef idx="minor">
-            <a:schemeClr val="lt1"/>
-          </a:fontRef>
-        </p:style>
-        <p:txBody>
-          <a:bodyPr rtlCol="0" anchor="ctr"/>
-          <a:lstStyle/>
-          <a:p>
-            <a:pPr algn="ctr"/>
-            <a:r>
-              <a:rPr lang="en-US" dirty="0"/>
-              <a:t>Config</a:t>
-            </a:r>
-          </a:p>
-        </p:txBody>
-      </p:sp>
-      <p:cxnSp>
-        <p:nvCxnSpPr>
-          <p:cNvPr id="7" name="Straight Arrow Connector 6">
-            <a:extLst>
-              <a:ext uri="{FF2B5EF4-FFF2-40B4-BE49-F238E27FC236}">
-                <a16:creationId xmlns:a16="http://schemas.microsoft.com/office/drawing/2014/main" id="{441D4451-C0E8-AEE5-EABC-FAE0654B19C6}"/>
-              </a:ext>
-            </a:extLst>
-          </p:cNvPr>
-          <p:cNvCxnSpPr>
-            <a:cxnSpLocks/>
-            <a:stCxn id="5" idx="3"/>
-            <a:endCxn id="6" idx="1"/>
-          </p:cNvCxnSpPr>
-          <p:nvPr/>
-        </p:nvCxnSpPr>
-        <p:spPr>
-          <a:xfrm flipV="1">
-            <a:off x="2623382" y="4114814"/>
-            <a:ext cx="1024840" cy="1"/>
-          </a:xfrm>
-          <a:prstGeom prst="straightConnector1">
-            <a:avLst/>
-          </a:prstGeom>
-          <a:ln>
-            <a:tailEnd type="triangle"/>
-          </a:ln>
-        </p:spPr>
-        <p:style>
-          <a:lnRef idx="2">
-            <a:schemeClr val="accent1"/>
-          </a:lnRef>
-          <a:fillRef idx="0">
-            <a:schemeClr val="accent1"/>
-          </a:fillRef>
-          <a:effectRef idx="1">
-            <a:schemeClr val="accent1"/>
-          </a:effectRef>
-          <a:fontRef idx="minor">
-            <a:schemeClr val="tx1"/>
-          </a:fontRef>
-        </p:style>
-      </p:cxnSp>
-      <p:sp>
-        <p:nvSpPr>
-          <p:cNvPr id="18" name="TextBox 17">
-            <a:extLst>
-              <a:ext uri="{FF2B5EF4-FFF2-40B4-BE49-F238E27FC236}">
-                <a16:creationId xmlns:a16="http://schemas.microsoft.com/office/drawing/2014/main" id="{9D8C695B-D6A6-EE0B-02C8-8868535739EE}"/>
+                <a16:creationId xmlns:a16="http://schemas.microsoft.com/office/drawing/2014/main" id="{869354A5-7FC0-428B-C1C3-2B6E924F2DF1}"/>
               </a:ext>
             </a:extLst>
           </p:cNvPr>
@@ -7578,8 +7264,8 @@
         </p:nvSpPr>
         <p:spPr>
           <a:xfrm>
-            <a:off x="5619947" y="1991154"/>
-            <a:ext cx="5546661" cy="4247317"/>
+            <a:off x="752191" y="2484302"/>
+            <a:ext cx="7064454" cy="2585323"/>
           </a:xfrm>
           <a:prstGeom prst="rect">
             <a:avLst/>
@@ -7592,41 +7278,21 @@
           </a:bodyPr>
           <a:lstStyle/>
           <a:p>
-            <a:r>
-              <a:rPr lang="en-US" dirty="0"/>
-              <a:t>Principle: set up target device specific links to exchange target device specific configurations</a:t>
-            </a:r>
-          </a:p>
-          <a:p>
-            <a:endParaRPr lang="en-US" dirty="0"/>
-          </a:p>
-          <a:p>
-            <a:r>
-              <a:rPr lang="en-US" dirty="0"/>
-              <a:t>Concept: set up the link and use it to transfer the configuration in one go</a:t>
-            </a:r>
-          </a:p>
-          <a:p>
-            <a:endParaRPr lang="en-US" dirty="0"/>
-          </a:p>
-          <a:p>
-            <a:r>
-              <a:rPr lang="en-US" dirty="0"/>
-              <a:t>Humans:</a:t>
-            </a:r>
-          </a:p>
-          <a:p>
             <a:pPr marL="285750" indent="-285750">
               <a:buFontTx/>
               <a:buChar char="-"/>
             </a:pPr>
             <a:r>
-              <a:rPr lang="en-US" dirty="0"/>
-              <a:t>What is your name? </a:t>
-            </a:r>
-            <a:r>
-              <a:rPr lang="en-US" sz="1400" dirty="0"/>
-              <a:t>(serial nr.)</a:t>
+              <a:rPr lang="en-US" sz="1600" dirty="0"/>
+              <a:t>Acts as the brain of the system (</a:t>
+            </a:r>
+            <a:r>
+              <a:rPr lang="en-US" sz="1600" i="1" dirty="0"/>
+              <a:t>‘spider in the web’</a:t>
+            </a:r>
+            <a:r>
+              <a:rPr lang="en-US" sz="1600" dirty="0"/>
+              <a:t>)</a:t>
             </a:r>
           </a:p>
           <a:p>
@@ -7635,12 +7301,8 @@
               <a:buChar char="-"/>
             </a:pPr>
             <a:r>
-              <a:rPr lang="en-US" dirty="0"/>
-              <a:t>My name is Roberto </a:t>
-            </a:r>
-            <a:r>
-              <a:rPr lang="en-US" sz="1400" dirty="0"/>
-              <a:t>(00fa0000001)</a:t>
+              <a:rPr lang="en-US" sz="1600" dirty="0"/>
+              <a:t>In practice: not an end-device, no physical interface onboard</a:t>
             </a:r>
           </a:p>
           <a:p>
@@ -7649,8 +7311,36 @@
               <a:buChar char="-"/>
             </a:pPr>
             <a:r>
-              <a:rPr lang="en-US" dirty="0"/>
-              <a:t>Okay listen Roberto, this:… is what I need you to do</a:t>
+              <a:rPr lang="en-US" sz="1600" dirty="0"/>
+              <a:t>Two operation modes:</a:t>
+            </a:r>
+          </a:p>
+          <a:p>
+            <a:pPr marL="895335" lvl="1" indent="-285750">
+              <a:buFontTx/>
+              <a:buChar char="-"/>
+            </a:pPr>
+            <a:r>
+              <a:rPr lang="en-US" sz="1600" b="1" dirty="0"/>
+              <a:t>Sun Mode</a:t>
+            </a:r>
+            <a:r>
+              <a:rPr lang="en-US" sz="1600" dirty="0"/>
+              <a:t>: EV charges only if present renewable energy ≥ 4 kW</a:t>
+            </a:r>
+          </a:p>
+          <a:p>
+            <a:pPr marL="895335" lvl="1" indent="-285750">
+              <a:buFontTx/>
+              <a:buChar char="-"/>
+            </a:pPr>
+            <a:r>
+              <a:rPr lang="en-US" sz="1600" b="1" dirty="0"/>
+              <a:t>Mix Mode</a:t>
+            </a:r>
+            <a:r>
+              <a:rPr lang="en-US" sz="1600" dirty="0"/>
+              <a:t>: EV charges at 4 kW regardless of present renewable energy</a:t>
             </a:r>
           </a:p>
           <a:p>
@@ -7659,14 +7349,9 @@
               <a:buChar char="-"/>
             </a:pPr>
             <a:r>
-              <a:rPr lang="en-US" dirty="0"/>
-              <a:t>And what is your name? </a:t>
-            </a:r>
-            <a:r>
-              <a:rPr lang="en-US" sz="1400" dirty="0"/>
-              <a:t>(serial nr.)</a:t>
-            </a:r>
-            <a:endParaRPr lang="en-US" dirty="0"/>
+              <a:rPr lang="en-US" sz="1600" dirty="0"/>
+              <a:t>Calculates and sends out the appropriate charging rate</a:t>
+            </a:r>
           </a:p>
           <a:p>
             <a:pPr marL="285750" indent="-285750">
@@ -7674,47 +7359,76 @@
               <a:buChar char="-"/>
             </a:pPr>
             <a:r>
-              <a:rPr lang="en-US" dirty="0"/>
-              <a:t>My name is Latha </a:t>
-            </a:r>
-            <a:r>
-              <a:rPr lang="en-US" sz="1400" dirty="0"/>
-              <a:t>(00fa0000002)</a:t>
-            </a:r>
-          </a:p>
-          <a:p>
-            <a:pPr marL="285750" indent="-285750">
+              <a:rPr lang="en-US" sz="1600" dirty="0"/>
+              <a:t>Comes with client features:</a:t>
+            </a:r>
+          </a:p>
+          <a:p>
+            <a:pPr marL="895335" lvl="1" indent="-285750">
               <a:buFontTx/>
               <a:buChar char="-"/>
             </a:pPr>
             <a:r>
-              <a:rPr lang="en-US" dirty="0"/>
-              <a:t>Okay listen Latha, this:… is what I need you to do</a:t>
-            </a:r>
-          </a:p>
-          <a:p>
-            <a:pPr marL="285750" indent="-285750">
+              <a:rPr lang="en-US" sz="1600" dirty="0"/>
+              <a:t>Read-in device certificates (QR)</a:t>
+            </a:r>
+          </a:p>
+          <a:p>
+            <a:pPr marL="895335" lvl="1" indent="-285750">
               <a:buFontTx/>
               <a:buChar char="-"/>
             </a:pPr>
             <a:r>
-              <a:rPr lang="en-US" dirty="0"/>
-              <a:t>…</a:t>
-            </a:r>
-          </a:p>
-          <a:p>
-            <a:pPr marL="285750" indent="-285750">
+              <a:rPr lang="en-US" sz="1600" dirty="0"/>
+              <a:t>Device scanning over the medium (serial numbers)</a:t>
+            </a:r>
+          </a:p>
+          <a:p>
+            <a:pPr marL="895335" lvl="1" indent="-285750">
               <a:buFontTx/>
               <a:buChar char="-"/>
             </a:pPr>
-            <a:endParaRPr lang="en-US" dirty="0"/>
+            <a:r>
+              <a:rPr lang="en-US" sz="1600" dirty="0"/>
+              <a:t>Linking (commissioning)</a:t>
+            </a:r>
           </a:p>
         </p:txBody>
       </p:sp>
+      <p:pic>
+        <p:nvPicPr>
+          <p:cNvPr id="4" name="Picture 3">
+            <a:extLst>
+              <a:ext uri="{FF2B5EF4-FFF2-40B4-BE49-F238E27FC236}">
+                <a16:creationId xmlns:a16="http://schemas.microsoft.com/office/drawing/2014/main" id="{7575717B-5B3C-634B-C969-865B5A14C6EA}"/>
+              </a:ext>
+            </a:extLst>
+          </p:cNvPr>
+          <p:cNvPicPr>
+            <a:picLocks noChangeAspect="1"/>
+          </p:cNvPicPr>
+          <p:nvPr/>
+        </p:nvPicPr>
+        <p:blipFill>
+          <a:blip r:embed="rId4"/>
+          <a:stretch>
+            <a:fillRect/>
+          </a:stretch>
+        </p:blipFill>
+        <p:spPr>
+          <a:xfrm>
+            <a:off x="8089735" y="2004938"/>
+            <a:ext cx="3080692" cy="3139321"/>
+          </a:xfrm>
+          <a:prstGeom prst="rect">
+            <a:avLst/>
+          </a:prstGeom>
+        </p:spPr>
+      </p:pic>
     </p:spTree>
     <p:extLst>
       <p:ext uri="{BB962C8B-B14F-4D97-AF65-F5344CB8AC3E}">
-        <p14:creationId xmlns:p14="http://schemas.microsoft.com/office/powerpoint/2010/main" val="1237772488"/>
+        <p14:creationId xmlns:p14="http://schemas.microsoft.com/office/powerpoint/2010/main" val="1904208195"/>
       </p:ext>
     </p:extLst>
   </p:cSld>
@@ -8526,7 +8240,7 @@
         <p:spPr>
           <a:xfrm>
             <a:off x="1128810" y="2036668"/>
-            <a:ext cx="4966395" cy="4247317"/>
+            <a:ext cx="4966395" cy="3970318"/>
           </a:xfrm>
           <a:prstGeom prst="rect">
             <a:avLst/>
@@ -8558,7 +8272,7 @@
             </a:pPr>
             <a:r>
               <a:rPr lang="en-US" dirty="0"/>
-              <a:t>3 datapoints</a:t>
+              <a:t>2 datapoints</a:t>
             </a:r>
           </a:p>
           <a:p>
@@ -8623,28 +8337,6 @@
             <a:r>
               <a:rPr lang="en-US" dirty="0"/>
               <a:t> : /p/charger = requested charge rate</a:t>
-            </a:r>
-          </a:p>
-          <a:p>
-            <a:pPr marL="895335" lvl="1" indent="-285750">
-              <a:buFontTx/>
-              <a:buChar char="-"/>
-            </a:pPr>
-            <a:r>
-              <a:rPr lang="en-US" dirty="0" err="1"/>
-              <a:t>url</a:t>
-            </a:r>
-            <a:r>
-              <a:rPr lang="en-US" dirty="0"/>
-              <a:t> : </a:t>
-            </a:r>
-            <a:r>
-              <a:rPr lang="en-US" dirty="0">
-                <a:solidFill>
-                  <a:srgbClr val="FF0000"/>
-                </a:solidFill>
-              </a:rPr>
-              <a:t>/p/link = configuration link</a:t>
             </a:r>
           </a:p>
           <a:p>
@@ -8695,7 +8387,7 @@
             </a:pPr>
             <a:r>
               <a:rPr lang="en-US" dirty="0"/>
-              <a:t>‘Enter Serial Number’: What is your name?</a:t>
+              <a:t>‘Enter Serial Number’: ???</a:t>
             </a:r>
           </a:p>
           <a:p>
@@ -8709,10 +8401,10 @@
       </p:sp>
       <p:pic>
         <p:nvPicPr>
-          <p:cNvPr id="3" name="Picture 2">
+          <p:cNvPr id="4" name="Picture 3">
             <a:extLst>
               <a:ext uri="{FF2B5EF4-FFF2-40B4-BE49-F238E27FC236}">
-                <a16:creationId xmlns:a16="http://schemas.microsoft.com/office/drawing/2014/main" id="{254052B8-D1C0-6F27-57C5-4C37C8DA625B}"/>
+                <a16:creationId xmlns:a16="http://schemas.microsoft.com/office/drawing/2014/main" id="{9E2BC3CD-0145-15DB-A4A4-D9CE32BDB594}"/>
               </a:ext>
             </a:extLst>
           </p:cNvPr>
@@ -8729,8 +8421,8 @@
         </p:blipFill>
         <p:spPr>
           <a:xfrm>
-            <a:off x="7605564" y="785167"/>
-            <a:ext cx="4108661" cy="5181866"/>
+            <a:off x="6891075" y="1925383"/>
+            <a:ext cx="3670489" cy="3740342"/>
           </a:xfrm>
           <a:prstGeom prst="rect">
             <a:avLst/>
@@ -8758,7 +8450,7 @@
         <p:cNvPr id="1" name="">
           <a:extLst>
             <a:ext uri="{FF2B5EF4-FFF2-40B4-BE49-F238E27FC236}">
-              <a16:creationId xmlns:a16="http://schemas.microsoft.com/office/drawing/2014/main" id="{F317A602-CD02-D30C-9545-5EE229279F96}"/>
+              <a16:creationId xmlns:a16="http://schemas.microsoft.com/office/drawing/2014/main" id="{CDA21410-BFB4-8643-5EBD-DEFCDECB030E}"/>
             </a:ext>
           </a:extLst>
         </p:cNvPr>
@@ -8778,7 +8470,7 @@
           <p:cNvPr id="4098" name="Picture 3">
             <a:extLst>
               <a:ext uri="{FF2B5EF4-FFF2-40B4-BE49-F238E27FC236}">
-                <a16:creationId xmlns:a16="http://schemas.microsoft.com/office/drawing/2014/main" id="{124E7DE2-3C1F-452E-57D8-FBB85C4C0B4B}"/>
+                <a16:creationId xmlns:a16="http://schemas.microsoft.com/office/drawing/2014/main" id="{9F8CE499-F27D-7A66-525A-F0843B9F4926}"/>
               </a:ext>
             </a:extLst>
           </p:cNvPr>
@@ -8838,7 +8530,7 @@
           <p:cNvPr id="11" name="Rectángulo 17">
             <a:extLst>
               <a:ext uri="{FF2B5EF4-FFF2-40B4-BE49-F238E27FC236}">
-                <a16:creationId xmlns:a16="http://schemas.microsoft.com/office/drawing/2014/main" id="{8D50916B-7595-8869-9984-3535918660BB}"/>
+                <a16:creationId xmlns:a16="http://schemas.microsoft.com/office/drawing/2014/main" id="{A1C948D0-11A7-8BAE-E65D-11DBB9E44744}"/>
               </a:ext>
             </a:extLst>
           </p:cNvPr>
@@ -9000,7 +8692,7 @@
           <p:cNvPr id="13" name="TextBox 7">
             <a:extLst>
               <a:ext uri="{FF2B5EF4-FFF2-40B4-BE49-F238E27FC236}">
-                <a16:creationId xmlns:a16="http://schemas.microsoft.com/office/drawing/2014/main" id="{8886B22A-BAFE-0FDC-DF04-6D124AAFCA58}"/>
+                <a16:creationId xmlns:a16="http://schemas.microsoft.com/office/drawing/2014/main" id="{37EC8D4F-8713-5528-5114-76A2C62B211D}"/>
               </a:ext>
             </a:extLst>
           </p:cNvPr>
@@ -9174,7 +8866,7 @@
           <p:cNvPr id="4101" name="Imagen 21" descr="Worldmap.jpg">
             <a:extLst>
               <a:ext uri="{FF2B5EF4-FFF2-40B4-BE49-F238E27FC236}">
-                <a16:creationId xmlns:a16="http://schemas.microsoft.com/office/drawing/2014/main" id="{137C7BEA-BA01-6456-1AF0-A4214B5E5BC2}"/>
+                <a16:creationId xmlns:a16="http://schemas.microsoft.com/office/drawing/2014/main" id="{B6355047-4C81-4891-E818-35EEBD85F43A}"/>
               </a:ext>
             </a:extLst>
           </p:cNvPr>
@@ -9234,7 +8926,7 @@
           <p:cNvPr id="4102" name="TextBox 11">
             <a:extLst>
               <a:ext uri="{FF2B5EF4-FFF2-40B4-BE49-F238E27FC236}">
-                <a16:creationId xmlns:a16="http://schemas.microsoft.com/office/drawing/2014/main" id="{2CE659EA-88EF-F37B-B000-4D3E6F290302}"/>
+                <a16:creationId xmlns:a16="http://schemas.microsoft.com/office/drawing/2014/main" id="{98993E0E-FEB1-89E8-7940-42B21456C5C8}"/>
               </a:ext>
             </a:extLst>
           </p:cNvPr>
@@ -9471,7 +9163,7 @@
           <p:cNvPr id="15" name="TextBox 14">
             <a:extLst>
               <a:ext uri="{FF2B5EF4-FFF2-40B4-BE49-F238E27FC236}">
-                <a16:creationId xmlns:a16="http://schemas.microsoft.com/office/drawing/2014/main" id="{566D06C0-D8E7-2446-D3E9-44D493A7B071}"/>
+                <a16:creationId xmlns:a16="http://schemas.microsoft.com/office/drawing/2014/main" id="{88134337-C8D5-51DD-32C0-D6D1CBD32786}"/>
               </a:ext>
             </a:extLst>
           </p:cNvPr>
@@ -9505,7 +9197,7 @@
                 <a:latin typeface="Gotham Medium"/>
                 <a:cs typeface="Gotham Medium"/>
               </a:rPr>
-              <a:t>PV app: how to link?</a:t>
+              <a:t>Linking: initial situation</a:t>
             </a:r>
             <a:endParaRPr lang="en-US" sz="2800" dirty="0"/>
           </a:p>
@@ -9537,187 +9229,12 @@
           </a:p>
         </p:txBody>
       </p:sp>
-      <p:sp>
-        <p:nvSpPr>
-          <p:cNvPr id="16" name="TextBox 15">
+      <p:pic>
+        <p:nvPicPr>
+          <p:cNvPr id="3" name="Picture 2">
             <a:extLst>
               <a:ext uri="{FF2B5EF4-FFF2-40B4-BE49-F238E27FC236}">
-                <a16:creationId xmlns:a16="http://schemas.microsoft.com/office/drawing/2014/main" id="{5088239F-31D7-8928-017D-AEE12FAFEE26}"/>
-              </a:ext>
-            </a:extLst>
-          </p:cNvPr>
-          <p:cNvSpPr txBox="1"/>
-          <p:nvPr/>
-        </p:nvSpPr>
-        <p:spPr>
-          <a:xfrm>
-            <a:off x="6658604" y="2063105"/>
-            <a:ext cx="4841336" cy="3693319"/>
-          </a:xfrm>
-          <a:prstGeom prst="rect">
-            <a:avLst/>
-          </a:prstGeom>
-          <a:noFill/>
-        </p:spPr>
-        <p:txBody>
-          <a:bodyPr wrap="square">
-            <a:spAutoFit/>
-          </a:bodyPr>
-          <a:lstStyle/>
-          <a:p>
-            <a:r>
-              <a:rPr lang="en-US" dirty="0"/>
-              <a:t>Technical details:</a:t>
-            </a:r>
-          </a:p>
-          <a:p>
-            <a:pPr marL="285750" indent="-285750">
-              <a:buFontTx/>
-              <a:buChar char="-"/>
-            </a:pPr>
-            <a:endParaRPr lang="en-US" dirty="0"/>
-          </a:p>
-          <a:p>
-            <a:pPr marL="285750" indent="-285750">
-              <a:buFontTx/>
-              <a:buChar char="-"/>
-            </a:pPr>
-            <a:r>
-              <a:rPr lang="en-US" dirty="0"/>
-              <a:t>2 datapoints</a:t>
-            </a:r>
-          </a:p>
-          <a:p>
-            <a:pPr marL="895335" lvl="1" indent="-285750">
-              <a:buFontTx/>
-              <a:buChar char="-"/>
-            </a:pPr>
-            <a:r>
-              <a:rPr lang="en-US" dirty="0" err="1"/>
-              <a:t>cflags</a:t>
-            </a:r>
-            <a:r>
-              <a:rPr lang="en-US" dirty="0"/>
-              <a:t> = t : transmit to medium</a:t>
-            </a:r>
-          </a:p>
-          <a:p>
-            <a:pPr marL="895335" lvl="1" indent="-285750">
-              <a:buFontTx/>
-              <a:buChar char="-"/>
-            </a:pPr>
-            <a:r>
-              <a:rPr lang="en-US" dirty="0" err="1"/>
-              <a:t>cflags</a:t>
-            </a:r>
-            <a:r>
-              <a:rPr lang="en-US" dirty="0"/>
-              <a:t> = w : write from medium</a:t>
-            </a:r>
-          </a:p>
-          <a:p>
-            <a:pPr marL="895335" lvl="1" indent="-285750">
-              <a:buFontTx/>
-              <a:buChar char="-"/>
-            </a:pPr>
-            <a:r>
-              <a:rPr lang="en-US" dirty="0" err="1"/>
-              <a:t>url</a:t>
-            </a:r>
-            <a:r>
-              <a:rPr lang="en-US" dirty="0"/>
-              <a:t> : /p/</a:t>
-            </a:r>
-            <a:r>
-              <a:rPr lang="en-US" dirty="0" err="1"/>
-              <a:t>pv</a:t>
-            </a:r>
-            <a:r>
-              <a:rPr lang="en-US" dirty="0"/>
-              <a:t> = present renewable energy</a:t>
-            </a:r>
-          </a:p>
-          <a:p>
-            <a:pPr marL="895335" lvl="1" indent="-285750">
-              <a:buFontTx/>
-              <a:buChar char="-"/>
-            </a:pPr>
-            <a:r>
-              <a:rPr lang="en-US" dirty="0" err="1"/>
-              <a:t>url</a:t>
-            </a:r>
-            <a:r>
-              <a:rPr lang="en-US" dirty="0"/>
-              <a:t> : </a:t>
-            </a:r>
-            <a:r>
-              <a:rPr lang="en-US" dirty="0">
-                <a:solidFill>
-                  <a:srgbClr val="FF0000"/>
-                </a:solidFill>
-              </a:rPr>
-              <a:t>/p/CEM = configuration link</a:t>
-            </a:r>
-          </a:p>
-          <a:p>
-            <a:pPr marL="285750" indent="-285750">
-              <a:buFontTx/>
-              <a:buChar char="-"/>
-            </a:pPr>
-            <a:endParaRPr lang="en-US" dirty="0"/>
-          </a:p>
-          <a:p>
-            <a:pPr marL="285750" indent="-285750">
-              <a:buFontTx/>
-              <a:buChar char="-"/>
-            </a:pPr>
-            <a:r>
-              <a:rPr lang="en-US" dirty="0"/>
-              <a:t>IPv6 multicast: groups the devices</a:t>
-            </a:r>
-          </a:p>
-          <a:p>
-            <a:pPr marL="285750" indent="-285750">
-              <a:buFontTx/>
-              <a:buChar char="-"/>
-            </a:pPr>
-            <a:endParaRPr lang="en-US" dirty="0"/>
-          </a:p>
-          <a:p>
-            <a:pPr marL="285750" indent="-285750">
-              <a:buFontTx/>
-              <a:buChar char="-"/>
-            </a:pPr>
-            <a:r>
-              <a:rPr lang="en-US" dirty="0"/>
-              <a:t>OSCORE: protection of the exchanged data</a:t>
-            </a:r>
-          </a:p>
-          <a:p>
-            <a:pPr marL="285750" indent="-285750">
-              <a:buFontTx/>
-              <a:buChar char="-"/>
-            </a:pPr>
-            <a:endParaRPr lang="en-US" dirty="0"/>
-          </a:p>
-          <a:p>
-            <a:pPr marL="285750" indent="-285750">
-              <a:buFontTx/>
-              <a:buChar char="-"/>
-            </a:pPr>
-            <a:r>
-              <a:rPr lang="en-US" dirty="0"/>
-              <a:t>‘Copy Serial Number’: My name is…</a:t>
-            </a:r>
-          </a:p>
-        </p:txBody>
-      </p:sp>
-      <p:pic>
-        <p:nvPicPr>
-          <p:cNvPr id="6" name="Picture 5">
-            <a:extLst>
-              <a:ext uri="{FF2B5EF4-FFF2-40B4-BE49-F238E27FC236}">
-                <a16:creationId xmlns:a16="http://schemas.microsoft.com/office/drawing/2014/main" id="{AAA1A920-9C47-39A6-A0B1-22388F2A908E}"/>
+                <a16:creationId xmlns:a16="http://schemas.microsoft.com/office/drawing/2014/main" id="{61AF75F1-0836-68EB-0158-7453CA9E3191}"/>
               </a:ext>
             </a:extLst>
           </p:cNvPr>
@@ -9734,24 +9251,203 @@
         </p:blipFill>
         <p:spPr>
           <a:xfrm>
-            <a:off x="1580944" y="2063105"/>
-            <a:ext cx="4108661" cy="3664138"/>
+            <a:off x="777474" y="1979977"/>
+            <a:ext cx="9805969" cy="4117787"/>
           </a:xfrm>
           <a:prstGeom prst="rect">
             <a:avLst/>
           </a:prstGeom>
         </p:spPr>
       </p:pic>
+      <p:sp>
+        <p:nvSpPr>
+          <p:cNvPr id="6" name="Arrow: Left 5">
+            <a:extLst>
+              <a:ext uri="{FF2B5EF4-FFF2-40B4-BE49-F238E27FC236}">
+                <a16:creationId xmlns:a16="http://schemas.microsoft.com/office/drawing/2014/main" id="{B9516786-D08B-D30B-C9F6-7104E5DED593}"/>
+              </a:ext>
+            </a:extLst>
+          </p:cNvPr>
+          <p:cNvSpPr/>
+          <p:nvPr/>
+        </p:nvSpPr>
+        <p:spPr>
+          <a:xfrm rot="19500999">
+            <a:off x="2322917" y="2188657"/>
+            <a:ext cx="2112776" cy="698579"/>
+          </a:xfrm>
+          <a:prstGeom prst="leftArrow">
+            <a:avLst/>
+          </a:prstGeom>
+          <a:solidFill>
+            <a:srgbClr val="FFC000"/>
+          </a:solidFill>
+          <a:ln>
+            <a:solidFill>
+              <a:schemeClr val="tx1"/>
+            </a:solidFill>
+          </a:ln>
+        </p:spPr>
+        <p:style>
+          <a:lnRef idx="1">
+            <a:schemeClr val="accent1"/>
+          </a:lnRef>
+          <a:fillRef idx="3">
+            <a:schemeClr val="accent1"/>
+          </a:fillRef>
+          <a:effectRef idx="2">
+            <a:schemeClr val="accent1"/>
+          </a:effectRef>
+          <a:fontRef idx="minor">
+            <a:schemeClr val="lt1"/>
+          </a:fontRef>
+        </p:style>
+        <p:txBody>
+          <a:bodyPr rtlCol="0" anchor="ctr"/>
+          <a:lstStyle/>
+          <a:p>
+            <a:pPr algn="ctr"/>
+            <a:r>
+              <a:rPr lang="en-US" dirty="0"/>
+              <a:t>click</a:t>
+            </a:r>
+          </a:p>
+        </p:txBody>
+      </p:sp>
     </p:spTree>
     <p:extLst>
       <p:ext uri="{BB962C8B-B14F-4D97-AF65-F5344CB8AC3E}">
-        <p14:creationId xmlns:p14="http://schemas.microsoft.com/office/powerpoint/2010/main" val="2891044113"/>
+        <p14:creationId xmlns:p14="http://schemas.microsoft.com/office/powerpoint/2010/main" val="4182291103"/>
       </p:ext>
     </p:extLst>
   </p:cSld>
   <p:clrMapOvr>
     <a:masterClrMapping/>
   </p:clrMapOvr>
+  <p:timing>
+    <p:tnLst>
+      <p:par>
+        <p:cTn id="1" dur="indefinite" restart="never" nodeType="tmRoot">
+          <p:childTnLst>
+            <p:seq concurrent="1" nextAc="seek">
+              <p:cTn id="2" dur="indefinite" nodeType="mainSeq">
+                <p:childTnLst>
+                  <p:par>
+                    <p:cTn id="3" fill="hold">
+                      <p:stCondLst>
+                        <p:cond delay="indefinite"/>
+                      </p:stCondLst>
+                      <p:childTnLst>
+                        <p:par>
+                          <p:cTn id="4" fill="hold">
+                            <p:stCondLst>
+                              <p:cond delay="0"/>
+                            </p:stCondLst>
+                            <p:childTnLst>
+                              <p:par>
+                                <p:cTn id="5" presetID="2" presetClass="entr" presetSubtype="4" fill="hold" grpId="0" nodeType="clickEffect">
+                                  <p:stCondLst>
+                                    <p:cond delay="0"/>
+                                  </p:stCondLst>
+                                  <p:childTnLst>
+                                    <p:set>
+                                      <p:cBhvr>
+                                        <p:cTn id="6" dur="1" fill="hold">
+                                          <p:stCondLst>
+                                            <p:cond delay="0"/>
+                                          </p:stCondLst>
+                                        </p:cTn>
+                                        <p:tgtEl>
+                                          <p:spTgt spid="6"/>
+                                        </p:tgtEl>
+                                        <p:attrNameLst>
+                                          <p:attrName>style.visibility</p:attrName>
+                                        </p:attrNameLst>
+                                      </p:cBhvr>
+                                      <p:to>
+                                        <p:strVal val="visible"/>
+                                      </p:to>
+                                    </p:set>
+                                    <p:anim calcmode="lin" valueType="num">
+                                      <p:cBhvr additive="base">
+                                        <p:cTn id="7" dur="500" fill="hold"/>
+                                        <p:tgtEl>
+                                          <p:spTgt spid="6"/>
+                                        </p:tgtEl>
+                                        <p:attrNameLst>
+                                          <p:attrName>ppt_x</p:attrName>
+                                        </p:attrNameLst>
+                                      </p:cBhvr>
+                                      <p:tavLst>
+                                        <p:tav tm="0">
+                                          <p:val>
+                                            <p:strVal val="#ppt_x"/>
+                                          </p:val>
+                                        </p:tav>
+                                        <p:tav tm="100000">
+                                          <p:val>
+                                            <p:strVal val="#ppt_x"/>
+                                          </p:val>
+                                        </p:tav>
+                                      </p:tavLst>
+                                    </p:anim>
+                                    <p:anim calcmode="lin" valueType="num">
+                                      <p:cBhvr additive="base">
+                                        <p:cTn id="8" dur="500" fill="hold"/>
+                                        <p:tgtEl>
+                                          <p:spTgt spid="6"/>
+                                        </p:tgtEl>
+                                        <p:attrNameLst>
+                                          <p:attrName>ppt_y</p:attrName>
+                                        </p:attrNameLst>
+                                      </p:cBhvr>
+                                      <p:tavLst>
+                                        <p:tav tm="0">
+                                          <p:val>
+                                            <p:strVal val="1+#ppt_h/2"/>
+                                          </p:val>
+                                        </p:tav>
+                                        <p:tav tm="100000">
+                                          <p:val>
+                                            <p:strVal val="#ppt_y"/>
+                                          </p:val>
+                                        </p:tav>
+                                      </p:tavLst>
+                                    </p:anim>
+                                  </p:childTnLst>
+                                </p:cTn>
+                              </p:par>
+                            </p:childTnLst>
+                          </p:cTn>
+                        </p:par>
+                      </p:childTnLst>
+                    </p:cTn>
+                  </p:par>
+                </p:childTnLst>
+              </p:cTn>
+              <p:prevCondLst>
+                <p:cond evt="onPrev" delay="0">
+                  <p:tgtEl>
+                    <p:sldTgt/>
+                  </p:tgtEl>
+                </p:cond>
+              </p:prevCondLst>
+              <p:nextCondLst>
+                <p:cond evt="onNext" delay="0">
+                  <p:tgtEl>
+                    <p:sldTgt/>
+                  </p:tgtEl>
+                </p:cond>
+              </p:nextCondLst>
+            </p:seq>
+          </p:childTnLst>
+        </p:cTn>
+      </p:par>
+    </p:tnLst>
+    <p:bldLst>
+      <p:bldP spid="6" grpId="0" animBg="1"/>
+    </p:bldLst>
+  </p:timing>
 </p:sld>
 </file>
 
@@ -9763,7 +9459,7 @@
         <p:cNvPr id="1" name="">
           <a:extLst>
             <a:ext uri="{FF2B5EF4-FFF2-40B4-BE49-F238E27FC236}">
-              <a16:creationId xmlns:a16="http://schemas.microsoft.com/office/drawing/2014/main" id="{9558D97F-C278-B990-29E2-6C60CC319048}"/>
+              <a16:creationId xmlns:a16="http://schemas.microsoft.com/office/drawing/2014/main" id="{57CC0509-D06E-8D81-947B-D3443DD07665}"/>
             </a:ext>
           </a:extLst>
         </p:cNvPr>
@@ -9780,10 +9476,10 @@
       </p:grpSpPr>
       <p:pic>
         <p:nvPicPr>
-          <p:cNvPr id="4098" name="Picture 3">
+          <p:cNvPr id="4" name="Picture 3">
             <a:extLst>
               <a:ext uri="{FF2B5EF4-FFF2-40B4-BE49-F238E27FC236}">
-                <a16:creationId xmlns:a16="http://schemas.microsoft.com/office/drawing/2014/main" id="{794714D3-D210-458D-20AE-369513C2831E}"/>
+                <a16:creationId xmlns:a16="http://schemas.microsoft.com/office/drawing/2014/main" id="{CC78297F-7DA5-2DFD-F9F9-03DA01754A85}"/>
               </a:ext>
             </a:extLst>
           </p:cNvPr>
@@ -9793,7 +9489,37 @@
           <p:nvPr/>
         </p:nvPicPr>
         <p:blipFill>
-          <a:blip r:embed="rId2" cstate="screen">
+          <a:blip r:embed="rId2"/>
+          <a:stretch>
+            <a:fillRect/>
+          </a:stretch>
+        </p:blipFill>
+        <p:spPr>
+          <a:xfrm>
+            <a:off x="783613" y="1852344"/>
+            <a:ext cx="10084318" cy="4210266"/>
+          </a:xfrm>
+          <a:prstGeom prst="rect">
+            <a:avLst/>
+          </a:prstGeom>
+        </p:spPr>
+      </p:pic>
+      <p:pic>
+        <p:nvPicPr>
+          <p:cNvPr id="4098" name="Picture 3">
+            <a:extLst>
+              <a:ext uri="{FF2B5EF4-FFF2-40B4-BE49-F238E27FC236}">
+                <a16:creationId xmlns:a16="http://schemas.microsoft.com/office/drawing/2014/main" id="{BA4D41D3-8C53-5A56-928E-6EC9141B11CA}"/>
+              </a:ext>
+            </a:extLst>
+          </p:cNvPr>
+          <p:cNvPicPr>
+            <a:picLocks noChangeAspect="1"/>
+          </p:cNvPicPr>
+          <p:nvPr/>
+        </p:nvPicPr>
+        <p:blipFill>
+          <a:blip r:embed="rId3" cstate="screen">
             <a:extLst>
               <a:ext uri="{28A0092B-C50C-407E-A947-70E740481C1C}">
                 <a14:useLocalDpi xmlns:a14="http://schemas.microsoft.com/office/drawing/2010/main"/>
@@ -9843,7 +9569,7 @@
           <p:cNvPr id="11" name="Rectángulo 17">
             <a:extLst>
               <a:ext uri="{FF2B5EF4-FFF2-40B4-BE49-F238E27FC236}">
-                <a16:creationId xmlns:a16="http://schemas.microsoft.com/office/drawing/2014/main" id="{AC61C499-CAB5-DD08-920A-892EB7639F9D}"/>
+                <a16:creationId xmlns:a16="http://schemas.microsoft.com/office/drawing/2014/main" id="{CEF21899-D994-7CE0-B764-3C6F13724BD5}"/>
               </a:ext>
             </a:extLst>
           </p:cNvPr>
@@ -10005,7 +9731,7 @@
           <p:cNvPr id="13" name="TextBox 7">
             <a:extLst>
               <a:ext uri="{FF2B5EF4-FFF2-40B4-BE49-F238E27FC236}">
-                <a16:creationId xmlns:a16="http://schemas.microsoft.com/office/drawing/2014/main" id="{211C0584-1437-B86A-AB83-659A01DAC46C}"/>
+                <a16:creationId xmlns:a16="http://schemas.microsoft.com/office/drawing/2014/main" id="{242C09BC-65A9-2E02-298C-B0E777C4D1A9}"/>
               </a:ext>
             </a:extLst>
           </p:cNvPr>
@@ -10179,7 +9905,1995 @@
           <p:cNvPr id="4101" name="Imagen 21" descr="Worldmap.jpg">
             <a:extLst>
               <a:ext uri="{FF2B5EF4-FFF2-40B4-BE49-F238E27FC236}">
-                <a16:creationId xmlns:a16="http://schemas.microsoft.com/office/drawing/2014/main" id="{D312D97F-C887-C6A9-E33A-FF751F78F927}"/>
+                <a16:creationId xmlns:a16="http://schemas.microsoft.com/office/drawing/2014/main" id="{8F020428-F255-872B-0BDB-BBA958987C50}"/>
+              </a:ext>
+            </a:extLst>
+          </p:cNvPr>
+          <p:cNvPicPr>
+            <a:picLocks noChangeAspect="1"/>
+          </p:cNvPicPr>
+          <p:nvPr/>
+        </p:nvPicPr>
+        <p:blipFill>
+          <a:blip r:embed="rId4" cstate="screen">
+            <a:extLst>
+              <a:ext uri="{28A0092B-C50C-407E-A947-70E740481C1C}">
+                <a14:useLocalDpi xmlns:a14="http://schemas.microsoft.com/office/drawing/2010/main"/>
+              </a:ext>
+            </a:extLst>
+          </a:blip>
+          <a:srcRect/>
+          <a:stretch>
+            <a:fillRect/>
+          </a:stretch>
+        </p:blipFill>
+        <p:spPr bwMode="auto">
+          <a:xfrm>
+            <a:off x="10926927" y="6340890"/>
+            <a:ext cx="1149200" cy="488886"/>
+          </a:xfrm>
+          <a:prstGeom prst="rect">
+            <a:avLst/>
+          </a:prstGeom>
+          <a:noFill/>
+          <a:ln>
+            <a:noFill/>
+          </a:ln>
+          <a:extLst>
+            <a:ext uri="{909E8E84-426E-40DD-AFC4-6F175D3DCCD1}">
+              <a14:hiddenFill xmlns:a14="http://schemas.microsoft.com/office/drawing/2010/main">
+                <a:solidFill>
+                  <a:srgbClr val="FFFFFF"/>
+                </a:solidFill>
+              </a14:hiddenFill>
+            </a:ext>
+            <a:ext uri="{91240B29-F687-4F45-9708-019B960494DF}">
+              <a14:hiddenLine xmlns:a14="http://schemas.microsoft.com/office/drawing/2010/main" w="9525">
+                <a:solidFill>
+                  <a:srgbClr val="000000"/>
+                </a:solidFill>
+                <a:miter lim="800000"/>
+                <a:headEnd/>
+                <a:tailEnd/>
+              </a14:hiddenLine>
+            </a:ext>
+          </a:extLst>
+        </p:spPr>
+      </p:pic>
+      <p:sp>
+        <p:nvSpPr>
+          <p:cNvPr id="4102" name="TextBox 11">
+            <a:extLst>
+              <a:ext uri="{FF2B5EF4-FFF2-40B4-BE49-F238E27FC236}">
+                <a16:creationId xmlns:a16="http://schemas.microsoft.com/office/drawing/2014/main" id="{FFAD2AA7-CA64-0F3E-16E8-45CB0D0840D7}"/>
+              </a:ext>
+            </a:extLst>
+          </p:cNvPr>
+          <p:cNvSpPr txBox="1">
+            <a:spLocks noChangeArrowheads="1"/>
+          </p:cNvSpPr>
+          <p:nvPr/>
+        </p:nvSpPr>
+        <p:spPr bwMode="auto">
+          <a:xfrm>
+            <a:off x="11166608" y="6340890"/>
+            <a:ext cx="861900" cy="461903"/>
+          </a:xfrm>
+          <a:prstGeom prst="rect">
+            <a:avLst/>
+          </a:prstGeom>
+          <a:noFill/>
+          <a:ln>
+            <a:noFill/>
+          </a:ln>
+          <a:extLst>
+            <a:ext uri="{909E8E84-426E-40DD-AFC4-6F175D3DCCD1}">
+              <a14:hiddenFill xmlns:a14="http://schemas.microsoft.com/office/drawing/2010/main">
+                <a:solidFill>
+                  <a:srgbClr val="FFFFFF"/>
+                </a:solidFill>
+              </a14:hiddenFill>
+            </a:ext>
+            <a:ext uri="{91240B29-F687-4F45-9708-019B960494DF}">
+              <a14:hiddenLine xmlns:a14="http://schemas.microsoft.com/office/drawing/2010/main" w="9525">
+                <a:solidFill>
+                  <a:srgbClr val="000000"/>
+                </a:solidFill>
+                <a:miter lim="800000"/>
+                <a:headEnd/>
+                <a:tailEnd/>
+              </a14:hiddenLine>
+            </a:ext>
+          </a:extLst>
+        </p:spPr>
+        <p:txBody>
+          <a:bodyPr>
+            <a:spAutoFit/>
+          </a:bodyPr>
+          <a:lstStyle>
+            <a:lvl1pPr>
+              <a:spcBef>
+                <a:spcPct val="20000"/>
+              </a:spcBef>
+              <a:buFont typeface="Arial" panose="020B0604020202020204" pitchFamily="34" charset="0"/>
+              <a:buChar char="•"/>
+              <a:defRPr sz="3200">
+                <a:solidFill>
+                  <a:schemeClr val="tx1"/>
+                </a:solidFill>
+                <a:latin typeface="Calibri" panose="020F0502020204030204" pitchFamily="34" charset="0"/>
+                <a:ea typeface="MS PGothic" panose="020B0600070205080204" pitchFamily="34" charset="-128"/>
+              </a:defRPr>
+            </a:lvl1pPr>
+            <a:lvl2pPr marL="742950" indent="-285750">
+              <a:spcBef>
+                <a:spcPct val="20000"/>
+              </a:spcBef>
+              <a:buFont typeface="Arial" panose="020B0604020202020204" pitchFamily="34" charset="0"/>
+              <a:buChar char="–"/>
+              <a:defRPr sz="2800">
+                <a:solidFill>
+                  <a:schemeClr val="tx1"/>
+                </a:solidFill>
+                <a:latin typeface="Calibri" panose="020F0502020204030204" pitchFamily="34" charset="0"/>
+                <a:ea typeface="MS PGothic" panose="020B0600070205080204" pitchFamily="34" charset="-128"/>
+              </a:defRPr>
+            </a:lvl2pPr>
+            <a:lvl3pPr marL="1143000" indent="-228600">
+              <a:spcBef>
+                <a:spcPct val="20000"/>
+              </a:spcBef>
+              <a:buFont typeface="Arial" panose="020B0604020202020204" pitchFamily="34" charset="0"/>
+              <a:buChar char="•"/>
+              <a:defRPr sz="2400">
+                <a:solidFill>
+                  <a:schemeClr val="tx1"/>
+                </a:solidFill>
+                <a:latin typeface="Calibri" panose="020F0502020204030204" pitchFamily="34" charset="0"/>
+                <a:ea typeface="MS PGothic" panose="020B0600070205080204" pitchFamily="34" charset="-128"/>
+              </a:defRPr>
+            </a:lvl3pPr>
+            <a:lvl4pPr marL="1600200" indent="-228600">
+              <a:spcBef>
+                <a:spcPct val="20000"/>
+              </a:spcBef>
+              <a:buFont typeface="Arial" panose="020B0604020202020204" pitchFamily="34" charset="0"/>
+              <a:buChar char="–"/>
+              <a:defRPr sz="2000">
+                <a:solidFill>
+                  <a:schemeClr val="tx1"/>
+                </a:solidFill>
+                <a:latin typeface="Calibri" panose="020F0502020204030204" pitchFamily="34" charset="0"/>
+                <a:ea typeface="MS PGothic" panose="020B0600070205080204" pitchFamily="34" charset="-128"/>
+              </a:defRPr>
+            </a:lvl4pPr>
+            <a:lvl5pPr marL="2057400" indent="-228600">
+              <a:spcBef>
+                <a:spcPct val="20000"/>
+              </a:spcBef>
+              <a:buFont typeface="Arial" panose="020B0604020202020204" pitchFamily="34" charset="0"/>
+              <a:buChar char="»"/>
+              <a:defRPr sz="2000">
+                <a:solidFill>
+                  <a:schemeClr val="tx1"/>
+                </a:solidFill>
+                <a:latin typeface="Calibri" panose="020F0502020204030204" pitchFamily="34" charset="0"/>
+                <a:ea typeface="MS PGothic" panose="020B0600070205080204" pitchFamily="34" charset="-128"/>
+              </a:defRPr>
+            </a:lvl5pPr>
+            <a:lvl6pPr marL="2514600" indent="-228600" defTabSz="457200" eaLnBrk="0" fontAlgn="base" hangingPunct="0">
+              <a:spcBef>
+                <a:spcPct val="20000"/>
+              </a:spcBef>
+              <a:spcAft>
+                <a:spcPct val="0"/>
+              </a:spcAft>
+              <a:buFont typeface="Arial" panose="020B0604020202020204" pitchFamily="34" charset="0"/>
+              <a:buChar char="»"/>
+              <a:defRPr sz="2000">
+                <a:solidFill>
+                  <a:schemeClr val="tx1"/>
+                </a:solidFill>
+                <a:latin typeface="Calibri" panose="020F0502020204030204" pitchFamily="34" charset="0"/>
+                <a:ea typeface="MS PGothic" panose="020B0600070205080204" pitchFamily="34" charset="-128"/>
+              </a:defRPr>
+            </a:lvl6pPr>
+            <a:lvl7pPr marL="2971800" indent="-228600" defTabSz="457200" eaLnBrk="0" fontAlgn="base" hangingPunct="0">
+              <a:spcBef>
+                <a:spcPct val="20000"/>
+              </a:spcBef>
+              <a:spcAft>
+                <a:spcPct val="0"/>
+              </a:spcAft>
+              <a:buFont typeface="Arial" panose="020B0604020202020204" pitchFamily="34" charset="0"/>
+              <a:buChar char="»"/>
+              <a:defRPr sz="2000">
+                <a:solidFill>
+                  <a:schemeClr val="tx1"/>
+                </a:solidFill>
+                <a:latin typeface="Calibri" panose="020F0502020204030204" pitchFamily="34" charset="0"/>
+                <a:ea typeface="MS PGothic" panose="020B0600070205080204" pitchFamily="34" charset="-128"/>
+              </a:defRPr>
+            </a:lvl7pPr>
+            <a:lvl8pPr marL="3429000" indent="-228600" defTabSz="457200" eaLnBrk="0" fontAlgn="base" hangingPunct="0">
+              <a:spcBef>
+                <a:spcPct val="20000"/>
+              </a:spcBef>
+              <a:spcAft>
+                <a:spcPct val="0"/>
+              </a:spcAft>
+              <a:buFont typeface="Arial" panose="020B0604020202020204" pitchFamily="34" charset="0"/>
+              <a:buChar char="»"/>
+              <a:defRPr sz="2000">
+                <a:solidFill>
+                  <a:schemeClr val="tx1"/>
+                </a:solidFill>
+                <a:latin typeface="Calibri" panose="020F0502020204030204" pitchFamily="34" charset="0"/>
+                <a:ea typeface="MS PGothic" panose="020B0600070205080204" pitchFamily="34" charset="-128"/>
+              </a:defRPr>
+            </a:lvl8pPr>
+            <a:lvl9pPr marL="3886200" indent="-228600" defTabSz="457200" eaLnBrk="0" fontAlgn="base" hangingPunct="0">
+              <a:spcBef>
+                <a:spcPct val="20000"/>
+              </a:spcBef>
+              <a:spcAft>
+                <a:spcPct val="0"/>
+              </a:spcAft>
+              <a:buFont typeface="Arial" panose="020B0604020202020204" pitchFamily="34" charset="0"/>
+              <a:buChar char="»"/>
+              <a:defRPr sz="2000">
+                <a:solidFill>
+                  <a:schemeClr val="tx1"/>
+                </a:solidFill>
+                <a:latin typeface="Calibri" panose="020F0502020204030204" pitchFamily="34" charset="0"/>
+                <a:ea typeface="MS PGothic" panose="020B0600070205080204" pitchFamily="34" charset="-128"/>
+              </a:defRPr>
+            </a:lvl9pPr>
+          </a:lstStyle>
+          <a:p>
+            <a:pPr eaLnBrk="1" hangingPunct="1">
+              <a:spcBef>
+                <a:spcPct val="0"/>
+              </a:spcBef>
+              <a:buFontTx/>
+              <a:buNone/>
+            </a:pPr>
+            <a:r>
+              <a:rPr lang="en-US" altLang="en-US" sz="1500">
+                <a:solidFill>
+                  <a:schemeClr val="bg1"/>
+                </a:solidFill>
+                <a:latin typeface="Gotham Light" pitchFamily="50" charset="0"/>
+              </a:rPr>
+              <a:t>Join </a:t>
+            </a:r>
+            <a:r>
+              <a:rPr lang="en-US" altLang="en-US" sz="1500">
+                <a:solidFill>
+                  <a:schemeClr val="bg1"/>
+                </a:solidFill>
+                <a:latin typeface="Gotham Medium" charset="0"/>
+              </a:rPr>
+              <a:t>us</a:t>
+            </a:r>
+          </a:p>
+          <a:p>
+            <a:pPr eaLnBrk="1" hangingPunct="1">
+              <a:spcBef>
+                <a:spcPct val="0"/>
+              </a:spcBef>
+              <a:buFontTx/>
+              <a:buNone/>
+            </a:pPr>
+            <a:r>
+              <a:rPr lang="en-US" altLang="en-US" sz="800">
+                <a:solidFill>
+                  <a:schemeClr val="bg1"/>
+                </a:solidFill>
+                <a:latin typeface="Gotham Light" pitchFamily="50" charset="0"/>
+              </a:rPr>
+              <a:t>www.knx.org</a:t>
+            </a:r>
+          </a:p>
+        </p:txBody>
+      </p:sp>
+      <p:sp>
+        <p:nvSpPr>
+          <p:cNvPr id="15" name="TextBox 14">
+            <a:extLst>
+              <a:ext uri="{FF2B5EF4-FFF2-40B4-BE49-F238E27FC236}">
+                <a16:creationId xmlns:a16="http://schemas.microsoft.com/office/drawing/2014/main" id="{0C1CBE3C-A062-7BC7-CF92-655C67663D42}"/>
+              </a:ext>
+            </a:extLst>
+          </p:cNvPr>
+          <p:cNvSpPr txBox="1"/>
+          <p:nvPr/>
+        </p:nvSpPr>
+        <p:spPr>
+          <a:xfrm>
+            <a:off x="690473" y="1296825"/>
+            <a:ext cx="8420073" cy="954107"/>
+          </a:xfrm>
+          <a:prstGeom prst="rect">
+            <a:avLst/>
+          </a:prstGeom>
+          <a:noFill/>
+        </p:spPr>
+        <p:txBody>
+          <a:bodyPr wrap="square">
+            <a:spAutoFit/>
+          </a:bodyPr>
+          <a:lstStyle/>
+          <a:p>
+            <a:r>
+              <a:rPr lang="en-US" sz="2800" dirty="0">
+                <a:solidFill>
+                  <a:schemeClr val="tx1">
+                    <a:lumMod val="75000"/>
+                    <a:lumOff val="25000"/>
+                  </a:schemeClr>
+                </a:solidFill>
+                <a:latin typeface="Gotham Medium"/>
+                <a:cs typeface="Gotham Medium"/>
+              </a:rPr>
+              <a:t>Linking: two devices discovered after scanning</a:t>
+            </a:r>
+            <a:endParaRPr lang="en-US" sz="2800" dirty="0"/>
+          </a:p>
+          <a:p>
+            <a:pPr algn="l"/>
+            <a:r>
+              <a:rPr lang="en-US" sz="2800" dirty="0">
+                <a:solidFill>
+                  <a:schemeClr val="tx1">
+                    <a:lumMod val="75000"/>
+                    <a:lumOff val="25000"/>
+                  </a:schemeClr>
+                </a:solidFill>
+                <a:latin typeface="Gotham Medium"/>
+                <a:cs typeface="Gotham Medium"/>
+              </a:rPr>
+              <a:t> </a:t>
+            </a:r>
+            <a:endParaRPr lang="en-US" sz="2500" dirty="0">
+              <a:solidFill>
+                <a:schemeClr val="tx1">
+                  <a:lumMod val="75000"/>
+                  <a:lumOff val="25000"/>
+                </a:schemeClr>
+              </a:solidFill>
+              <a:latin typeface="Gotham Medium"/>
+              <a:cs typeface="Gotham Medium"/>
+            </a:endParaRPr>
+          </a:p>
+        </p:txBody>
+      </p:sp>
+      <p:sp>
+        <p:nvSpPr>
+          <p:cNvPr id="6" name="Arrow: Left 5">
+            <a:extLst>
+              <a:ext uri="{FF2B5EF4-FFF2-40B4-BE49-F238E27FC236}">
+                <a16:creationId xmlns:a16="http://schemas.microsoft.com/office/drawing/2014/main" id="{6C1EEAFB-0197-1D94-5E7B-F3707D3208BC}"/>
+              </a:ext>
+            </a:extLst>
+          </p:cNvPr>
+          <p:cNvSpPr/>
+          <p:nvPr/>
+        </p:nvSpPr>
+        <p:spPr>
+          <a:xfrm rot="19500999">
+            <a:off x="3578087" y="2080747"/>
+            <a:ext cx="2112776" cy="698579"/>
+          </a:xfrm>
+          <a:prstGeom prst="leftArrow">
+            <a:avLst/>
+          </a:prstGeom>
+          <a:solidFill>
+            <a:srgbClr val="FFC000"/>
+          </a:solidFill>
+          <a:ln>
+            <a:solidFill>
+              <a:schemeClr val="tx1"/>
+            </a:solidFill>
+          </a:ln>
+        </p:spPr>
+        <p:style>
+          <a:lnRef idx="1">
+            <a:schemeClr val="accent1"/>
+          </a:lnRef>
+          <a:fillRef idx="3">
+            <a:schemeClr val="accent1"/>
+          </a:fillRef>
+          <a:effectRef idx="2">
+            <a:schemeClr val="accent1"/>
+          </a:effectRef>
+          <a:fontRef idx="minor">
+            <a:schemeClr val="lt1"/>
+          </a:fontRef>
+        </p:style>
+        <p:txBody>
+          <a:bodyPr rtlCol="0" anchor="ctr"/>
+          <a:lstStyle/>
+          <a:p>
+            <a:pPr algn="ctr"/>
+            <a:r>
+              <a:rPr lang="en-US" dirty="0"/>
+              <a:t>click</a:t>
+            </a:r>
+          </a:p>
+        </p:txBody>
+      </p:sp>
+    </p:spTree>
+    <p:extLst>
+      <p:ext uri="{BB962C8B-B14F-4D97-AF65-F5344CB8AC3E}">
+        <p14:creationId xmlns:p14="http://schemas.microsoft.com/office/powerpoint/2010/main" val="644293752"/>
+      </p:ext>
+    </p:extLst>
+  </p:cSld>
+  <p:clrMapOvr>
+    <a:masterClrMapping/>
+  </p:clrMapOvr>
+  <p:timing>
+    <p:tnLst>
+      <p:par>
+        <p:cTn id="1" dur="indefinite" restart="never" nodeType="tmRoot">
+          <p:childTnLst>
+            <p:seq concurrent="1" nextAc="seek">
+              <p:cTn id="2" dur="indefinite" nodeType="mainSeq">
+                <p:childTnLst>
+                  <p:par>
+                    <p:cTn id="3" fill="hold">
+                      <p:stCondLst>
+                        <p:cond delay="indefinite"/>
+                      </p:stCondLst>
+                      <p:childTnLst>
+                        <p:par>
+                          <p:cTn id="4" fill="hold">
+                            <p:stCondLst>
+                              <p:cond delay="0"/>
+                            </p:stCondLst>
+                            <p:childTnLst>
+                              <p:par>
+                                <p:cTn id="5" presetID="2" presetClass="entr" presetSubtype="4" fill="hold" grpId="0" nodeType="clickEffect">
+                                  <p:stCondLst>
+                                    <p:cond delay="0"/>
+                                  </p:stCondLst>
+                                  <p:childTnLst>
+                                    <p:set>
+                                      <p:cBhvr>
+                                        <p:cTn id="6" dur="1" fill="hold">
+                                          <p:stCondLst>
+                                            <p:cond delay="0"/>
+                                          </p:stCondLst>
+                                        </p:cTn>
+                                        <p:tgtEl>
+                                          <p:spTgt spid="6"/>
+                                        </p:tgtEl>
+                                        <p:attrNameLst>
+                                          <p:attrName>style.visibility</p:attrName>
+                                        </p:attrNameLst>
+                                      </p:cBhvr>
+                                      <p:to>
+                                        <p:strVal val="visible"/>
+                                      </p:to>
+                                    </p:set>
+                                    <p:anim calcmode="lin" valueType="num">
+                                      <p:cBhvr additive="base">
+                                        <p:cTn id="7" dur="500" fill="hold"/>
+                                        <p:tgtEl>
+                                          <p:spTgt spid="6"/>
+                                        </p:tgtEl>
+                                        <p:attrNameLst>
+                                          <p:attrName>ppt_x</p:attrName>
+                                        </p:attrNameLst>
+                                      </p:cBhvr>
+                                      <p:tavLst>
+                                        <p:tav tm="0">
+                                          <p:val>
+                                            <p:strVal val="#ppt_x"/>
+                                          </p:val>
+                                        </p:tav>
+                                        <p:tav tm="100000">
+                                          <p:val>
+                                            <p:strVal val="#ppt_x"/>
+                                          </p:val>
+                                        </p:tav>
+                                      </p:tavLst>
+                                    </p:anim>
+                                    <p:anim calcmode="lin" valueType="num">
+                                      <p:cBhvr additive="base">
+                                        <p:cTn id="8" dur="500" fill="hold"/>
+                                        <p:tgtEl>
+                                          <p:spTgt spid="6"/>
+                                        </p:tgtEl>
+                                        <p:attrNameLst>
+                                          <p:attrName>ppt_y</p:attrName>
+                                        </p:attrNameLst>
+                                      </p:cBhvr>
+                                      <p:tavLst>
+                                        <p:tav tm="0">
+                                          <p:val>
+                                            <p:strVal val="1+#ppt_h/2"/>
+                                          </p:val>
+                                        </p:tav>
+                                        <p:tav tm="100000">
+                                          <p:val>
+                                            <p:strVal val="#ppt_y"/>
+                                          </p:val>
+                                        </p:tav>
+                                      </p:tavLst>
+                                    </p:anim>
+                                  </p:childTnLst>
+                                </p:cTn>
+                              </p:par>
+                            </p:childTnLst>
+                          </p:cTn>
+                        </p:par>
+                      </p:childTnLst>
+                    </p:cTn>
+                  </p:par>
+                </p:childTnLst>
+              </p:cTn>
+              <p:prevCondLst>
+                <p:cond evt="onPrev" delay="0">
+                  <p:tgtEl>
+                    <p:sldTgt/>
+                  </p:tgtEl>
+                </p:cond>
+              </p:prevCondLst>
+              <p:nextCondLst>
+                <p:cond evt="onNext" delay="0">
+                  <p:tgtEl>
+                    <p:sldTgt/>
+                  </p:tgtEl>
+                </p:cond>
+              </p:nextCondLst>
+            </p:seq>
+          </p:childTnLst>
+        </p:cTn>
+      </p:par>
+    </p:tnLst>
+    <p:bldLst>
+      <p:bldP spid="6" grpId="0" animBg="1"/>
+    </p:bldLst>
+  </p:timing>
+</p:sld>
+</file>
+
+<file path=ppt/slides/slide14.xml><?xml version="1.0" encoding="utf-8"?>
+<p:sld xmlns:a="http://schemas.openxmlformats.org/drawingml/2006/main" xmlns:r="http://schemas.openxmlformats.org/officeDocument/2006/relationships" xmlns:p="http://schemas.openxmlformats.org/presentationml/2006/main">
+  <p:cSld>
+    <p:spTree>
+      <p:nvGrpSpPr>
+        <p:cNvPr id="1" name="">
+          <a:extLst>
+            <a:ext uri="{FF2B5EF4-FFF2-40B4-BE49-F238E27FC236}">
+              <a16:creationId xmlns:a16="http://schemas.microsoft.com/office/drawing/2014/main" id="{B4171789-C7F3-8D38-1B9B-45E16779162B}"/>
+            </a:ext>
+          </a:extLst>
+        </p:cNvPr>
+        <p:cNvGrpSpPr/>
+        <p:nvPr/>
+      </p:nvGrpSpPr>
+      <p:grpSpPr>
+        <a:xfrm>
+          <a:off x="0" y="0"/>
+          <a:ext cx="0" cy="0"/>
+          <a:chOff x="0" y="0"/>
+          <a:chExt cx="0" cy="0"/>
+        </a:xfrm>
+      </p:grpSpPr>
+      <p:pic>
+        <p:nvPicPr>
+          <p:cNvPr id="3" name="Picture 2">
+            <a:extLst>
+              <a:ext uri="{FF2B5EF4-FFF2-40B4-BE49-F238E27FC236}">
+                <a16:creationId xmlns:a16="http://schemas.microsoft.com/office/drawing/2014/main" id="{09DC079B-89C3-8EA6-258F-64C4FBBD8887}"/>
+              </a:ext>
+            </a:extLst>
+          </p:cNvPr>
+          <p:cNvPicPr>
+            <a:picLocks noChangeAspect="1"/>
+          </p:cNvPicPr>
+          <p:nvPr/>
+        </p:nvPicPr>
+        <p:blipFill>
+          <a:blip r:embed="rId2"/>
+          <a:stretch>
+            <a:fillRect/>
+          </a:stretch>
+        </p:blipFill>
+        <p:spPr>
+          <a:xfrm>
+            <a:off x="738893" y="1952793"/>
+            <a:ext cx="10188034" cy="4095082"/>
+          </a:xfrm>
+          <a:prstGeom prst="rect">
+            <a:avLst/>
+          </a:prstGeom>
+        </p:spPr>
+      </p:pic>
+      <p:pic>
+        <p:nvPicPr>
+          <p:cNvPr id="4098" name="Picture 3">
+            <a:extLst>
+              <a:ext uri="{FF2B5EF4-FFF2-40B4-BE49-F238E27FC236}">
+                <a16:creationId xmlns:a16="http://schemas.microsoft.com/office/drawing/2014/main" id="{B606AFF1-629A-CE71-6762-783033DC339F}"/>
+              </a:ext>
+            </a:extLst>
+          </p:cNvPr>
+          <p:cNvPicPr>
+            <a:picLocks noChangeAspect="1"/>
+          </p:cNvPicPr>
+          <p:nvPr/>
+        </p:nvPicPr>
+        <p:blipFill>
+          <a:blip r:embed="rId3" cstate="screen">
+            <a:extLst>
+              <a:ext uri="{28A0092B-C50C-407E-A947-70E740481C1C}">
+                <a14:useLocalDpi xmlns:a14="http://schemas.microsoft.com/office/drawing/2010/main"/>
+              </a:ext>
+            </a:extLst>
+          </a:blip>
+          <a:srcRect/>
+          <a:stretch>
+            <a:fillRect/>
+          </a:stretch>
+        </p:blipFill>
+        <p:spPr bwMode="auto">
+          <a:xfrm>
+            <a:off x="476188" y="440922"/>
+            <a:ext cx="1104756" cy="479363"/>
+          </a:xfrm>
+          <a:prstGeom prst="rect">
+            <a:avLst/>
+          </a:prstGeom>
+          <a:noFill/>
+          <a:ln>
+            <a:noFill/>
+          </a:ln>
+          <a:extLst>
+            <a:ext uri="{909E8E84-426E-40DD-AFC4-6F175D3DCCD1}">
+              <a14:hiddenFill xmlns:a14="http://schemas.microsoft.com/office/drawing/2010/main">
+                <a:solidFill>
+                  <a:srgbClr val="FFFFFF"/>
+                </a:solidFill>
+              </a14:hiddenFill>
+            </a:ext>
+            <a:ext uri="{91240B29-F687-4F45-9708-019B960494DF}">
+              <a14:hiddenLine xmlns:a14="http://schemas.microsoft.com/office/drawing/2010/main" w="9525">
+                <a:solidFill>
+                  <a:srgbClr val="000000"/>
+                </a:solidFill>
+                <a:miter lim="800000"/>
+                <a:headEnd/>
+                <a:tailEnd/>
+              </a14:hiddenLine>
+            </a:ext>
+          </a:extLst>
+        </p:spPr>
+      </p:pic>
+      <p:sp>
+        <p:nvSpPr>
+          <p:cNvPr id="11" name="Rectángulo 17">
+            <a:extLst>
+              <a:ext uri="{FF2B5EF4-FFF2-40B4-BE49-F238E27FC236}">
+                <a16:creationId xmlns:a16="http://schemas.microsoft.com/office/drawing/2014/main" id="{24566BE7-A3B1-3A95-60C4-042102971110}"/>
+              </a:ext>
+            </a:extLst>
+          </p:cNvPr>
+          <p:cNvSpPr>
+            <a:spLocks noChangeArrowheads="1"/>
+          </p:cNvSpPr>
+          <p:nvPr/>
+        </p:nvSpPr>
+        <p:spPr bwMode="auto">
+          <a:xfrm>
+            <a:off x="-1" y="6309145"/>
+            <a:ext cx="12190413" cy="549203"/>
+          </a:xfrm>
+          <a:prstGeom prst="rect">
+            <a:avLst/>
+          </a:prstGeom>
+          <a:solidFill>
+            <a:srgbClr val="262626"/>
+          </a:solidFill>
+          <a:ln w="9525">
+            <a:solidFill>
+              <a:srgbClr val="4A7EBB"/>
+            </a:solidFill>
+            <a:miter lim="800000"/>
+            <a:headEnd/>
+            <a:tailEnd/>
+          </a:ln>
+          <a:effectLst>
+            <a:outerShdw blurRad="40000" dist="23000" dir="5400000" rotWithShape="0">
+              <a:srgbClr val="808080">
+                <a:alpha val="34998"/>
+              </a:srgbClr>
+            </a:outerShdw>
+          </a:effectLst>
+        </p:spPr>
+        <p:txBody>
+          <a:bodyPr anchor="ctr"/>
+          <a:lstStyle>
+            <a:lvl1pPr>
+              <a:defRPr sz="2400">
+                <a:solidFill>
+                  <a:schemeClr val="tx1"/>
+                </a:solidFill>
+                <a:latin typeface="Calibri" panose="020F0502020204030204" pitchFamily="34" charset="0"/>
+                <a:ea typeface="MS PGothic" panose="020B0600070205080204" pitchFamily="34" charset="-128"/>
+              </a:defRPr>
+            </a:lvl1pPr>
+            <a:lvl2pPr marL="742950" indent="-285750">
+              <a:defRPr sz="2400">
+                <a:solidFill>
+                  <a:schemeClr val="tx1"/>
+                </a:solidFill>
+                <a:latin typeface="Calibri" panose="020F0502020204030204" pitchFamily="34" charset="0"/>
+                <a:ea typeface="MS PGothic" panose="020B0600070205080204" pitchFamily="34" charset="-128"/>
+              </a:defRPr>
+            </a:lvl2pPr>
+            <a:lvl3pPr marL="1143000" indent="-228600">
+              <a:defRPr sz="2400">
+                <a:solidFill>
+                  <a:schemeClr val="tx1"/>
+                </a:solidFill>
+                <a:latin typeface="Calibri" panose="020F0502020204030204" pitchFamily="34" charset="0"/>
+                <a:ea typeface="MS PGothic" panose="020B0600070205080204" pitchFamily="34" charset="-128"/>
+              </a:defRPr>
+            </a:lvl3pPr>
+            <a:lvl4pPr marL="1600200" indent="-228600">
+              <a:defRPr sz="2400">
+                <a:solidFill>
+                  <a:schemeClr val="tx1"/>
+                </a:solidFill>
+                <a:latin typeface="Calibri" panose="020F0502020204030204" pitchFamily="34" charset="0"/>
+                <a:ea typeface="MS PGothic" panose="020B0600070205080204" pitchFamily="34" charset="-128"/>
+              </a:defRPr>
+            </a:lvl4pPr>
+            <a:lvl5pPr marL="2057400" indent="-228600">
+              <a:defRPr sz="2400">
+                <a:solidFill>
+                  <a:schemeClr val="tx1"/>
+                </a:solidFill>
+                <a:latin typeface="Calibri" panose="020F0502020204030204" pitchFamily="34" charset="0"/>
+                <a:ea typeface="MS PGothic" panose="020B0600070205080204" pitchFamily="34" charset="-128"/>
+              </a:defRPr>
+            </a:lvl5pPr>
+            <a:lvl6pPr marL="2514600" indent="-228600" defTabSz="457200" eaLnBrk="0" fontAlgn="base" hangingPunct="0">
+              <a:spcBef>
+                <a:spcPct val="0"/>
+              </a:spcBef>
+              <a:spcAft>
+                <a:spcPct val="0"/>
+              </a:spcAft>
+              <a:defRPr sz="2400">
+                <a:solidFill>
+                  <a:schemeClr val="tx1"/>
+                </a:solidFill>
+                <a:latin typeface="Calibri" panose="020F0502020204030204" pitchFamily="34" charset="0"/>
+                <a:ea typeface="MS PGothic" panose="020B0600070205080204" pitchFamily="34" charset="-128"/>
+              </a:defRPr>
+            </a:lvl6pPr>
+            <a:lvl7pPr marL="2971800" indent="-228600" defTabSz="457200" eaLnBrk="0" fontAlgn="base" hangingPunct="0">
+              <a:spcBef>
+                <a:spcPct val="0"/>
+              </a:spcBef>
+              <a:spcAft>
+                <a:spcPct val="0"/>
+              </a:spcAft>
+              <a:defRPr sz="2400">
+                <a:solidFill>
+                  <a:schemeClr val="tx1"/>
+                </a:solidFill>
+                <a:latin typeface="Calibri" panose="020F0502020204030204" pitchFamily="34" charset="0"/>
+                <a:ea typeface="MS PGothic" panose="020B0600070205080204" pitchFamily="34" charset="-128"/>
+              </a:defRPr>
+            </a:lvl7pPr>
+            <a:lvl8pPr marL="3429000" indent="-228600" defTabSz="457200" eaLnBrk="0" fontAlgn="base" hangingPunct="0">
+              <a:spcBef>
+                <a:spcPct val="0"/>
+              </a:spcBef>
+              <a:spcAft>
+                <a:spcPct val="0"/>
+              </a:spcAft>
+              <a:defRPr sz="2400">
+                <a:solidFill>
+                  <a:schemeClr val="tx1"/>
+                </a:solidFill>
+                <a:latin typeface="Calibri" panose="020F0502020204030204" pitchFamily="34" charset="0"/>
+                <a:ea typeface="MS PGothic" panose="020B0600070205080204" pitchFamily="34" charset="-128"/>
+              </a:defRPr>
+            </a:lvl8pPr>
+            <a:lvl9pPr marL="3886200" indent="-228600" defTabSz="457200" eaLnBrk="0" fontAlgn="base" hangingPunct="0">
+              <a:spcBef>
+                <a:spcPct val="0"/>
+              </a:spcBef>
+              <a:spcAft>
+                <a:spcPct val="0"/>
+              </a:spcAft>
+              <a:defRPr sz="2400">
+                <a:solidFill>
+                  <a:schemeClr val="tx1"/>
+                </a:solidFill>
+                <a:latin typeface="Calibri" panose="020F0502020204030204" pitchFamily="34" charset="0"/>
+                <a:ea typeface="MS PGothic" panose="020B0600070205080204" pitchFamily="34" charset="-128"/>
+              </a:defRPr>
+            </a:lvl9pPr>
+          </a:lstStyle>
+          <a:p>
+            <a:pPr algn="ctr" eaLnBrk="1" hangingPunct="1">
+              <a:defRPr/>
+            </a:pPr>
+            <a:endParaRPr lang="es-ES" altLang="en-US" sz="1800">
+              <a:solidFill>
+                <a:srgbClr val="FFFFFF"/>
+              </a:solidFill>
+            </a:endParaRPr>
+          </a:p>
+        </p:txBody>
+      </p:sp>
+      <p:sp>
+        <p:nvSpPr>
+          <p:cNvPr id="13" name="TextBox 7">
+            <a:extLst>
+              <a:ext uri="{FF2B5EF4-FFF2-40B4-BE49-F238E27FC236}">
+                <a16:creationId xmlns:a16="http://schemas.microsoft.com/office/drawing/2014/main" id="{840EA0C7-80AE-DD7B-4C56-B14B70910B14}"/>
+              </a:ext>
+            </a:extLst>
+          </p:cNvPr>
+          <p:cNvSpPr txBox="1">
+            <a:spLocks noChangeArrowheads="1"/>
+          </p:cNvSpPr>
+          <p:nvPr/>
+        </p:nvSpPr>
+        <p:spPr bwMode="auto">
+          <a:xfrm>
+            <a:off x="203174" y="6391684"/>
+            <a:ext cx="2676176" cy="415871"/>
+          </a:xfrm>
+          <a:prstGeom prst="rect">
+            <a:avLst/>
+          </a:prstGeom>
+          <a:noFill/>
+          <a:ln>
+            <a:noFill/>
+          </a:ln>
+          <a:extLst>
+            <a:ext uri="{909E8E84-426E-40dd-AFC4-6F175D3DCCD1}"/>
+            <a:ext uri="{91240B29-F687-4f45-9708-019B960494DF}"/>
+          </a:extLst>
+        </p:spPr>
+        <p:txBody>
+          <a:bodyPr>
+            <a:spAutoFit/>
+          </a:bodyPr>
+          <a:lstStyle>
+            <a:lvl1pPr>
+              <a:defRPr>
+                <a:solidFill>
+                  <a:schemeClr val="tx1"/>
+                </a:solidFill>
+                <a:latin typeface="Calibri" panose="020F0502020204030204" pitchFamily="34" charset="0"/>
+                <a:ea typeface="MS PGothic" panose="020B0600070205080204" pitchFamily="34" charset="-128"/>
+              </a:defRPr>
+            </a:lvl1pPr>
+            <a:lvl2pPr marL="742950" indent="-285750">
+              <a:defRPr>
+                <a:solidFill>
+                  <a:schemeClr val="tx1"/>
+                </a:solidFill>
+                <a:latin typeface="Calibri" panose="020F0502020204030204" pitchFamily="34" charset="0"/>
+                <a:ea typeface="MS PGothic" panose="020B0600070205080204" pitchFamily="34" charset="-128"/>
+              </a:defRPr>
+            </a:lvl2pPr>
+            <a:lvl3pPr marL="1143000" indent="-228600">
+              <a:defRPr>
+                <a:solidFill>
+                  <a:schemeClr val="tx1"/>
+                </a:solidFill>
+                <a:latin typeface="Calibri" panose="020F0502020204030204" pitchFamily="34" charset="0"/>
+                <a:ea typeface="MS PGothic" panose="020B0600070205080204" pitchFamily="34" charset="-128"/>
+              </a:defRPr>
+            </a:lvl3pPr>
+            <a:lvl4pPr marL="1600200" indent="-228600">
+              <a:defRPr>
+                <a:solidFill>
+                  <a:schemeClr val="tx1"/>
+                </a:solidFill>
+                <a:latin typeface="Calibri" panose="020F0502020204030204" pitchFamily="34" charset="0"/>
+                <a:ea typeface="MS PGothic" panose="020B0600070205080204" pitchFamily="34" charset="-128"/>
+              </a:defRPr>
+            </a:lvl4pPr>
+            <a:lvl5pPr marL="2057400" indent="-228600">
+              <a:defRPr>
+                <a:solidFill>
+                  <a:schemeClr val="tx1"/>
+                </a:solidFill>
+                <a:latin typeface="Calibri" panose="020F0502020204030204" pitchFamily="34" charset="0"/>
+                <a:ea typeface="MS PGothic" panose="020B0600070205080204" pitchFamily="34" charset="-128"/>
+              </a:defRPr>
+            </a:lvl5pPr>
+            <a:lvl6pPr marL="2514600" indent="-228600" defTabSz="457200" fontAlgn="base">
+              <a:spcBef>
+                <a:spcPct val="0"/>
+              </a:spcBef>
+              <a:spcAft>
+                <a:spcPct val="0"/>
+              </a:spcAft>
+              <a:defRPr>
+                <a:solidFill>
+                  <a:schemeClr val="tx1"/>
+                </a:solidFill>
+                <a:latin typeface="Calibri" panose="020F0502020204030204" pitchFamily="34" charset="0"/>
+                <a:ea typeface="MS PGothic" panose="020B0600070205080204" pitchFamily="34" charset="-128"/>
+              </a:defRPr>
+            </a:lvl6pPr>
+            <a:lvl7pPr marL="2971800" indent="-228600" defTabSz="457200" fontAlgn="base">
+              <a:spcBef>
+                <a:spcPct val="0"/>
+              </a:spcBef>
+              <a:spcAft>
+                <a:spcPct val="0"/>
+              </a:spcAft>
+              <a:defRPr>
+                <a:solidFill>
+                  <a:schemeClr val="tx1"/>
+                </a:solidFill>
+                <a:latin typeface="Calibri" panose="020F0502020204030204" pitchFamily="34" charset="0"/>
+                <a:ea typeface="MS PGothic" panose="020B0600070205080204" pitchFamily="34" charset="-128"/>
+              </a:defRPr>
+            </a:lvl7pPr>
+            <a:lvl8pPr marL="3429000" indent="-228600" defTabSz="457200" fontAlgn="base">
+              <a:spcBef>
+                <a:spcPct val="0"/>
+              </a:spcBef>
+              <a:spcAft>
+                <a:spcPct val="0"/>
+              </a:spcAft>
+              <a:defRPr>
+                <a:solidFill>
+                  <a:schemeClr val="tx1"/>
+                </a:solidFill>
+                <a:latin typeface="Calibri" panose="020F0502020204030204" pitchFamily="34" charset="0"/>
+                <a:ea typeface="MS PGothic" panose="020B0600070205080204" pitchFamily="34" charset="-128"/>
+              </a:defRPr>
+            </a:lvl8pPr>
+            <a:lvl9pPr marL="3886200" indent="-228600" defTabSz="457200" fontAlgn="base">
+              <a:spcBef>
+                <a:spcPct val="0"/>
+              </a:spcBef>
+              <a:spcAft>
+                <a:spcPct val="0"/>
+              </a:spcAft>
+              <a:defRPr>
+                <a:solidFill>
+                  <a:schemeClr val="tx1"/>
+                </a:solidFill>
+                <a:latin typeface="Calibri" panose="020F0502020204030204" pitchFamily="34" charset="0"/>
+                <a:ea typeface="MS PGothic" panose="020B0600070205080204" pitchFamily="34" charset="-128"/>
+              </a:defRPr>
+            </a:lvl9pPr>
+          </a:lstStyle>
+          <a:p>
+            <a:pPr eaLnBrk="1" hangingPunct="1">
+              <a:defRPr/>
+            </a:pPr>
+            <a:r>
+              <a:rPr lang="en-US" altLang="en-US" sz="1050">
+                <a:solidFill>
+                  <a:srgbClr val="FFFFFF"/>
+                </a:solidFill>
+                <a:latin typeface="Gotham Light"/>
+                <a:cs typeface="Gotham Light"/>
+              </a:rPr>
+              <a:t>Smart home and building solutions.</a:t>
+            </a:r>
+          </a:p>
+          <a:p>
+            <a:pPr eaLnBrk="1" hangingPunct="1">
+              <a:defRPr/>
+            </a:pPr>
+            <a:r>
+              <a:rPr lang="en-US" altLang="en-US" sz="1050">
+                <a:solidFill>
+                  <a:srgbClr val="FFFFFF"/>
+                </a:solidFill>
+                <a:latin typeface="Gotham Light"/>
+                <a:cs typeface="Gotham Light"/>
+              </a:rPr>
+              <a:t>Global. Secure. Connected.</a:t>
+            </a:r>
+          </a:p>
+        </p:txBody>
+      </p:sp>
+      <p:pic>
+        <p:nvPicPr>
+          <p:cNvPr id="4101" name="Imagen 21" descr="Worldmap.jpg">
+            <a:extLst>
+              <a:ext uri="{FF2B5EF4-FFF2-40B4-BE49-F238E27FC236}">
+                <a16:creationId xmlns:a16="http://schemas.microsoft.com/office/drawing/2014/main" id="{98B4E9DB-D1A0-5321-8653-4561DA881B2D}"/>
+              </a:ext>
+            </a:extLst>
+          </p:cNvPr>
+          <p:cNvPicPr>
+            <a:picLocks noChangeAspect="1"/>
+          </p:cNvPicPr>
+          <p:nvPr/>
+        </p:nvPicPr>
+        <p:blipFill>
+          <a:blip r:embed="rId4" cstate="screen">
+            <a:extLst>
+              <a:ext uri="{28A0092B-C50C-407E-A947-70E740481C1C}">
+                <a14:useLocalDpi xmlns:a14="http://schemas.microsoft.com/office/drawing/2010/main"/>
+              </a:ext>
+            </a:extLst>
+          </a:blip>
+          <a:srcRect/>
+          <a:stretch>
+            <a:fillRect/>
+          </a:stretch>
+        </p:blipFill>
+        <p:spPr bwMode="auto">
+          <a:xfrm>
+            <a:off x="10926927" y="6340890"/>
+            <a:ext cx="1149200" cy="488886"/>
+          </a:xfrm>
+          <a:prstGeom prst="rect">
+            <a:avLst/>
+          </a:prstGeom>
+          <a:noFill/>
+          <a:ln>
+            <a:noFill/>
+          </a:ln>
+          <a:extLst>
+            <a:ext uri="{909E8E84-426E-40DD-AFC4-6F175D3DCCD1}">
+              <a14:hiddenFill xmlns:a14="http://schemas.microsoft.com/office/drawing/2010/main">
+                <a:solidFill>
+                  <a:srgbClr val="FFFFFF"/>
+                </a:solidFill>
+              </a14:hiddenFill>
+            </a:ext>
+            <a:ext uri="{91240B29-F687-4F45-9708-019B960494DF}">
+              <a14:hiddenLine xmlns:a14="http://schemas.microsoft.com/office/drawing/2010/main" w="9525">
+                <a:solidFill>
+                  <a:srgbClr val="000000"/>
+                </a:solidFill>
+                <a:miter lim="800000"/>
+                <a:headEnd/>
+                <a:tailEnd/>
+              </a14:hiddenLine>
+            </a:ext>
+          </a:extLst>
+        </p:spPr>
+      </p:pic>
+      <p:sp>
+        <p:nvSpPr>
+          <p:cNvPr id="4102" name="TextBox 11">
+            <a:extLst>
+              <a:ext uri="{FF2B5EF4-FFF2-40B4-BE49-F238E27FC236}">
+                <a16:creationId xmlns:a16="http://schemas.microsoft.com/office/drawing/2014/main" id="{3782420C-1A51-C259-E3EF-27CE11072814}"/>
+              </a:ext>
+            </a:extLst>
+          </p:cNvPr>
+          <p:cNvSpPr txBox="1">
+            <a:spLocks noChangeArrowheads="1"/>
+          </p:cNvSpPr>
+          <p:nvPr/>
+        </p:nvSpPr>
+        <p:spPr bwMode="auto">
+          <a:xfrm>
+            <a:off x="11166608" y="6340890"/>
+            <a:ext cx="861900" cy="461903"/>
+          </a:xfrm>
+          <a:prstGeom prst="rect">
+            <a:avLst/>
+          </a:prstGeom>
+          <a:noFill/>
+          <a:ln>
+            <a:noFill/>
+          </a:ln>
+          <a:extLst>
+            <a:ext uri="{909E8E84-426E-40DD-AFC4-6F175D3DCCD1}">
+              <a14:hiddenFill xmlns:a14="http://schemas.microsoft.com/office/drawing/2010/main">
+                <a:solidFill>
+                  <a:srgbClr val="FFFFFF"/>
+                </a:solidFill>
+              </a14:hiddenFill>
+            </a:ext>
+            <a:ext uri="{91240B29-F687-4F45-9708-019B960494DF}">
+              <a14:hiddenLine xmlns:a14="http://schemas.microsoft.com/office/drawing/2010/main" w="9525">
+                <a:solidFill>
+                  <a:srgbClr val="000000"/>
+                </a:solidFill>
+                <a:miter lim="800000"/>
+                <a:headEnd/>
+                <a:tailEnd/>
+              </a14:hiddenLine>
+            </a:ext>
+          </a:extLst>
+        </p:spPr>
+        <p:txBody>
+          <a:bodyPr>
+            <a:spAutoFit/>
+          </a:bodyPr>
+          <a:lstStyle>
+            <a:lvl1pPr>
+              <a:spcBef>
+                <a:spcPct val="20000"/>
+              </a:spcBef>
+              <a:buFont typeface="Arial" panose="020B0604020202020204" pitchFamily="34" charset="0"/>
+              <a:buChar char="•"/>
+              <a:defRPr sz="3200">
+                <a:solidFill>
+                  <a:schemeClr val="tx1"/>
+                </a:solidFill>
+                <a:latin typeface="Calibri" panose="020F0502020204030204" pitchFamily="34" charset="0"/>
+                <a:ea typeface="MS PGothic" panose="020B0600070205080204" pitchFamily="34" charset="-128"/>
+              </a:defRPr>
+            </a:lvl1pPr>
+            <a:lvl2pPr marL="742950" indent="-285750">
+              <a:spcBef>
+                <a:spcPct val="20000"/>
+              </a:spcBef>
+              <a:buFont typeface="Arial" panose="020B0604020202020204" pitchFamily="34" charset="0"/>
+              <a:buChar char="–"/>
+              <a:defRPr sz="2800">
+                <a:solidFill>
+                  <a:schemeClr val="tx1"/>
+                </a:solidFill>
+                <a:latin typeface="Calibri" panose="020F0502020204030204" pitchFamily="34" charset="0"/>
+                <a:ea typeface="MS PGothic" panose="020B0600070205080204" pitchFamily="34" charset="-128"/>
+              </a:defRPr>
+            </a:lvl2pPr>
+            <a:lvl3pPr marL="1143000" indent="-228600">
+              <a:spcBef>
+                <a:spcPct val="20000"/>
+              </a:spcBef>
+              <a:buFont typeface="Arial" panose="020B0604020202020204" pitchFamily="34" charset="0"/>
+              <a:buChar char="•"/>
+              <a:defRPr sz="2400">
+                <a:solidFill>
+                  <a:schemeClr val="tx1"/>
+                </a:solidFill>
+                <a:latin typeface="Calibri" panose="020F0502020204030204" pitchFamily="34" charset="0"/>
+                <a:ea typeface="MS PGothic" panose="020B0600070205080204" pitchFamily="34" charset="-128"/>
+              </a:defRPr>
+            </a:lvl3pPr>
+            <a:lvl4pPr marL="1600200" indent="-228600">
+              <a:spcBef>
+                <a:spcPct val="20000"/>
+              </a:spcBef>
+              <a:buFont typeface="Arial" panose="020B0604020202020204" pitchFamily="34" charset="0"/>
+              <a:buChar char="–"/>
+              <a:defRPr sz="2000">
+                <a:solidFill>
+                  <a:schemeClr val="tx1"/>
+                </a:solidFill>
+                <a:latin typeface="Calibri" panose="020F0502020204030204" pitchFamily="34" charset="0"/>
+                <a:ea typeface="MS PGothic" panose="020B0600070205080204" pitchFamily="34" charset="-128"/>
+              </a:defRPr>
+            </a:lvl4pPr>
+            <a:lvl5pPr marL="2057400" indent="-228600">
+              <a:spcBef>
+                <a:spcPct val="20000"/>
+              </a:spcBef>
+              <a:buFont typeface="Arial" panose="020B0604020202020204" pitchFamily="34" charset="0"/>
+              <a:buChar char="»"/>
+              <a:defRPr sz="2000">
+                <a:solidFill>
+                  <a:schemeClr val="tx1"/>
+                </a:solidFill>
+                <a:latin typeface="Calibri" panose="020F0502020204030204" pitchFamily="34" charset="0"/>
+                <a:ea typeface="MS PGothic" panose="020B0600070205080204" pitchFamily="34" charset="-128"/>
+              </a:defRPr>
+            </a:lvl5pPr>
+            <a:lvl6pPr marL="2514600" indent="-228600" defTabSz="457200" eaLnBrk="0" fontAlgn="base" hangingPunct="0">
+              <a:spcBef>
+                <a:spcPct val="20000"/>
+              </a:spcBef>
+              <a:spcAft>
+                <a:spcPct val="0"/>
+              </a:spcAft>
+              <a:buFont typeface="Arial" panose="020B0604020202020204" pitchFamily="34" charset="0"/>
+              <a:buChar char="»"/>
+              <a:defRPr sz="2000">
+                <a:solidFill>
+                  <a:schemeClr val="tx1"/>
+                </a:solidFill>
+                <a:latin typeface="Calibri" panose="020F0502020204030204" pitchFamily="34" charset="0"/>
+                <a:ea typeface="MS PGothic" panose="020B0600070205080204" pitchFamily="34" charset="-128"/>
+              </a:defRPr>
+            </a:lvl6pPr>
+            <a:lvl7pPr marL="2971800" indent="-228600" defTabSz="457200" eaLnBrk="0" fontAlgn="base" hangingPunct="0">
+              <a:spcBef>
+                <a:spcPct val="20000"/>
+              </a:spcBef>
+              <a:spcAft>
+                <a:spcPct val="0"/>
+              </a:spcAft>
+              <a:buFont typeface="Arial" panose="020B0604020202020204" pitchFamily="34" charset="0"/>
+              <a:buChar char="»"/>
+              <a:defRPr sz="2000">
+                <a:solidFill>
+                  <a:schemeClr val="tx1"/>
+                </a:solidFill>
+                <a:latin typeface="Calibri" panose="020F0502020204030204" pitchFamily="34" charset="0"/>
+                <a:ea typeface="MS PGothic" panose="020B0600070205080204" pitchFamily="34" charset="-128"/>
+              </a:defRPr>
+            </a:lvl7pPr>
+            <a:lvl8pPr marL="3429000" indent="-228600" defTabSz="457200" eaLnBrk="0" fontAlgn="base" hangingPunct="0">
+              <a:spcBef>
+                <a:spcPct val="20000"/>
+              </a:spcBef>
+              <a:spcAft>
+                <a:spcPct val="0"/>
+              </a:spcAft>
+              <a:buFont typeface="Arial" panose="020B0604020202020204" pitchFamily="34" charset="0"/>
+              <a:buChar char="»"/>
+              <a:defRPr sz="2000">
+                <a:solidFill>
+                  <a:schemeClr val="tx1"/>
+                </a:solidFill>
+                <a:latin typeface="Calibri" panose="020F0502020204030204" pitchFamily="34" charset="0"/>
+                <a:ea typeface="MS PGothic" panose="020B0600070205080204" pitchFamily="34" charset="-128"/>
+              </a:defRPr>
+            </a:lvl8pPr>
+            <a:lvl9pPr marL="3886200" indent="-228600" defTabSz="457200" eaLnBrk="0" fontAlgn="base" hangingPunct="0">
+              <a:spcBef>
+                <a:spcPct val="20000"/>
+              </a:spcBef>
+              <a:spcAft>
+                <a:spcPct val="0"/>
+              </a:spcAft>
+              <a:buFont typeface="Arial" panose="020B0604020202020204" pitchFamily="34" charset="0"/>
+              <a:buChar char="»"/>
+              <a:defRPr sz="2000">
+                <a:solidFill>
+                  <a:schemeClr val="tx1"/>
+                </a:solidFill>
+                <a:latin typeface="Calibri" panose="020F0502020204030204" pitchFamily="34" charset="0"/>
+                <a:ea typeface="MS PGothic" panose="020B0600070205080204" pitchFamily="34" charset="-128"/>
+              </a:defRPr>
+            </a:lvl9pPr>
+          </a:lstStyle>
+          <a:p>
+            <a:pPr eaLnBrk="1" hangingPunct="1">
+              <a:spcBef>
+                <a:spcPct val="0"/>
+              </a:spcBef>
+              <a:buFontTx/>
+              <a:buNone/>
+            </a:pPr>
+            <a:r>
+              <a:rPr lang="en-US" altLang="en-US" sz="1500">
+                <a:solidFill>
+                  <a:schemeClr val="bg1"/>
+                </a:solidFill>
+                <a:latin typeface="Gotham Light" pitchFamily="50" charset="0"/>
+              </a:rPr>
+              <a:t>Join </a:t>
+            </a:r>
+            <a:r>
+              <a:rPr lang="en-US" altLang="en-US" sz="1500">
+                <a:solidFill>
+                  <a:schemeClr val="bg1"/>
+                </a:solidFill>
+                <a:latin typeface="Gotham Medium" charset="0"/>
+              </a:rPr>
+              <a:t>us</a:t>
+            </a:r>
+          </a:p>
+          <a:p>
+            <a:pPr eaLnBrk="1" hangingPunct="1">
+              <a:spcBef>
+                <a:spcPct val="0"/>
+              </a:spcBef>
+              <a:buFontTx/>
+              <a:buNone/>
+            </a:pPr>
+            <a:r>
+              <a:rPr lang="en-US" altLang="en-US" sz="800">
+                <a:solidFill>
+                  <a:schemeClr val="bg1"/>
+                </a:solidFill>
+                <a:latin typeface="Gotham Light" pitchFamily="50" charset="0"/>
+              </a:rPr>
+              <a:t>www.knx.org</a:t>
+            </a:r>
+          </a:p>
+        </p:txBody>
+      </p:sp>
+      <p:sp>
+        <p:nvSpPr>
+          <p:cNvPr id="15" name="TextBox 14">
+            <a:extLst>
+              <a:ext uri="{FF2B5EF4-FFF2-40B4-BE49-F238E27FC236}">
+                <a16:creationId xmlns:a16="http://schemas.microsoft.com/office/drawing/2014/main" id="{9BE4FAB8-EF68-E8FD-ED34-4C36CD809A43}"/>
+              </a:ext>
+            </a:extLst>
+          </p:cNvPr>
+          <p:cNvSpPr txBox="1"/>
+          <p:nvPr/>
+        </p:nvSpPr>
+        <p:spPr>
+          <a:xfrm>
+            <a:off x="690473" y="1296825"/>
+            <a:ext cx="8420073" cy="954107"/>
+          </a:xfrm>
+          <a:prstGeom prst="rect">
+            <a:avLst/>
+          </a:prstGeom>
+          <a:noFill/>
+        </p:spPr>
+        <p:txBody>
+          <a:bodyPr wrap="square">
+            <a:spAutoFit/>
+          </a:bodyPr>
+          <a:lstStyle/>
+          <a:p>
+            <a:r>
+              <a:rPr lang="en-US" sz="2800" dirty="0">
+                <a:solidFill>
+                  <a:schemeClr val="tx1">
+                    <a:lumMod val="75000"/>
+                    <a:lumOff val="25000"/>
+                  </a:schemeClr>
+                </a:solidFill>
+                <a:latin typeface="Gotham Medium"/>
+                <a:cs typeface="Gotham Medium"/>
+              </a:rPr>
+              <a:t>Linking: PV linked, Charger not yet</a:t>
+            </a:r>
+            <a:endParaRPr lang="en-US" sz="2800" dirty="0"/>
+          </a:p>
+          <a:p>
+            <a:pPr algn="l"/>
+            <a:r>
+              <a:rPr lang="en-US" sz="2800" dirty="0">
+                <a:solidFill>
+                  <a:schemeClr val="tx1">
+                    <a:lumMod val="75000"/>
+                    <a:lumOff val="25000"/>
+                  </a:schemeClr>
+                </a:solidFill>
+                <a:latin typeface="Gotham Medium"/>
+                <a:cs typeface="Gotham Medium"/>
+              </a:rPr>
+              <a:t> </a:t>
+            </a:r>
+            <a:endParaRPr lang="en-US" sz="2500" dirty="0">
+              <a:solidFill>
+                <a:schemeClr val="tx1">
+                  <a:lumMod val="75000"/>
+                  <a:lumOff val="25000"/>
+                </a:schemeClr>
+              </a:solidFill>
+              <a:latin typeface="Gotham Medium"/>
+              <a:cs typeface="Gotham Medium"/>
+            </a:endParaRPr>
+          </a:p>
+        </p:txBody>
+      </p:sp>
+      <p:sp>
+        <p:nvSpPr>
+          <p:cNvPr id="6" name="Arrow: Left 5">
+            <a:extLst>
+              <a:ext uri="{FF2B5EF4-FFF2-40B4-BE49-F238E27FC236}">
+                <a16:creationId xmlns:a16="http://schemas.microsoft.com/office/drawing/2014/main" id="{BC54692A-3FBD-2A52-0A2E-E6A89CA86B79}"/>
+              </a:ext>
+            </a:extLst>
+          </p:cNvPr>
+          <p:cNvSpPr/>
+          <p:nvPr/>
+        </p:nvSpPr>
+        <p:spPr>
+          <a:xfrm rot="19500999">
+            <a:off x="3072613" y="2373579"/>
+            <a:ext cx="2112776" cy="698579"/>
+          </a:xfrm>
+          <a:prstGeom prst="leftArrow">
+            <a:avLst/>
+          </a:prstGeom>
+          <a:solidFill>
+            <a:srgbClr val="FFC000"/>
+          </a:solidFill>
+          <a:ln>
+            <a:solidFill>
+              <a:schemeClr val="tx1"/>
+            </a:solidFill>
+          </a:ln>
+        </p:spPr>
+        <p:style>
+          <a:lnRef idx="1">
+            <a:schemeClr val="accent1"/>
+          </a:lnRef>
+          <a:fillRef idx="3">
+            <a:schemeClr val="accent1"/>
+          </a:fillRef>
+          <a:effectRef idx="2">
+            <a:schemeClr val="accent1"/>
+          </a:effectRef>
+          <a:fontRef idx="minor">
+            <a:schemeClr val="lt1"/>
+          </a:fontRef>
+        </p:style>
+        <p:txBody>
+          <a:bodyPr rtlCol="0" anchor="ctr"/>
+          <a:lstStyle/>
+          <a:p>
+            <a:pPr algn="ctr"/>
+            <a:r>
+              <a:rPr lang="en-US" dirty="0"/>
+              <a:t>click</a:t>
+            </a:r>
+          </a:p>
+        </p:txBody>
+      </p:sp>
+    </p:spTree>
+    <p:extLst>
+      <p:ext uri="{BB962C8B-B14F-4D97-AF65-F5344CB8AC3E}">
+        <p14:creationId xmlns:p14="http://schemas.microsoft.com/office/powerpoint/2010/main" val="4193457722"/>
+      </p:ext>
+    </p:extLst>
+  </p:cSld>
+  <p:clrMapOvr>
+    <a:masterClrMapping/>
+  </p:clrMapOvr>
+  <p:timing>
+    <p:tnLst>
+      <p:par>
+        <p:cTn id="1" dur="indefinite" restart="never" nodeType="tmRoot">
+          <p:childTnLst>
+            <p:seq concurrent="1" nextAc="seek">
+              <p:cTn id="2" dur="indefinite" nodeType="mainSeq">
+                <p:childTnLst>
+                  <p:par>
+                    <p:cTn id="3" fill="hold">
+                      <p:stCondLst>
+                        <p:cond delay="indefinite"/>
+                      </p:stCondLst>
+                      <p:childTnLst>
+                        <p:par>
+                          <p:cTn id="4" fill="hold">
+                            <p:stCondLst>
+                              <p:cond delay="0"/>
+                            </p:stCondLst>
+                            <p:childTnLst>
+                              <p:par>
+                                <p:cTn id="5" presetID="2" presetClass="entr" presetSubtype="4" fill="hold" grpId="0" nodeType="clickEffect">
+                                  <p:stCondLst>
+                                    <p:cond delay="0"/>
+                                  </p:stCondLst>
+                                  <p:childTnLst>
+                                    <p:set>
+                                      <p:cBhvr>
+                                        <p:cTn id="6" dur="1" fill="hold">
+                                          <p:stCondLst>
+                                            <p:cond delay="0"/>
+                                          </p:stCondLst>
+                                        </p:cTn>
+                                        <p:tgtEl>
+                                          <p:spTgt spid="6"/>
+                                        </p:tgtEl>
+                                        <p:attrNameLst>
+                                          <p:attrName>style.visibility</p:attrName>
+                                        </p:attrNameLst>
+                                      </p:cBhvr>
+                                      <p:to>
+                                        <p:strVal val="visible"/>
+                                      </p:to>
+                                    </p:set>
+                                    <p:anim calcmode="lin" valueType="num">
+                                      <p:cBhvr additive="base">
+                                        <p:cTn id="7" dur="500" fill="hold"/>
+                                        <p:tgtEl>
+                                          <p:spTgt spid="6"/>
+                                        </p:tgtEl>
+                                        <p:attrNameLst>
+                                          <p:attrName>ppt_x</p:attrName>
+                                        </p:attrNameLst>
+                                      </p:cBhvr>
+                                      <p:tavLst>
+                                        <p:tav tm="0">
+                                          <p:val>
+                                            <p:strVal val="#ppt_x"/>
+                                          </p:val>
+                                        </p:tav>
+                                        <p:tav tm="100000">
+                                          <p:val>
+                                            <p:strVal val="#ppt_x"/>
+                                          </p:val>
+                                        </p:tav>
+                                      </p:tavLst>
+                                    </p:anim>
+                                    <p:anim calcmode="lin" valueType="num">
+                                      <p:cBhvr additive="base">
+                                        <p:cTn id="8" dur="500" fill="hold"/>
+                                        <p:tgtEl>
+                                          <p:spTgt spid="6"/>
+                                        </p:tgtEl>
+                                        <p:attrNameLst>
+                                          <p:attrName>ppt_y</p:attrName>
+                                        </p:attrNameLst>
+                                      </p:cBhvr>
+                                      <p:tavLst>
+                                        <p:tav tm="0">
+                                          <p:val>
+                                            <p:strVal val="1+#ppt_h/2"/>
+                                          </p:val>
+                                        </p:tav>
+                                        <p:tav tm="100000">
+                                          <p:val>
+                                            <p:strVal val="#ppt_y"/>
+                                          </p:val>
+                                        </p:tav>
+                                      </p:tavLst>
+                                    </p:anim>
+                                  </p:childTnLst>
+                                </p:cTn>
+                              </p:par>
+                            </p:childTnLst>
+                          </p:cTn>
+                        </p:par>
+                      </p:childTnLst>
+                    </p:cTn>
+                  </p:par>
+                </p:childTnLst>
+              </p:cTn>
+              <p:prevCondLst>
+                <p:cond evt="onPrev" delay="0">
+                  <p:tgtEl>
+                    <p:sldTgt/>
+                  </p:tgtEl>
+                </p:cond>
+              </p:prevCondLst>
+              <p:nextCondLst>
+                <p:cond evt="onNext" delay="0">
+                  <p:tgtEl>
+                    <p:sldTgt/>
+                  </p:tgtEl>
+                </p:cond>
+              </p:nextCondLst>
+            </p:seq>
+          </p:childTnLst>
+        </p:cTn>
+      </p:par>
+    </p:tnLst>
+    <p:bldLst>
+      <p:bldP spid="6" grpId="0" animBg="1"/>
+    </p:bldLst>
+  </p:timing>
+</p:sld>
+</file>
+
+<file path=ppt/slides/slide15.xml><?xml version="1.0" encoding="utf-8"?>
+<p:sld xmlns:a="http://schemas.openxmlformats.org/drawingml/2006/main" xmlns:r="http://schemas.openxmlformats.org/officeDocument/2006/relationships" xmlns:p="http://schemas.openxmlformats.org/presentationml/2006/main">
+  <p:cSld>
+    <p:spTree>
+      <p:nvGrpSpPr>
+        <p:cNvPr id="1" name="">
+          <a:extLst>
+            <a:ext uri="{FF2B5EF4-FFF2-40B4-BE49-F238E27FC236}">
+              <a16:creationId xmlns:a16="http://schemas.microsoft.com/office/drawing/2014/main" id="{863C6F3E-C8D9-5883-96B7-49779A29065A}"/>
+            </a:ext>
+          </a:extLst>
+        </p:cNvPr>
+        <p:cNvGrpSpPr/>
+        <p:nvPr/>
+      </p:nvGrpSpPr>
+      <p:grpSpPr>
+        <a:xfrm>
+          <a:off x="0" y="0"/>
+          <a:ext cx="0" cy="0"/>
+          <a:chOff x="0" y="0"/>
+          <a:chExt cx="0" cy="0"/>
+        </a:xfrm>
+      </p:grpSpPr>
+      <p:pic>
+        <p:nvPicPr>
+          <p:cNvPr id="4098" name="Picture 3">
+            <a:extLst>
+              <a:ext uri="{FF2B5EF4-FFF2-40B4-BE49-F238E27FC236}">
+                <a16:creationId xmlns:a16="http://schemas.microsoft.com/office/drawing/2014/main" id="{2E8C3F0F-34EF-4C9B-B1EF-1620FEA69141}"/>
+              </a:ext>
+            </a:extLst>
+          </p:cNvPr>
+          <p:cNvPicPr>
+            <a:picLocks noChangeAspect="1"/>
+          </p:cNvPicPr>
+          <p:nvPr/>
+        </p:nvPicPr>
+        <p:blipFill>
+          <a:blip r:embed="rId2" cstate="screen">
+            <a:extLst>
+              <a:ext uri="{28A0092B-C50C-407E-A947-70E740481C1C}">
+                <a14:useLocalDpi xmlns:a14="http://schemas.microsoft.com/office/drawing/2010/main"/>
+              </a:ext>
+            </a:extLst>
+          </a:blip>
+          <a:srcRect/>
+          <a:stretch>
+            <a:fillRect/>
+          </a:stretch>
+        </p:blipFill>
+        <p:spPr bwMode="auto">
+          <a:xfrm>
+            <a:off x="476188" y="440922"/>
+            <a:ext cx="1104756" cy="479363"/>
+          </a:xfrm>
+          <a:prstGeom prst="rect">
+            <a:avLst/>
+          </a:prstGeom>
+          <a:noFill/>
+          <a:ln>
+            <a:noFill/>
+          </a:ln>
+          <a:extLst>
+            <a:ext uri="{909E8E84-426E-40DD-AFC4-6F175D3DCCD1}">
+              <a14:hiddenFill xmlns:a14="http://schemas.microsoft.com/office/drawing/2010/main">
+                <a:solidFill>
+                  <a:srgbClr val="FFFFFF"/>
+                </a:solidFill>
+              </a14:hiddenFill>
+            </a:ext>
+            <a:ext uri="{91240B29-F687-4F45-9708-019B960494DF}">
+              <a14:hiddenLine xmlns:a14="http://schemas.microsoft.com/office/drawing/2010/main" w="9525">
+                <a:solidFill>
+                  <a:srgbClr val="000000"/>
+                </a:solidFill>
+                <a:miter lim="800000"/>
+                <a:headEnd/>
+                <a:tailEnd/>
+              </a14:hiddenLine>
+            </a:ext>
+          </a:extLst>
+        </p:spPr>
+      </p:pic>
+      <p:sp>
+        <p:nvSpPr>
+          <p:cNvPr id="11" name="Rectángulo 17">
+            <a:extLst>
+              <a:ext uri="{FF2B5EF4-FFF2-40B4-BE49-F238E27FC236}">
+                <a16:creationId xmlns:a16="http://schemas.microsoft.com/office/drawing/2014/main" id="{344D2C66-699E-AAAD-C1BE-FB11F4A2E2E4}"/>
+              </a:ext>
+            </a:extLst>
+          </p:cNvPr>
+          <p:cNvSpPr>
+            <a:spLocks noChangeArrowheads="1"/>
+          </p:cNvSpPr>
+          <p:nvPr/>
+        </p:nvSpPr>
+        <p:spPr bwMode="auto">
+          <a:xfrm>
+            <a:off x="-1" y="6309145"/>
+            <a:ext cx="12190413" cy="549203"/>
+          </a:xfrm>
+          <a:prstGeom prst="rect">
+            <a:avLst/>
+          </a:prstGeom>
+          <a:solidFill>
+            <a:srgbClr val="262626"/>
+          </a:solidFill>
+          <a:ln w="9525">
+            <a:solidFill>
+              <a:srgbClr val="4A7EBB"/>
+            </a:solidFill>
+            <a:miter lim="800000"/>
+            <a:headEnd/>
+            <a:tailEnd/>
+          </a:ln>
+          <a:effectLst>
+            <a:outerShdw blurRad="40000" dist="23000" dir="5400000" rotWithShape="0">
+              <a:srgbClr val="808080">
+                <a:alpha val="34998"/>
+              </a:srgbClr>
+            </a:outerShdw>
+          </a:effectLst>
+        </p:spPr>
+        <p:txBody>
+          <a:bodyPr anchor="ctr"/>
+          <a:lstStyle>
+            <a:lvl1pPr>
+              <a:defRPr sz="2400">
+                <a:solidFill>
+                  <a:schemeClr val="tx1"/>
+                </a:solidFill>
+                <a:latin typeface="Calibri" panose="020F0502020204030204" pitchFamily="34" charset="0"/>
+                <a:ea typeface="MS PGothic" panose="020B0600070205080204" pitchFamily="34" charset="-128"/>
+              </a:defRPr>
+            </a:lvl1pPr>
+            <a:lvl2pPr marL="742950" indent="-285750">
+              <a:defRPr sz="2400">
+                <a:solidFill>
+                  <a:schemeClr val="tx1"/>
+                </a:solidFill>
+                <a:latin typeface="Calibri" panose="020F0502020204030204" pitchFamily="34" charset="0"/>
+                <a:ea typeface="MS PGothic" panose="020B0600070205080204" pitchFamily="34" charset="-128"/>
+              </a:defRPr>
+            </a:lvl2pPr>
+            <a:lvl3pPr marL="1143000" indent="-228600">
+              <a:defRPr sz="2400">
+                <a:solidFill>
+                  <a:schemeClr val="tx1"/>
+                </a:solidFill>
+                <a:latin typeface="Calibri" panose="020F0502020204030204" pitchFamily="34" charset="0"/>
+                <a:ea typeface="MS PGothic" panose="020B0600070205080204" pitchFamily="34" charset="-128"/>
+              </a:defRPr>
+            </a:lvl3pPr>
+            <a:lvl4pPr marL="1600200" indent="-228600">
+              <a:defRPr sz="2400">
+                <a:solidFill>
+                  <a:schemeClr val="tx1"/>
+                </a:solidFill>
+                <a:latin typeface="Calibri" panose="020F0502020204030204" pitchFamily="34" charset="0"/>
+                <a:ea typeface="MS PGothic" panose="020B0600070205080204" pitchFamily="34" charset="-128"/>
+              </a:defRPr>
+            </a:lvl4pPr>
+            <a:lvl5pPr marL="2057400" indent="-228600">
+              <a:defRPr sz="2400">
+                <a:solidFill>
+                  <a:schemeClr val="tx1"/>
+                </a:solidFill>
+                <a:latin typeface="Calibri" panose="020F0502020204030204" pitchFamily="34" charset="0"/>
+                <a:ea typeface="MS PGothic" panose="020B0600070205080204" pitchFamily="34" charset="-128"/>
+              </a:defRPr>
+            </a:lvl5pPr>
+            <a:lvl6pPr marL="2514600" indent="-228600" defTabSz="457200" eaLnBrk="0" fontAlgn="base" hangingPunct="0">
+              <a:spcBef>
+                <a:spcPct val="0"/>
+              </a:spcBef>
+              <a:spcAft>
+                <a:spcPct val="0"/>
+              </a:spcAft>
+              <a:defRPr sz="2400">
+                <a:solidFill>
+                  <a:schemeClr val="tx1"/>
+                </a:solidFill>
+                <a:latin typeface="Calibri" panose="020F0502020204030204" pitchFamily="34" charset="0"/>
+                <a:ea typeface="MS PGothic" panose="020B0600070205080204" pitchFamily="34" charset="-128"/>
+              </a:defRPr>
+            </a:lvl6pPr>
+            <a:lvl7pPr marL="2971800" indent="-228600" defTabSz="457200" eaLnBrk="0" fontAlgn="base" hangingPunct="0">
+              <a:spcBef>
+                <a:spcPct val="0"/>
+              </a:spcBef>
+              <a:spcAft>
+                <a:spcPct val="0"/>
+              </a:spcAft>
+              <a:defRPr sz="2400">
+                <a:solidFill>
+                  <a:schemeClr val="tx1"/>
+                </a:solidFill>
+                <a:latin typeface="Calibri" panose="020F0502020204030204" pitchFamily="34" charset="0"/>
+                <a:ea typeface="MS PGothic" panose="020B0600070205080204" pitchFamily="34" charset="-128"/>
+              </a:defRPr>
+            </a:lvl7pPr>
+            <a:lvl8pPr marL="3429000" indent="-228600" defTabSz="457200" eaLnBrk="0" fontAlgn="base" hangingPunct="0">
+              <a:spcBef>
+                <a:spcPct val="0"/>
+              </a:spcBef>
+              <a:spcAft>
+                <a:spcPct val="0"/>
+              </a:spcAft>
+              <a:defRPr sz="2400">
+                <a:solidFill>
+                  <a:schemeClr val="tx1"/>
+                </a:solidFill>
+                <a:latin typeface="Calibri" panose="020F0502020204030204" pitchFamily="34" charset="0"/>
+                <a:ea typeface="MS PGothic" panose="020B0600070205080204" pitchFamily="34" charset="-128"/>
+              </a:defRPr>
+            </a:lvl8pPr>
+            <a:lvl9pPr marL="3886200" indent="-228600" defTabSz="457200" eaLnBrk="0" fontAlgn="base" hangingPunct="0">
+              <a:spcBef>
+                <a:spcPct val="0"/>
+              </a:spcBef>
+              <a:spcAft>
+                <a:spcPct val="0"/>
+              </a:spcAft>
+              <a:defRPr sz="2400">
+                <a:solidFill>
+                  <a:schemeClr val="tx1"/>
+                </a:solidFill>
+                <a:latin typeface="Calibri" panose="020F0502020204030204" pitchFamily="34" charset="0"/>
+                <a:ea typeface="MS PGothic" panose="020B0600070205080204" pitchFamily="34" charset="-128"/>
+              </a:defRPr>
+            </a:lvl9pPr>
+          </a:lstStyle>
+          <a:p>
+            <a:pPr algn="ctr" eaLnBrk="1" hangingPunct="1">
+              <a:defRPr/>
+            </a:pPr>
+            <a:endParaRPr lang="es-ES" altLang="en-US" sz="1800">
+              <a:solidFill>
+                <a:srgbClr val="FFFFFF"/>
+              </a:solidFill>
+            </a:endParaRPr>
+          </a:p>
+        </p:txBody>
+      </p:sp>
+      <p:sp>
+        <p:nvSpPr>
+          <p:cNvPr id="13" name="TextBox 7">
+            <a:extLst>
+              <a:ext uri="{FF2B5EF4-FFF2-40B4-BE49-F238E27FC236}">
+                <a16:creationId xmlns:a16="http://schemas.microsoft.com/office/drawing/2014/main" id="{D9ECCF80-DE79-70BB-AD9A-2D236B397C54}"/>
+              </a:ext>
+            </a:extLst>
+          </p:cNvPr>
+          <p:cNvSpPr txBox="1">
+            <a:spLocks noChangeArrowheads="1"/>
+          </p:cNvSpPr>
+          <p:nvPr/>
+        </p:nvSpPr>
+        <p:spPr bwMode="auto">
+          <a:xfrm>
+            <a:off x="203174" y="6391684"/>
+            <a:ext cx="2676176" cy="415871"/>
+          </a:xfrm>
+          <a:prstGeom prst="rect">
+            <a:avLst/>
+          </a:prstGeom>
+          <a:noFill/>
+          <a:ln>
+            <a:noFill/>
+          </a:ln>
+          <a:extLst>
+            <a:ext uri="{909E8E84-426E-40dd-AFC4-6F175D3DCCD1}"/>
+            <a:ext uri="{91240B29-F687-4f45-9708-019B960494DF}"/>
+          </a:extLst>
+        </p:spPr>
+        <p:txBody>
+          <a:bodyPr>
+            <a:spAutoFit/>
+          </a:bodyPr>
+          <a:lstStyle>
+            <a:lvl1pPr>
+              <a:defRPr>
+                <a:solidFill>
+                  <a:schemeClr val="tx1"/>
+                </a:solidFill>
+                <a:latin typeface="Calibri" panose="020F0502020204030204" pitchFamily="34" charset="0"/>
+                <a:ea typeface="MS PGothic" panose="020B0600070205080204" pitchFamily="34" charset="-128"/>
+              </a:defRPr>
+            </a:lvl1pPr>
+            <a:lvl2pPr marL="742950" indent="-285750">
+              <a:defRPr>
+                <a:solidFill>
+                  <a:schemeClr val="tx1"/>
+                </a:solidFill>
+                <a:latin typeface="Calibri" panose="020F0502020204030204" pitchFamily="34" charset="0"/>
+                <a:ea typeface="MS PGothic" panose="020B0600070205080204" pitchFamily="34" charset="-128"/>
+              </a:defRPr>
+            </a:lvl2pPr>
+            <a:lvl3pPr marL="1143000" indent="-228600">
+              <a:defRPr>
+                <a:solidFill>
+                  <a:schemeClr val="tx1"/>
+                </a:solidFill>
+                <a:latin typeface="Calibri" panose="020F0502020204030204" pitchFamily="34" charset="0"/>
+                <a:ea typeface="MS PGothic" panose="020B0600070205080204" pitchFamily="34" charset="-128"/>
+              </a:defRPr>
+            </a:lvl3pPr>
+            <a:lvl4pPr marL="1600200" indent="-228600">
+              <a:defRPr>
+                <a:solidFill>
+                  <a:schemeClr val="tx1"/>
+                </a:solidFill>
+                <a:latin typeface="Calibri" panose="020F0502020204030204" pitchFamily="34" charset="0"/>
+                <a:ea typeface="MS PGothic" panose="020B0600070205080204" pitchFamily="34" charset="-128"/>
+              </a:defRPr>
+            </a:lvl4pPr>
+            <a:lvl5pPr marL="2057400" indent="-228600">
+              <a:defRPr>
+                <a:solidFill>
+                  <a:schemeClr val="tx1"/>
+                </a:solidFill>
+                <a:latin typeface="Calibri" panose="020F0502020204030204" pitchFamily="34" charset="0"/>
+                <a:ea typeface="MS PGothic" panose="020B0600070205080204" pitchFamily="34" charset="-128"/>
+              </a:defRPr>
+            </a:lvl5pPr>
+            <a:lvl6pPr marL="2514600" indent="-228600" defTabSz="457200" fontAlgn="base">
+              <a:spcBef>
+                <a:spcPct val="0"/>
+              </a:spcBef>
+              <a:spcAft>
+                <a:spcPct val="0"/>
+              </a:spcAft>
+              <a:defRPr>
+                <a:solidFill>
+                  <a:schemeClr val="tx1"/>
+                </a:solidFill>
+                <a:latin typeface="Calibri" panose="020F0502020204030204" pitchFamily="34" charset="0"/>
+                <a:ea typeface="MS PGothic" panose="020B0600070205080204" pitchFamily="34" charset="-128"/>
+              </a:defRPr>
+            </a:lvl6pPr>
+            <a:lvl7pPr marL="2971800" indent="-228600" defTabSz="457200" fontAlgn="base">
+              <a:spcBef>
+                <a:spcPct val="0"/>
+              </a:spcBef>
+              <a:spcAft>
+                <a:spcPct val="0"/>
+              </a:spcAft>
+              <a:defRPr>
+                <a:solidFill>
+                  <a:schemeClr val="tx1"/>
+                </a:solidFill>
+                <a:latin typeface="Calibri" panose="020F0502020204030204" pitchFamily="34" charset="0"/>
+                <a:ea typeface="MS PGothic" panose="020B0600070205080204" pitchFamily="34" charset="-128"/>
+              </a:defRPr>
+            </a:lvl7pPr>
+            <a:lvl8pPr marL="3429000" indent="-228600" defTabSz="457200" fontAlgn="base">
+              <a:spcBef>
+                <a:spcPct val="0"/>
+              </a:spcBef>
+              <a:spcAft>
+                <a:spcPct val="0"/>
+              </a:spcAft>
+              <a:defRPr>
+                <a:solidFill>
+                  <a:schemeClr val="tx1"/>
+                </a:solidFill>
+                <a:latin typeface="Calibri" panose="020F0502020204030204" pitchFamily="34" charset="0"/>
+                <a:ea typeface="MS PGothic" panose="020B0600070205080204" pitchFamily="34" charset="-128"/>
+              </a:defRPr>
+            </a:lvl8pPr>
+            <a:lvl9pPr marL="3886200" indent="-228600" defTabSz="457200" fontAlgn="base">
+              <a:spcBef>
+                <a:spcPct val="0"/>
+              </a:spcBef>
+              <a:spcAft>
+                <a:spcPct val="0"/>
+              </a:spcAft>
+              <a:defRPr>
+                <a:solidFill>
+                  <a:schemeClr val="tx1"/>
+                </a:solidFill>
+                <a:latin typeface="Calibri" panose="020F0502020204030204" pitchFamily="34" charset="0"/>
+                <a:ea typeface="MS PGothic" panose="020B0600070205080204" pitchFamily="34" charset="-128"/>
+              </a:defRPr>
+            </a:lvl9pPr>
+          </a:lstStyle>
+          <a:p>
+            <a:pPr eaLnBrk="1" hangingPunct="1">
+              <a:defRPr/>
+            </a:pPr>
+            <a:r>
+              <a:rPr lang="en-US" altLang="en-US" sz="1050">
+                <a:solidFill>
+                  <a:srgbClr val="FFFFFF"/>
+                </a:solidFill>
+                <a:latin typeface="Gotham Light"/>
+                <a:cs typeface="Gotham Light"/>
+              </a:rPr>
+              <a:t>Smart home and building solutions.</a:t>
+            </a:r>
+          </a:p>
+          <a:p>
+            <a:pPr eaLnBrk="1" hangingPunct="1">
+              <a:defRPr/>
+            </a:pPr>
+            <a:r>
+              <a:rPr lang="en-US" altLang="en-US" sz="1050">
+                <a:solidFill>
+                  <a:srgbClr val="FFFFFF"/>
+                </a:solidFill>
+                <a:latin typeface="Gotham Light"/>
+                <a:cs typeface="Gotham Light"/>
+              </a:rPr>
+              <a:t>Global. Secure. Connected.</a:t>
+            </a:r>
+          </a:p>
+        </p:txBody>
+      </p:sp>
+      <p:pic>
+        <p:nvPicPr>
+          <p:cNvPr id="4101" name="Imagen 21" descr="Worldmap.jpg">
+            <a:extLst>
+              <a:ext uri="{FF2B5EF4-FFF2-40B4-BE49-F238E27FC236}">
+                <a16:creationId xmlns:a16="http://schemas.microsoft.com/office/drawing/2014/main" id="{00F5AB29-A7B2-4E39-2C9C-FCC29E3AC4B7}"/>
               </a:ext>
             </a:extLst>
           </p:cNvPr>
@@ -10239,7 +11953,7 @@
           <p:cNvPr id="4102" name="TextBox 11">
             <a:extLst>
               <a:ext uri="{FF2B5EF4-FFF2-40B4-BE49-F238E27FC236}">
-                <a16:creationId xmlns:a16="http://schemas.microsoft.com/office/drawing/2014/main" id="{E0B556B3-19C0-51A4-E6AE-3DA521708195}"/>
+                <a16:creationId xmlns:a16="http://schemas.microsoft.com/office/drawing/2014/main" id="{04FCA3A8-1F8E-A460-FA8F-3B3D376199CB}"/>
               </a:ext>
             </a:extLst>
           </p:cNvPr>
@@ -10476,7 +12190,7 @@
           <p:cNvPr id="15" name="TextBox 14">
             <a:extLst>
               <a:ext uri="{FF2B5EF4-FFF2-40B4-BE49-F238E27FC236}">
-                <a16:creationId xmlns:a16="http://schemas.microsoft.com/office/drawing/2014/main" id="{FD23866F-96FE-AA95-29EB-1DC93C962D01}"/>
+                <a16:creationId xmlns:a16="http://schemas.microsoft.com/office/drawing/2014/main" id="{DABCD6FA-C132-429D-B26C-025377BCB45F}"/>
               </a:ext>
             </a:extLst>
           </p:cNvPr>
@@ -10510,7 +12224,7 @@
                 <a:latin typeface="Gotham Medium"/>
                 <a:cs typeface="Gotham Medium"/>
               </a:rPr>
-              <a:t>Charger app: how to link?</a:t>
+              <a:t>Linking: done, devices are now operational</a:t>
             </a:r>
             <a:endParaRPr lang="en-US" sz="2800" dirty="0"/>
           </a:p>
@@ -10542,165 +12256,12 @@
           </a:p>
         </p:txBody>
       </p:sp>
-      <p:sp>
-        <p:nvSpPr>
-          <p:cNvPr id="16" name="TextBox 15">
-            <a:extLst>
-              <a:ext uri="{FF2B5EF4-FFF2-40B4-BE49-F238E27FC236}">
-                <a16:creationId xmlns:a16="http://schemas.microsoft.com/office/drawing/2014/main" id="{D964451E-2F27-0B30-B7A2-D32B54263A43}"/>
-              </a:ext>
-            </a:extLst>
-          </p:cNvPr>
-          <p:cNvSpPr txBox="1"/>
-          <p:nvPr/>
-        </p:nvSpPr>
-        <p:spPr>
-          <a:xfrm>
-            <a:off x="6250406" y="2237885"/>
-            <a:ext cx="4961036" cy="3416320"/>
-          </a:xfrm>
-          <a:prstGeom prst="rect">
-            <a:avLst/>
-          </a:prstGeom>
-          <a:noFill/>
-        </p:spPr>
-        <p:txBody>
-          <a:bodyPr wrap="square">
-            <a:spAutoFit/>
-          </a:bodyPr>
-          <a:lstStyle/>
-          <a:p>
-            <a:r>
-              <a:rPr lang="en-US" dirty="0"/>
-              <a:t>Technical details:</a:t>
-            </a:r>
-          </a:p>
-          <a:p>
-            <a:pPr marL="285750" indent="-285750">
-              <a:buFontTx/>
-              <a:buChar char="-"/>
-            </a:pPr>
-            <a:endParaRPr lang="en-US" dirty="0"/>
-          </a:p>
-          <a:p>
-            <a:pPr marL="285750" indent="-285750">
-              <a:buFontTx/>
-              <a:buChar char="-"/>
-            </a:pPr>
-            <a:r>
-              <a:rPr lang="en-US" dirty="0"/>
-              <a:t>2 datapoints</a:t>
-            </a:r>
-          </a:p>
-          <a:p>
-            <a:pPr marL="895335" lvl="1" indent="-285750">
-              <a:buFontTx/>
-              <a:buChar char="-"/>
-            </a:pPr>
-            <a:r>
-              <a:rPr lang="en-US" dirty="0" err="1"/>
-              <a:t>cflags</a:t>
-            </a:r>
-            <a:r>
-              <a:rPr lang="en-US" dirty="0"/>
-              <a:t> = w : write from medium</a:t>
-            </a:r>
-          </a:p>
-          <a:p>
-            <a:pPr marL="895335" lvl="1" indent="-285750">
-              <a:buFontTx/>
-              <a:buChar char="-"/>
-            </a:pPr>
-            <a:r>
-              <a:rPr lang="en-US" dirty="0" err="1"/>
-              <a:t>url</a:t>
-            </a:r>
-            <a:r>
-              <a:rPr lang="en-US" dirty="0"/>
-              <a:t> : /p/charger = requested charge rate</a:t>
-            </a:r>
-          </a:p>
-          <a:p>
-            <a:pPr marL="895335" lvl="1" indent="-285750">
-              <a:buFontTx/>
-              <a:buChar char="-"/>
-            </a:pPr>
-            <a:r>
-              <a:rPr lang="en-US" dirty="0" err="1"/>
-              <a:t>url</a:t>
-            </a:r>
-            <a:r>
-              <a:rPr lang="en-US" dirty="0"/>
-              <a:t> : </a:t>
-            </a:r>
-            <a:r>
-              <a:rPr lang="en-US" dirty="0">
-                <a:solidFill>
-                  <a:srgbClr val="FF0000"/>
-                </a:solidFill>
-              </a:rPr>
-              <a:t>/p/CEM = configuration link</a:t>
-            </a:r>
-          </a:p>
-          <a:p>
-            <a:pPr marL="285750" indent="-285750">
-              <a:buFontTx/>
-              <a:buChar char="-"/>
-            </a:pPr>
-            <a:endParaRPr lang="en-US" dirty="0"/>
-          </a:p>
-          <a:p>
-            <a:pPr marL="285750" indent="-285750">
-              <a:buFontTx/>
-              <a:buChar char="-"/>
-            </a:pPr>
-            <a:r>
-              <a:rPr lang="en-US" dirty="0"/>
-              <a:t>IPv6 multicast: groups the devices</a:t>
-            </a:r>
-          </a:p>
-          <a:p>
-            <a:pPr marL="285750" indent="-285750">
-              <a:buFontTx/>
-              <a:buChar char="-"/>
-            </a:pPr>
-            <a:endParaRPr lang="en-US" dirty="0"/>
-          </a:p>
-          <a:p>
-            <a:pPr marL="285750" indent="-285750">
-              <a:buFontTx/>
-              <a:buChar char="-"/>
-            </a:pPr>
-            <a:r>
-              <a:rPr lang="en-US" dirty="0"/>
-              <a:t>OSCORE: protection of the exchanged data</a:t>
-            </a:r>
-          </a:p>
-          <a:p>
-            <a:pPr marL="285750" indent="-285750">
-              <a:buFontTx/>
-              <a:buChar char="-"/>
-            </a:pPr>
-            <a:endParaRPr lang="en-US" dirty="0"/>
-          </a:p>
-          <a:p>
-            <a:pPr marL="285750" indent="-285750">
-              <a:buFontTx/>
-              <a:buChar char="-"/>
-            </a:pPr>
-            <a:r>
-              <a:rPr lang="en-US" dirty="0"/>
-              <a:t>‘Copy Serial Number’: My name is…</a:t>
-            </a:r>
-          </a:p>
-        </p:txBody>
-      </p:sp>
       <p:pic>
         <p:nvPicPr>
           <p:cNvPr id="4" name="Picture 3">
             <a:extLst>
               <a:ext uri="{FF2B5EF4-FFF2-40B4-BE49-F238E27FC236}">
-                <a16:creationId xmlns:a16="http://schemas.microsoft.com/office/drawing/2014/main" id="{0C85BBA4-512F-BD89-30CB-B0AFE3D6A3C0}"/>
+                <a16:creationId xmlns:a16="http://schemas.microsoft.com/office/drawing/2014/main" id="{F403BDBB-0B88-9FD4-F957-F31C7B6122BB}"/>
               </a:ext>
             </a:extLst>
           </p:cNvPr>
@@ -10717,8 +12278,8 @@
         </p:blipFill>
         <p:spPr>
           <a:xfrm>
-            <a:off x="1541262" y="2133989"/>
-            <a:ext cx="4108661" cy="3664138"/>
+            <a:off x="690473" y="2131219"/>
+            <a:ext cx="10070597" cy="3431544"/>
           </a:xfrm>
           <a:prstGeom prst="rect">
             <a:avLst/>
@@ -10728,7 +12289,7 @@
     </p:spTree>
     <p:extLst>
       <p:ext uri="{BB962C8B-B14F-4D97-AF65-F5344CB8AC3E}">
-        <p14:creationId xmlns:p14="http://schemas.microsoft.com/office/powerpoint/2010/main" val="3733356740"/>
+        <p14:creationId xmlns:p14="http://schemas.microsoft.com/office/powerpoint/2010/main" val="3407481839"/>
       </p:ext>
     </p:extLst>
   </p:cSld>
@@ -10738,7 +12299,837 @@
 </p:sld>
 </file>
 
-<file path=ppt/slides/slide14.xml><?xml version="1.0" encoding="utf-8"?>
+<file path=ppt/slides/slide16.xml><?xml version="1.0" encoding="utf-8"?>
+<p:sld xmlns:a="http://schemas.openxmlformats.org/drawingml/2006/main" xmlns:r="http://schemas.openxmlformats.org/officeDocument/2006/relationships" xmlns:p="http://schemas.openxmlformats.org/presentationml/2006/main">
+  <p:cSld>
+    <p:spTree>
+      <p:nvGrpSpPr>
+        <p:cNvPr id="1" name="">
+          <a:extLst>
+            <a:ext uri="{FF2B5EF4-FFF2-40B4-BE49-F238E27FC236}">
+              <a16:creationId xmlns:a16="http://schemas.microsoft.com/office/drawing/2014/main" id="{2509153A-D624-CFA4-6924-1AFC73898452}"/>
+            </a:ext>
+          </a:extLst>
+        </p:cNvPr>
+        <p:cNvGrpSpPr/>
+        <p:nvPr/>
+      </p:nvGrpSpPr>
+      <p:grpSpPr>
+        <a:xfrm>
+          <a:off x="0" y="0"/>
+          <a:ext cx="0" cy="0"/>
+          <a:chOff x="0" y="0"/>
+          <a:chExt cx="0" cy="0"/>
+        </a:xfrm>
+      </p:grpSpPr>
+      <p:pic>
+        <p:nvPicPr>
+          <p:cNvPr id="4098" name="Picture 3">
+            <a:extLst>
+              <a:ext uri="{FF2B5EF4-FFF2-40B4-BE49-F238E27FC236}">
+                <a16:creationId xmlns:a16="http://schemas.microsoft.com/office/drawing/2014/main" id="{9C682FCB-59A8-157D-C074-B810F2359DA1}"/>
+              </a:ext>
+            </a:extLst>
+          </p:cNvPr>
+          <p:cNvPicPr>
+            <a:picLocks noChangeAspect="1"/>
+          </p:cNvPicPr>
+          <p:nvPr/>
+        </p:nvPicPr>
+        <p:blipFill>
+          <a:blip r:embed="rId2" cstate="screen">
+            <a:extLst>
+              <a:ext uri="{28A0092B-C50C-407E-A947-70E740481C1C}">
+                <a14:useLocalDpi xmlns:a14="http://schemas.microsoft.com/office/drawing/2010/main"/>
+              </a:ext>
+            </a:extLst>
+          </a:blip>
+          <a:srcRect/>
+          <a:stretch>
+            <a:fillRect/>
+          </a:stretch>
+        </p:blipFill>
+        <p:spPr bwMode="auto">
+          <a:xfrm>
+            <a:off x="476188" y="440922"/>
+            <a:ext cx="1104756" cy="479363"/>
+          </a:xfrm>
+          <a:prstGeom prst="rect">
+            <a:avLst/>
+          </a:prstGeom>
+          <a:noFill/>
+          <a:ln>
+            <a:noFill/>
+          </a:ln>
+          <a:extLst>
+            <a:ext uri="{909E8E84-426E-40DD-AFC4-6F175D3DCCD1}">
+              <a14:hiddenFill xmlns:a14="http://schemas.microsoft.com/office/drawing/2010/main">
+                <a:solidFill>
+                  <a:srgbClr val="FFFFFF"/>
+                </a:solidFill>
+              </a14:hiddenFill>
+            </a:ext>
+            <a:ext uri="{91240B29-F687-4F45-9708-019B960494DF}">
+              <a14:hiddenLine xmlns:a14="http://schemas.microsoft.com/office/drawing/2010/main" w="9525">
+                <a:solidFill>
+                  <a:srgbClr val="000000"/>
+                </a:solidFill>
+                <a:miter lim="800000"/>
+                <a:headEnd/>
+                <a:tailEnd/>
+              </a14:hiddenLine>
+            </a:ext>
+          </a:extLst>
+        </p:spPr>
+      </p:pic>
+      <p:sp>
+        <p:nvSpPr>
+          <p:cNvPr id="11" name="Rectángulo 17">
+            <a:extLst>
+              <a:ext uri="{FF2B5EF4-FFF2-40B4-BE49-F238E27FC236}">
+                <a16:creationId xmlns:a16="http://schemas.microsoft.com/office/drawing/2014/main" id="{4C28253C-072F-B566-2573-D81046FBC416}"/>
+              </a:ext>
+            </a:extLst>
+          </p:cNvPr>
+          <p:cNvSpPr>
+            <a:spLocks noChangeArrowheads="1"/>
+          </p:cNvSpPr>
+          <p:nvPr/>
+        </p:nvSpPr>
+        <p:spPr bwMode="auto">
+          <a:xfrm>
+            <a:off x="-1" y="6309145"/>
+            <a:ext cx="12190413" cy="549203"/>
+          </a:xfrm>
+          <a:prstGeom prst="rect">
+            <a:avLst/>
+          </a:prstGeom>
+          <a:solidFill>
+            <a:srgbClr val="262626"/>
+          </a:solidFill>
+          <a:ln w="9525">
+            <a:solidFill>
+              <a:srgbClr val="4A7EBB"/>
+            </a:solidFill>
+            <a:miter lim="800000"/>
+            <a:headEnd/>
+            <a:tailEnd/>
+          </a:ln>
+          <a:effectLst>
+            <a:outerShdw blurRad="40000" dist="23000" dir="5400000" rotWithShape="0">
+              <a:srgbClr val="808080">
+                <a:alpha val="34998"/>
+              </a:srgbClr>
+            </a:outerShdw>
+          </a:effectLst>
+        </p:spPr>
+        <p:txBody>
+          <a:bodyPr anchor="ctr"/>
+          <a:lstStyle>
+            <a:lvl1pPr>
+              <a:defRPr sz="2400">
+                <a:solidFill>
+                  <a:schemeClr val="tx1"/>
+                </a:solidFill>
+                <a:latin typeface="Calibri" panose="020F0502020204030204" pitchFamily="34" charset="0"/>
+                <a:ea typeface="MS PGothic" panose="020B0600070205080204" pitchFamily="34" charset="-128"/>
+              </a:defRPr>
+            </a:lvl1pPr>
+            <a:lvl2pPr marL="742950" indent="-285750">
+              <a:defRPr sz="2400">
+                <a:solidFill>
+                  <a:schemeClr val="tx1"/>
+                </a:solidFill>
+                <a:latin typeface="Calibri" panose="020F0502020204030204" pitchFamily="34" charset="0"/>
+                <a:ea typeface="MS PGothic" panose="020B0600070205080204" pitchFamily="34" charset="-128"/>
+              </a:defRPr>
+            </a:lvl2pPr>
+            <a:lvl3pPr marL="1143000" indent="-228600">
+              <a:defRPr sz="2400">
+                <a:solidFill>
+                  <a:schemeClr val="tx1"/>
+                </a:solidFill>
+                <a:latin typeface="Calibri" panose="020F0502020204030204" pitchFamily="34" charset="0"/>
+                <a:ea typeface="MS PGothic" panose="020B0600070205080204" pitchFamily="34" charset="-128"/>
+              </a:defRPr>
+            </a:lvl3pPr>
+            <a:lvl4pPr marL="1600200" indent="-228600">
+              <a:defRPr sz="2400">
+                <a:solidFill>
+                  <a:schemeClr val="tx1"/>
+                </a:solidFill>
+                <a:latin typeface="Calibri" panose="020F0502020204030204" pitchFamily="34" charset="0"/>
+                <a:ea typeface="MS PGothic" panose="020B0600070205080204" pitchFamily="34" charset="-128"/>
+              </a:defRPr>
+            </a:lvl4pPr>
+            <a:lvl5pPr marL="2057400" indent="-228600">
+              <a:defRPr sz="2400">
+                <a:solidFill>
+                  <a:schemeClr val="tx1"/>
+                </a:solidFill>
+                <a:latin typeface="Calibri" panose="020F0502020204030204" pitchFamily="34" charset="0"/>
+                <a:ea typeface="MS PGothic" panose="020B0600070205080204" pitchFamily="34" charset="-128"/>
+              </a:defRPr>
+            </a:lvl5pPr>
+            <a:lvl6pPr marL="2514600" indent="-228600" defTabSz="457200" eaLnBrk="0" fontAlgn="base" hangingPunct="0">
+              <a:spcBef>
+                <a:spcPct val="0"/>
+              </a:spcBef>
+              <a:spcAft>
+                <a:spcPct val="0"/>
+              </a:spcAft>
+              <a:defRPr sz="2400">
+                <a:solidFill>
+                  <a:schemeClr val="tx1"/>
+                </a:solidFill>
+                <a:latin typeface="Calibri" panose="020F0502020204030204" pitchFamily="34" charset="0"/>
+                <a:ea typeface="MS PGothic" panose="020B0600070205080204" pitchFamily="34" charset="-128"/>
+              </a:defRPr>
+            </a:lvl6pPr>
+            <a:lvl7pPr marL="2971800" indent="-228600" defTabSz="457200" eaLnBrk="0" fontAlgn="base" hangingPunct="0">
+              <a:spcBef>
+                <a:spcPct val="0"/>
+              </a:spcBef>
+              <a:spcAft>
+                <a:spcPct val="0"/>
+              </a:spcAft>
+              <a:defRPr sz="2400">
+                <a:solidFill>
+                  <a:schemeClr val="tx1"/>
+                </a:solidFill>
+                <a:latin typeface="Calibri" panose="020F0502020204030204" pitchFamily="34" charset="0"/>
+                <a:ea typeface="MS PGothic" panose="020B0600070205080204" pitchFamily="34" charset="-128"/>
+              </a:defRPr>
+            </a:lvl7pPr>
+            <a:lvl8pPr marL="3429000" indent="-228600" defTabSz="457200" eaLnBrk="0" fontAlgn="base" hangingPunct="0">
+              <a:spcBef>
+                <a:spcPct val="0"/>
+              </a:spcBef>
+              <a:spcAft>
+                <a:spcPct val="0"/>
+              </a:spcAft>
+              <a:defRPr sz="2400">
+                <a:solidFill>
+                  <a:schemeClr val="tx1"/>
+                </a:solidFill>
+                <a:latin typeface="Calibri" panose="020F0502020204030204" pitchFamily="34" charset="0"/>
+                <a:ea typeface="MS PGothic" panose="020B0600070205080204" pitchFamily="34" charset="-128"/>
+              </a:defRPr>
+            </a:lvl8pPr>
+            <a:lvl9pPr marL="3886200" indent="-228600" defTabSz="457200" eaLnBrk="0" fontAlgn="base" hangingPunct="0">
+              <a:spcBef>
+                <a:spcPct val="0"/>
+              </a:spcBef>
+              <a:spcAft>
+                <a:spcPct val="0"/>
+              </a:spcAft>
+              <a:defRPr sz="2400">
+                <a:solidFill>
+                  <a:schemeClr val="tx1"/>
+                </a:solidFill>
+                <a:latin typeface="Calibri" panose="020F0502020204030204" pitchFamily="34" charset="0"/>
+                <a:ea typeface="MS PGothic" panose="020B0600070205080204" pitchFamily="34" charset="-128"/>
+              </a:defRPr>
+            </a:lvl9pPr>
+          </a:lstStyle>
+          <a:p>
+            <a:pPr algn="ctr" eaLnBrk="1" hangingPunct="1">
+              <a:defRPr/>
+            </a:pPr>
+            <a:endParaRPr lang="es-ES" altLang="en-US" sz="1800">
+              <a:solidFill>
+                <a:srgbClr val="FFFFFF"/>
+              </a:solidFill>
+            </a:endParaRPr>
+          </a:p>
+        </p:txBody>
+      </p:sp>
+      <p:sp>
+        <p:nvSpPr>
+          <p:cNvPr id="13" name="TextBox 7">
+            <a:extLst>
+              <a:ext uri="{FF2B5EF4-FFF2-40B4-BE49-F238E27FC236}">
+                <a16:creationId xmlns:a16="http://schemas.microsoft.com/office/drawing/2014/main" id="{00CCF22B-3AF3-DE4F-2E4B-2457F38EE0ED}"/>
+              </a:ext>
+            </a:extLst>
+          </p:cNvPr>
+          <p:cNvSpPr txBox="1">
+            <a:spLocks noChangeArrowheads="1"/>
+          </p:cNvSpPr>
+          <p:nvPr/>
+        </p:nvSpPr>
+        <p:spPr bwMode="auto">
+          <a:xfrm>
+            <a:off x="203174" y="6391684"/>
+            <a:ext cx="2676176" cy="415871"/>
+          </a:xfrm>
+          <a:prstGeom prst="rect">
+            <a:avLst/>
+          </a:prstGeom>
+          <a:noFill/>
+          <a:ln>
+            <a:noFill/>
+          </a:ln>
+          <a:extLst>
+            <a:ext uri="{909E8E84-426E-40dd-AFC4-6F175D3DCCD1}"/>
+            <a:ext uri="{91240B29-F687-4f45-9708-019B960494DF}"/>
+          </a:extLst>
+        </p:spPr>
+        <p:txBody>
+          <a:bodyPr>
+            <a:spAutoFit/>
+          </a:bodyPr>
+          <a:lstStyle>
+            <a:lvl1pPr>
+              <a:defRPr>
+                <a:solidFill>
+                  <a:schemeClr val="tx1"/>
+                </a:solidFill>
+                <a:latin typeface="Calibri" panose="020F0502020204030204" pitchFamily="34" charset="0"/>
+                <a:ea typeface="MS PGothic" panose="020B0600070205080204" pitchFamily="34" charset="-128"/>
+              </a:defRPr>
+            </a:lvl1pPr>
+            <a:lvl2pPr marL="742950" indent="-285750">
+              <a:defRPr>
+                <a:solidFill>
+                  <a:schemeClr val="tx1"/>
+                </a:solidFill>
+                <a:latin typeface="Calibri" panose="020F0502020204030204" pitchFamily="34" charset="0"/>
+                <a:ea typeface="MS PGothic" panose="020B0600070205080204" pitchFamily="34" charset="-128"/>
+              </a:defRPr>
+            </a:lvl2pPr>
+            <a:lvl3pPr marL="1143000" indent="-228600">
+              <a:defRPr>
+                <a:solidFill>
+                  <a:schemeClr val="tx1"/>
+                </a:solidFill>
+                <a:latin typeface="Calibri" panose="020F0502020204030204" pitchFamily="34" charset="0"/>
+                <a:ea typeface="MS PGothic" panose="020B0600070205080204" pitchFamily="34" charset="-128"/>
+              </a:defRPr>
+            </a:lvl3pPr>
+            <a:lvl4pPr marL="1600200" indent="-228600">
+              <a:defRPr>
+                <a:solidFill>
+                  <a:schemeClr val="tx1"/>
+                </a:solidFill>
+                <a:latin typeface="Calibri" panose="020F0502020204030204" pitchFamily="34" charset="0"/>
+                <a:ea typeface="MS PGothic" panose="020B0600070205080204" pitchFamily="34" charset="-128"/>
+              </a:defRPr>
+            </a:lvl4pPr>
+            <a:lvl5pPr marL="2057400" indent="-228600">
+              <a:defRPr>
+                <a:solidFill>
+                  <a:schemeClr val="tx1"/>
+                </a:solidFill>
+                <a:latin typeface="Calibri" panose="020F0502020204030204" pitchFamily="34" charset="0"/>
+                <a:ea typeface="MS PGothic" panose="020B0600070205080204" pitchFamily="34" charset="-128"/>
+              </a:defRPr>
+            </a:lvl5pPr>
+            <a:lvl6pPr marL="2514600" indent="-228600" defTabSz="457200" fontAlgn="base">
+              <a:spcBef>
+                <a:spcPct val="0"/>
+              </a:spcBef>
+              <a:spcAft>
+                <a:spcPct val="0"/>
+              </a:spcAft>
+              <a:defRPr>
+                <a:solidFill>
+                  <a:schemeClr val="tx1"/>
+                </a:solidFill>
+                <a:latin typeface="Calibri" panose="020F0502020204030204" pitchFamily="34" charset="0"/>
+                <a:ea typeface="MS PGothic" panose="020B0600070205080204" pitchFamily="34" charset="-128"/>
+              </a:defRPr>
+            </a:lvl6pPr>
+            <a:lvl7pPr marL="2971800" indent="-228600" defTabSz="457200" fontAlgn="base">
+              <a:spcBef>
+                <a:spcPct val="0"/>
+              </a:spcBef>
+              <a:spcAft>
+                <a:spcPct val="0"/>
+              </a:spcAft>
+              <a:defRPr>
+                <a:solidFill>
+                  <a:schemeClr val="tx1"/>
+                </a:solidFill>
+                <a:latin typeface="Calibri" panose="020F0502020204030204" pitchFamily="34" charset="0"/>
+                <a:ea typeface="MS PGothic" panose="020B0600070205080204" pitchFamily="34" charset="-128"/>
+              </a:defRPr>
+            </a:lvl7pPr>
+            <a:lvl8pPr marL="3429000" indent="-228600" defTabSz="457200" fontAlgn="base">
+              <a:spcBef>
+                <a:spcPct val="0"/>
+              </a:spcBef>
+              <a:spcAft>
+                <a:spcPct val="0"/>
+              </a:spcAft>
+              <a:defRPr>
+                <a:solidFill>
+                  <a:schemeClr val="tx1"/>
+                </a:solidFill>
+                <a:latin typeface="Calibri" panose="020F0502020204030204" pitchFamily="34" charset="0"/>
+                <a:ea typeface="MS PGothic" panose="020B0600070205080204" pitchFamily="34" charset="-128"/>
+              </a:defRPr>
+            </a:lvl8pPr>
+            <a:lvl9pPr marL="3886200" indent="-228600" defTabSz="457200" fontAlgn="base">
+              <a:spcBef>
+                <a:spcPct val="0"/>
+              </a:spcBef>
+              <a:spcAft>
+                <a:spcPct val="0"/>
+              </a:spcAft>
+              <a:defRPr>
+                <a:solidFill>
+                  <a:schemeClr val="tx1"/>
+                </a:solidFill>
+                <a:latin typeface="Calibri" panose="020F0502020204030204" pitchFamily="34" charset="0"/>
+                <a:ea typeface="MS PGothic" panose="020B0600070205080204" pitchFamily="34" charset="-128"/>
+              </a:defRPr>
+            </a:lvl9pPr>
+          </a:lstStyle>
+          <a:p>
+            <a:pPr eaLnBrk="1" hangingPunct="1">
+              <a:defRPr/>
+            </a:pPr>
+            <a:r>
+              <a:rPr lang="en-US" altLang="en-US" sz="1050">
+                <a:solidFill>
+                  <a:srgbClr val="FFFFFF"/>
+                </a:solidFill>
+                <a:latin typeface="Gotham Light"/>
+                <a:cs typeface="Gotham Light"/>
+              </a:rPr>
+              <a:t>Smart home and building solutions.</a:t>
+            </a:r>
+          </a:p>
+          <a:p>
+            <a:pPr eaLnBrk="1" hangingPunct="1">
+              <a:defRPr/>
+            </a:pPr>
+            <a:r>
+              <a:rPr lang="en-US" altLang="en-US" sz="1050">
+                <a:solidFill>
+                  <a:srgbClr val="FFFFFF"/>
+                </a:solidFill>
+                <a:latin typeface="Gotham Light"/>
+                <a:cs typeface="Gotham Light"/>
+              </a:rPr>
+              <a:t>Global. Secure. Connected.</a:t>
+            </a:r>
+          </a:p>
+        </p:txBody>
+      </p:sp>
+      <p:pic>
+        <p:nvPicPr>
+          <p:cNvPr id="4101" name="Imagen 21" descr="Worldmap.jpg">
+            <a:extLst>
+              <a:ext uri="{FF2B5EF4-FFF2-40B4-BE49-F238E27FC236}">
+                <a16:creationId xmlns:a16="http://schemas.microsoft.com/office/drawing/2014/main" id="{8BCF4385-0BAA-5FD0-E14F-9FB865099967}"/>
+              </a:ext>
+            </a:extLst>
+          </p:cNvPr>
+          <p:cNvPicPr>
+            <a:picLocks noChangeAspect="1"/>
+          </p:cNvPicPr>
+          <p:nvPr/>
+        </p:nvPicPr>
+        <p:blipFill>
+          <a:blip r:embed="rId3" cstate="screen">
+            <a:extLst>
+              <a:ext uri="{28A0092B-C50C-407E-A947-70E740481C1C}">
+                <a14:useLocalDpi xmlns:a14="http://schemas.microsoft.com/office/drawing/2010/main"/>
+              </a:ext>
+            </a:extLst>
+          </a:blip>
+          <a:srcRect/>
+          <a:stretch>
+            <a:fillRect/>
+          </a:stretch>
+        </p:blipFill>
+        <p:spPr bwMode="auto">
+          <a:xfrm>
+            <a:off x="10926927" y="6340890"/>
+            <a:ext cx="1149200" cy="488886"/>
+          </a:xfrm>
+          <a:prstGeom prst="rect">
+            <a:avLst/>
+          </a:prstGeom>
+          <a:noFill/>
+          <a:ln>
+            <a:noFill/>
+          </a:ln>
+          <a:extLst>
+            <a:ext uri="{909E8E84-426E-40DD-AFC4-6F175D3DCCD1}">
+              <a14:hiddenFill xmlns:a14="http://schemas.microsoft.com/office/drawing/2010/main">
+                <a:solidFill>
+                  <a:srgbClr val="FFFFFF"/>
+                </a:solidFill>
+              </a14:hiddenFill>
+            </a:ext>
+            <a:ext uri="{91240B29-F687-4F45-9708-019B960494DF}">
+              <a14:hiddenLine xmlns:a14="http://schemas.microsoft.com/office/drawing/2010/main" w="9525">
+                <a:solidFill>
+                  <a:srgbClr val="000000"/>
+                </a:solidFill>
+                <a:miter lim="800000"/>
+                <a:headEnd/>
+                <a:tailEnd/>
+              </a14:hiddenLine>
+            </a:ext>
+          </a:extLst>
+        </p:spPr>
+      </p:pic>
+      <p:sp>
+        <p:nvSpPr>
+          <p:cNvPr id="4102" name="TextBox 11">
+            <a:extLst>
+              <a:ext uri="{FF2B5EF4-FFF2-40B4-BE49-F238E27FC236}">
+                <a16:creationId xmlns:a16="http://schemas.microsoft.com/office/drawing/2014/main" id="{3B1939F8-2044-1D8A-08E5-3E9BDF3BCBCA}"/>
+              </a:ext>
+            </a:extLst>
+          </p:cNvPr>
+          <p:cNvSpPr txBox="1">
+            <a:spLocks noChangeArrowheads="1"/>
+          </p:cNvSpPr>
+          <p:nvPr/>
+        </p:nvSpPr>
+        <p:spPr bwMode="auto">
+          <a:xfrm>
+            <a:off x="11166608" y="6340890"/>
+            <a:ext cx="861900" cy="461903"/>
+          </a:xfrm>
+          <a:prstGeom prst="rect">
+            <a:avLst/>
+          </a:prstGeom>
+          <a:noFill/>
+          <a:ln>
+            <a:noFill/>
+          </a:ln>
+          <a:extLst>
+            <a:ext uri="{909E8E84-426E-40DD-AFC4-6F175D3DCCD1}">
+              <a14:hiddenFill xmlns:a14="http://schemas.microsoft.com/office/drawing/2010/main">
+                <a:solidFill>
+                  <a:srgbClr val="FFFFFF"/>
+                </a:solidFill>
+              </a14:hiddenFill>
+            </a:ext>
+            <a:ext uri="{91240B29-F687-4F45-9708-019B960494DF}">
+              <a14:hiddenLine xmlns:a14="http://schemas.microsoft.com/office/drawing/2010/main" w="9525">
+                <a:solidFill>
+                  <a:srgbClr val="000000"/>
+                </a:solidFill>
+                <a:miter lim="800000"/>
+                <a:headEnd/>
+                <a:tailEnd/>
+              </a14:hiddenLine>
+            </a:ext>
+          </a:extLst>
+        </p:spPr>
+        <p:txBody>
+          <a:bodyPr>
+            <a:spAutoFit/>
+          </a:bodyPr>
+          <a:lstStyle>
+            <a:lvl1pPr>
+              <a:spcBef>
+                <a:spcPct val="20000"/>
+              </a:spcBef>
+              <a:buFont typeface="Arial" panose="020B0604020202020204" pitchFamily="34" charset="0"/>
+              <a:buChar char="•"/>
+              <a:defRPr sz="3200">
+                <a:solidFill>
+                  <a:schemeClr val="tx1"/>
+                </a:solidFill>
+                <a:latin typeface="Calibri" panose="020F0502020204030204" pitchFamily="34" charset="0"/>
+                <a:ea typeface="MS PGothic" panose="020B0600070205080204" pitchFamily="34" charset="-128"/>
+              </a:defRPr>
+            </a:lvl1pPr>
+            <a:lvl2pPr marL="742950" indent="-285750">
+              <a:spcBef>
+                <a:spcPct val="20000"/>
+              </a:spcBef>
+              <a:buFont typeface="Arial" panose="020B0604020202020204" pitchFamily="34" charset="0"/>
+              <a:buChar char="–"/>
+              <a:defRPr sz="2800">
+                <a:solidFill>
+                  <a:schemeClr val="tx1"/>
+                </a:solidFill>
+                <a:latin typeface="Calibri" panose="020F0502020204030204" pitchFamily="34" charset="0"/>
+                <a:ea typeface="MS PGothic" panose="020B0600070205080204" pitchFamily="34" charset="-128"/>
+              </a:defRPr>
+            </a:lvl2pPr>
+            <a:lvl3pPr marL="1143000" indent="-228600">
+              <a:spcBef>
+                <a:spcPct val="20000"/>
+              </a:spcBef>
+              <a:buFont typeface="Arial" panose="020B0604020202020204" pitchFamily="34" charset="0"/>
+              <a:buChar char="•"/>
+              <a:defRPr sz="2400">
+                <a:solidFill>
+                  <a:schemeClr val="tx1"/>
+                </a:solidFill>
+                <a:latin typeface="Calibri" panose="020F0502020204030204" pitchFamily="34" charset="0"/>
+                <a:ea typeface="MS PGothic" panose="020B0600070205080204" pitchFamily="34" charset="-128"/>
+              </a:defRPr>
+            </a:lvl3pPr>
+            <a:lvl4pPr marL="1600200" indent="-228600">
+              <a:spcBef>
+                <a:spcPct val="20000"/>
+              </a:spcBef>
+              <a:buFont typeface="Arial" panose="020B0604020202020204" pitchFamily="34" charset="0"/>
+              <a:buChar char="–"/>
+              <a:defRPr sz="2000">
+                <a:solidFill>
+                  <a:schemeClr val="tx1"/>
+                </a:solidFill>
+                <a:latin typeface="Calibri" panose="020F0502020204030204" pitchFamily="34" charset="0"/>
+                <a:ea typeface="MS PGothic" panose="020B0600070205080204" pitchFamily="34" charset="-128"/>
+              </a:defRPr>
+            </a:lvl4pPr>
+            <a:lvl5pPr marL="2057400" indent="-228600">
+              <a:spcBef>
+                <a:spcPct val="20000"/>
+              </a:spcBef>
+              <a:buFont typeface="Arial" panose="020B0604020202020204" pitchFamily="34" charset="0"/>
+              <a:buChar char="»"/>
+              <a:defRPr sz="2000">
+                <a:solidFill>
+                  <a:schemeClr val="tx1"/>
+                </a:solidFill>
+                <a:latin typeface="Calibri" panose="020F0502020204030204" pitchFamily="34" charset="0"/>
+                <a:ea typeface="MS PGothic" panose="020B0600070205080204" pitchFamily="34" charset="-128"/>
+              </a:defRPr>
+            </a:lvl5pPr>
+            <a:lvl6pPr marL="2514600" indent="-228600" defTabSz="457200" eaLnBrk="0" fontAlgn="base" hangingPunct="0">
+              <a:spcBef>
+                <a:spcPct val="20000"/>
+              </a:spcBef>
+              <a:spcAft>
+                <a:spcPct val="0"/>
+              </a:spcAft>
+              <a:buFont typeface="Arial" panose="020B0604020202020204" pitchFamily="34" charset="0"/>
+              <a:buChar char="»"/>
+              <a:defRPr sz="2000">
+                <a:solidFill>
+                  <a:schemeClr val="tx1"/>
+                </a:solidFill>
+                <a:latin typeface="Calibri" panose="020F0502020204030204" pitchFamily="34" charset="0"/>
+                <a:ea typeface="MS PGothic" panose="020B0600070205080204" pitchFamily="34" charset="-128"/>
+              </a:defRPr>
+            </a:lvl6pPr>
+            <a:lvl7pPr marL="2971800" indent="-228600" defTabSz="457200" eaLnBrk="0" fontAlgn="base" hangingPunct="0">
+              <a:spcBef>
+                <a:spcPct val="20000"/>
+              </a:spcBef>
+              <a:spcAft>
+                <a:spcPct val="0"/>
+              </a:spcAft>
+              <a:buFont typeface="Arial" panose="020B0604020202020204" pitchFamily="34" charset="0"/>
+              <a:buChar char="»"/>
+              <a:defRPr sz="2000">
+                <a:solidFill>
+                  <a:schemeClr val="tx1"/>
+                </a:solidFill>
+                <a:latin typeface="Calibri" panose="020F0502020204030204" pitchFamily="34" charset="0"/>
+                <a:ea typeface="MS PGothic" panose="020B0600070205080204" pitchFamily="34" charset="-128"/>
+              </a:defRPr>
+            </a:lvl7pPr>
+            <a:lvl8pPr marL="3429000" indent="-228600" defTabSz="457200" eaLnBrk="0" fontAlgn="base" hangingPunct="0">
+              <a:spcBef>
+                <a:spcPct val="20000"/>
+              </a:spcBef>
+              <a:spcAft>
+                <a:spcPct val="0"/>
+              </a:spcAft>
+              <a:buFont typeface="Arial" panose="020B0604020202020204" pitchFamily="34" charset="0"/>
+              <a:buChar char="»"/>
+              <a:defRPr sz="2000">
+                <a:solidFill>
+                  <a:schemeClr val="tx1"/>
+                </a:solidFill>
+                <a:latin typeface="Calibri" panose="020F0502020204030204" pitchFamily="34" charset="0"/>
+                <a:ea typeface="MS PGothic" panose="020B0600070205080204" pitchFamily="34" charset="-128"/>
+              </a:defRPr>
+            </a:lvl8pPr>
+            <a:lvl9pPr marL="3886200" indent="-228600" defTabSz="457200" eaLnBrk="0" fontAlgn="base" hangingPunct="0">
+              <a:spcBef>
+                <a:spcPct val="20000"/>
+              </a:spcBef>
+              <a:spcAft>
+                <a:spcPct val="0"/>
+              </a:spcAft>
+              <a:buFont typeface="Arial" panose="020B0604020202020204" pitchFamily="34" charset="0"/>
+              <a:buChar char="»"/>
+              <a:defRPr sz="2000">
+                <a:solidFill>
+                  <a:schemeClr val="tx1"/>
+                </a:solidFill>
+                <a:latin typeface="Calibri" panose="020F0502020204030204" pitchFamily="34" charset="0"/>
+                <a:ea typeface="MS PGothic" panose="020B0600070205080204" pitchFamily="34" charset="-128"/>
+              </a:defRPr>
+            </a:lvl9pPr>
+          </a:lstStyle>
+          <a:p>
+            <a:pPr eaLnBrk="1" hangingPunct="1">
+              <a:spcBef>
+                <a:spcPct val="0"/>
+              </a:spcBef>
+              <a:buFontTx/>
+              <a:buNone/>
+            </a:pPr>
+            <a:r>
+              <a:rPr lang="en-US" altLang="en-US" sz="1500">
+                <a:solidFill>
+                  <a:schemeClr val="bg1"/>
+                </a:solidFill>
+                <a:latin typeface="Gotham Light" pitchFamily="50" charset="0"/>
+              </a:rPr>
+              <a:t>Join </a:t>
+            </a:r>
+            <a:r>
+              <a:rPr lang="en-US" altLang="en-US" sz="1500">
+                <a:solidFill>
+                  <a:schemeClr val="bg1"/>
+                </a:solidFill>
+                <a:latin typeface="Gotham Medium" charset="0"/>
+              </a:rPr>
+              <a:t>us</a:t>
+            </a:r>
+          </a:p>
+          <a:p>
+            <a:pPr eaLnBrk="1" hangingPunct="1">
+              <a:spcBef>
+                <a:spcPct val="0"/>
+              </a:spcBef>
+              <a:buFontTx/>
+              <a:buNone/>
+            </a:pPr>
+            <a:r>
+              <a:rPr lang="en-US" altLang="en-US" sz="800">
+                <a:solidFill>
+                  <a:schemeClr val="bg1"/>
+                </a:solidFill>
+                <a:latin typeface="Gotham Light" pitchFamily="50" charset="0"/>
+              </a:rPr>
+              <a:t>www.knx.org</a:t>
+            </a:r>
+          </a:p>
+        </p:txBody>
+      </p:sp>
+      <p:sp>
+        <p:nvSpPr>
+          <p:cNvPr id="15" name="TextBox 14">
+            <a:extLst>
+              <a:ext uri="{FF2B5EF4-FFF2-40B4-BE49-F238E27FC236}">
+                <a16:creationId xmlns:a16="http://schemas.microsoft.com/office/drawing/2014/main" id="{828113C3-384B-7206-B16B-100AF0E44F79}"/>
+              </a:ext>
+            </a:extLst>
+          </p:cNvPr>
+          <p:cNvSpPr txBox="1"/>
+          <p:nvPr/>
+        </p:nvSpPr>
+        <p:spPr>
+          <a:xfrm>
+            <a:off x="690473" y="1296825"/>
+            <a:ext cx="8420073" cy="954107"/>
+          </a:xfrm>
+          <a:prstGeom prst="rect">
+            <a:avLst/>
+          </a:prstGeom>
+          <a:noFill/>
+        </p:spPr>
+        <p:txBody>
+          <a:bodyPr wrap="square">
+            <a:spAutoFit/>
+          </a:bodyPr>
+          <a:lstStyle/>
+          <a:p>
+            <a:r>
+              <a:rPr lang="en-US" sz="2800" dirty="0">
+                <a:solidFill>
+                  <a:schemeClr val="tx1">
+                    <a:lumMod val="75000"/>
+                    <a:lumOff val="25000"/>
+                  </a:schemeClr>
+                </a:solidFill>
+                <a:latin typeface="Gotham Medium"/>
+                <a:cs typeface="Gotham Medium"/>
+              </a:rPr>
+              <a:t>Operational devices</a:t>
+            </a:r>
+            <a:endParaRPr lang="en-US" sz="2800" dirty="0"/>
+          </a:p>
+          <a:p>
+            <a:pPr algn="l"/>
+            <a:r>
+              <a:rPr lang="en-US" sz="2800" dirty="0">
+                <a:solidFill>
+                  <a:schemeClr val="tx1">
+                    <a:lumMod val="75000"/>
+                    <a:lumOff val="25000"/>
+                  </a:schemeClr>
+                </a:solidFill>
+                <a:latin typeface="Gotham Medium"/>
+                <a:cs typeface="Gotham Medium"/>
+              </a:rPr>
+              <a:t> </a:t>
+            </a:r>
+            <a:endParaRPr lang="en-US" sz="2500" dirty="0">
+              <a:solidFill>
+                <a:schemeClr val="tx1">
+                  <a:lumMod val="75000"/>
+                  <a:lumOff val="25000"/>
+                </a:schemeClr>
+              </a:solidFill>
+              <a:latin typeface="Gotham Medium"/>
+              <a:cs typeface="Gotham Medium"/>
+            </a:endParaRPr>
+          </a:p>
+        </p:txBody>
+      </p:sp>
+      <p:pic>
+        <p:nvPicPr>
+          <p:cNvPr id="3" name="Picture 2">
+            <a:extLst>
+              <a:ext uri="{FF2B5EF4-FFF2-40B4-BE49-F238E27FC236}">
+                <a16:creationId xmlns:a16="http://schemas.microsoft.com/office/drawing/2014/main" id="{E52DB366-77C5-39FD-B32A-A2664403B9E7}"/>
+              </a:ext>
+            </a:extLst>
+          </p:cNvPr>
+          <p:cNvPicPr>
+            <a:picLocks noChangeAspect="1"/>
+          </p:cNvPicPr>
+          <p:nvPr/>
+        </p:nvPicPr>
+        <p:blipFill>
+          <a:blip r:embed="rId4"/>
+          <a:stretch>
+            <a:fillRect/>
+          </a:stretch>
+        </p:blipFill>
+        <p:spPr>
+          <a:xfrm>
+            <a:off x="2082559" y="2137342"/>
+            <a:ext cx="7140936" cy="3905386"/>
+          </a:xfrm>
+          <a:prstGeom prst="rect">
+            <a:avLst/>
+          </a:prstGeom>
+        </p:spPr>
+      </p:pic>
+    </p:spTree>
+    <p:extLst>
+      <p:ext uri="{BB962C8B-B14F-4D97-AF65-F5344CB8AC3E}">
+        <p14:creationId xmlns:p14="http://schemas.microsoft.com/office/powerpoint/2010/main" val="4275857708"/>
+      </p:ext>
+    </p:extLst>
+  </p:cSld>
+  <p:clrMapOvr>
+    <a:masterClrMapping/>
+  </p:clrMapOvr>
+</p:sld>
+</file>
+
+<file path=ppt/slides/slide17.xml><?xml version="1.0" encoding="utf-8"?>
 <p:sld xmlns:a="http://schemas.openxmlformats.org/drawingml/2006/main" xmlns:r="http://schemas.openxmlformats.org/officeDocument/2006/relationships" xmlns:p="http://schemas.openxmlformats.org/presentationml/2006/main">
   <p:cSld>
     <p:spTree>
@@ -11538,7 +13929,7 @@
 </p:sld>
 </file>
 
-<file path=ppt/slides/slide15.xml><?xml version="1.0" encoding="utf-8"?>
+<file path=ppt/slides/slide18.xml><?xml version="1.0" encoding="utf-8"?>
 <p:sld xmlns:a="http://schemas.openxmlformats.org/drawingml/2006/main" xmlns:r="http://schemas.openxmlformats.org/officeDocument/2006/relationships" xmlns:p="http://schemas.openxmlformats.org/presentationml/2006/main">
   <p:cSld>
     <p:spTree>
@@ -12368,7 +14759,7 @@
 </p:sld>
 </file>
 
-<file path=ppt/slides/slide16.xml><?xml version="1.0" encoding="utf-8"?>
+<file path=ppt/slides/slide19.xml><?xml version="1.0" encoding="utf-8"?>
 <p:sld xmlns:a="http://schemas.openxmlformats.org/drawingml/2006/main" xmlns:r="http://schemas.openxmlformats.org/officeDocument/2006/relationships" xmlns:p="http://schemas.openxmlformats.org/presentationml/2006/main">
   <p:cSld>
     <p:spTree>
@@ -13339,154 +15730,6 @@
     <p:extLst>
       <p:ext uri="{BB962C8B-B14F-4D97-AF65-F5344CB8AC3E}">
         <p14:creationId xmlns:p14="http://schemas.microsoft.com/office/powerpoint/2010/main" val="2987153571"/>
-      </p:ext>
-    </p:extLst>
-  </p:cSld>
-  <p:clrMapOvr>
-    <a:masterClrMapping/>
-  </p:clrMapOvr>
-</p:sld>
-</file>
-
-<file path=ppt/slides/slide17.xml><?xml version="1.0" encoding="utf-8"?>
-<p:sld xmlns:a="http://schemas.openxmlformats.org/drawingml/2006/main" xmlns:r="http://schemas.openxmlformats.org/officeDocument/2006/relationships" xmlns:p="http://schemas.openxmlformats.org/presentationml/2006/main">
-  <p:cSld>
-    <p:spTree>
-      <p:nvGrpSpPr>
-        <p:cNvPr id="1" name=""/>
-        <p:cNvGrpSpPr/>
-        <p:nvPr/>
-      </p:nvGrpSpPr>
-      <p:grpSpPr>
-        <a:xfrm>
-          <a:off x="0" y="0"/>
-          <a:ext cx="0" cy="0"/>
-          <a:chOff x="0" y="0"/>
-          <a:chExt cx="0" cy="0"/>
-        </a:xfrm>
-      </p:grpSpPr>
-      <p:sp>
-        <p:nvSpPr>
-          <p:cNvPr id="2" name="Text Placeholder 1">
-            <a:extLst>
-              <a:ext uri="{FF2B5EF4-FFF2-40B4-BE49-F238E27FC236}">
-                <a16:creationId xmlns:a16="http://schemas.microsoft.com/office/drawing/2014/main" id="{5B7E4B0A-6892-4A0A-AE2C-6F4ADAF28FD8}"/>
-              </a:ext>
-            </a:extLst>
-          </p:cNvPr>
-          <p:cNvSpPr>
-            <a:spLocks noGrp="1"/>
-          </p:cNvSpPr>
-          <p:nvPr>
-            <p:ph type="body" sz="quarter" idx="10"/>
-          </p:nvPr>
-        </p:nvSpPr>
-        <p:spPr/>
-        <p:txBody>
-          <a:bodyPr/>
-          <a:lstStyle/>
-          <a:p>
-            <a:r>
-              <a:rPr lang="en-GB" dirty="0"/>
-              <a:t>Christophe Parthoens</a:t>
-            </a:r>
-          </a:p>
-        </p:txBody>
-      </p:sp>
-      <p:sp>
-        <p:nvSpPr>
-          <p:cNvPr id="3" name="Content Placeholder 2">
-            <a:extLst>
-              <a:ext uri="{FF2B5EF4-FFF2-40B4-BE49-F238E27FC236}">
-                <a16:creationId xmlns:a16="http://schemas.microsoft.com/office/drawing/2014/main" id="{FD6B4A55-526C-44FE-8377-35450416D443}"/>
-              </a:ext>
-            </a:extLst>
-          </p:cNvPr>
-          <p:cNvSpPr>
-            <a:spLocks noGrp="1"/>
-          </p:cNvSpPr>
-          <p:nvPr>
-            <p:ph sz="quarter" idx="12"/>
-          </p:nvPr>
-        </p:nvSpPr>
-        <p:spPr/>
-        <p:txBody>
-          <a:bodyPr/>
-          <a:lstStyle/>
-          <a:p>
-            <a:endParaRPr lang="en-GB"/>
-          </a:p>
-        </p:txBody>
-      </p:sp>
-      <p:sp>
-        <p:nvSpPr>
-          <p:cNvPr id="4" name="Text Placeholder 3">
-            <a:extLst>
-              <a:ext uri="{FF2B5EF4-FFF2-40B4-BE49-F238E27FC236}">
-                <a16:creationId xmlns:a16="http://schemas.microsoft.com/office/drawing/2014/main" id="{2647ED7E-8E2E-4DA7-9D2D-B4D23BB001BC}"/>
-              </a:ext>
-            </a:extLst>
-          </p:cNvPr>
-          <p:cNvSpPr>
-            <a:spLocks noGrp="1"/>
-          </p:cNvSpPr>
-          <p:nvPr>
-            <p:ph type="body" sz="quarter" idx="13"/>
-          </p:nvPr>
-        </p:nvSpPr>
-        <p:spPr/>
-        <p:txBody>
-          <a:bodyPr/>
-          <a:lstStyle/>
-          <a:p>
-            <a:endParaRPr lang="en-GB"/>
-          </a:p>
-        </p:txBody>
-      </p:sp>
-      <p:sp>
-        <p:nvSpPr>
-          <p:cNvPr id="5" name="Text Placeholder 4">
-            <a:extLst>
-              <a:ext uri="{FF2B5EF4-FFF2-40B4-BE49-F238E27FC236}">
-                <a16:creationId xmlns:a16="http://schemas.microsoft.com/office/drawing/2014/main" id="{75146246-AF79-4FCB-9D97-0C2243F58592}"/>
-              </a:ext>
-            </a:extLst>
-          </p:cNvPr>
-          <p:cNvSpPr>
-            <a:spLocks noGrp="1"/>
-          </p:cNvSpPr>
-          <p:nvPr>
-            <p:ph type="body" sz="quarter" idx="14"/>
-          </p:nvPr>
-        </p:nvSpPr>
-        <p:spPr/>
-        <p:txBody>
-          <a:bodyPr/>
-          <a:lstStyle/>
-          <a:p>
-            <a:r>
-              <a:rPr lang="en-GB"/>
-              <a:t>christophe.parthoens</a:t>
-            </a:r>
-            <a:r>
-              <a:rPr lang="en-GB" dirty="0" err="1"/>
-              <a:t>@</a:t>
-            </a:r>
-            <a:r>
-              <a:rPr lang="en-GB" err="1"/>
-              <a:t>knx</a:t>
-            </a:r>
-            <a:r>
-              <a:rPr lang="en-GB"/>
-              <a:t>.org</a:t>
-            </a:r>
-          </a:p>
-        </p:txBody>
-      </p:sp>
-    </p:spTree>
-    <p:extLst>
-      <p:ext uri="{BB962C8B-B14F-4D97-AF65-F5344CB8AC3E}">
-        <p14:creationId xmlns:p14="http://schemas.microsoft.com/office/powerpoint/2010/main" val="149517314"/>
       </p:ext>
     </p:extLst>
   </p:cSld>
@@ -14390,6 +16633,154 @@
     <p:extLst>
       <p:ext uri="{BB962C8B-B14F-4D97-AF65-F5344CB8AC3E}">
         <p14:creationId xmlns:p14="http://schemas.microsoft.com/office/powerpoint/2010/main" val="650660305"/>
+      </p:ext>
+    </p:extLst>
+  </p:cSld>
+  <p:clrMapOvr>
+    <a:masterClrMapping/>
+  </p:clrMapOvr>
+</p:sld>
+</file>
+
+<file path=ppt/slides/slide20.xml><?xml version="1.0" encoding="utf-8"?>
+<p:sld xmlns:a="http://schemas.openxmlformats.org/drawingml/2006/main" xmlns:r="http://schemas.openxmlformats.org/officeDocument/2006/relationships" xmlns:p="http://schemas.openxmlformats.org/presentationml/2006/main">
+  <p:cSld>
+    <p:spTree>
+      <p:nvGrpSpPr>
+        <p:cNvPr id="1" name=""/>
+        <p:cNvGrpSpPr/>
+        <p:nvPr/>
+      </p:nvGrpSpPr>
+      <p:grpSpPr>
+        <a:xfrm>
+          <a:off x="0" y="0"/>
+          <a:ext cx="0" cy="0"/>
+          <a:chOff x="0" y="0"/>
+          <a:chExt cx="0" cy="0"/>
+        </a:xfrm>
+      </p:grpSpPr>
+      <p:sp>
+        <p:nvSpPr>
+          <p:cNvPr id="2" name="Text Placeholder 1">
+            <a:extLst>
+              <a:ext uri="{FF2B5EF4-FFF2-40B4-BE49-F238E27FC236}">
+                <a16:creationId xmlns:a16="http://schemas.microsoft.com/office/drawing/2014/main" id="{5B7E4B0A-6892-4A0A-AE2C-6F4ADAF28FD8}"/>
+              </a:ext>
+            </a:extLst>
+          </p:cNvPr>
+          <p:cNvSpPr>
+            <a:spLocks noGrp="1"/>
+          </p:cNvSpPr>
+          <p:nvPr>
+            <p:ph type="body" sz="quarter" idx="10"/>
+          </p:nvPr>
+        </p:nvSpPr>
+        <p:spPr/>
+        <p:txBody>
+          <a:bodyPr/>
+          <a:lstStyle/>
+          <a:p>
+            <a:r>
+              <a:rPr lang="en-GB" dirty="0"/>
+              <a:t>Christophe Parthoens</a:t>
+            </a:r>
+          </a:p>
+        </p:txBody>
+      </p:sp>
+      <p:sp>
+        <p:nvSpPr>
+          <p:cNvPr id="3" name="Content Placeholder 2">
+            <a:extLst>
+              <a:ext uri="{FF2B5EF4-FFF2-40B4-BE49-F238E27FC236}">
+                <a16:creationId xmlns:a16="http://schemas.microsoft.com/office/drawing/2014/main" id="{FD6B4A55-526C-44FE-8377-35450416D443}"/>
+              </a:ext>
+            </a:extLst>
+          </p:cNvPr>
+          <p:cNvSpPr>
+            <a:spLocks noGrp="1"/>
+          </p:cNvSpPr>
+          <p:nvPr>
+            <p:ph sz="quarter" idx="12"/>
+          </p:nvPr>
+        </p:nvSpPr>
+        <p:spPr/>
+        <p:txBody>
+          <a:bodyPr/>
+          <a:lstStyle/>
+          <a:p>
+            <a:endParaRPr lang="en-GB"/>
+          </a:p>
+        </p:txBody>
+      </p:sp>
+      <p:sp>
+        <p:nvSpPr>
+          <p:cNvPr id="4" name="Text Placeholder 3">
+            <a:extLst>
+              <a:ext uri="{FF2B5EF4-FFF2-40B4-BE49-F238E27FC236}">
+                <a16:creationId xmlns:a16="http://schemas.microsoft.com/office/drawing/2014/main" id="{2647ED7E-8E2E-4DA7-9D2D-B4D23BB001BC}"/>
+              </a:ext>
+            </a:extLst>
+          </p:cNvPr>
+          <p:cNvSpPr>
+            <a:spLocks noGrp="1"/>
+          </p:cNvSpPr>
+          <p:nvPr>
+            <p:ph type="body" sz="quarter" idx="13"/>
+          </p:nvPr>
+        </p:nvSpPr>
+        <p:spPr/>
+        <p:txBody>
+          <a:bodyPr/>
+          <a:lstStyle/>
+          <a:p>
+            <a:endParaRPr lang="en-GB"/>
+          </a:p>
+        </p:txBody>
+      </p:sp>
+      <p:sp>
+        <p:nvSpPr>
+          <p:cNvPr id="5" name="Text Placeholder 4">
+            <a:extLst>
+              <a:ext uri="{FF2B5EF4-FFF2-40B4-BE49-F238E27FC236}">
+                <a16:creationId xmlns:a16="http://schemas.microsoft.com/office/drawing/2014/main" id="{75146246-AF79-4FCB-9D97-0C2243F58592}"/>
+              </a:ext>
+            </a:extLst>
+          </p:cNvPr>
+          <p:cNvSpPr>
+            <a:spLocks noGrp="1"/>
+          </p:cNvSpPr>
+          <p:nvPr>
+            <p:ph type="body" sz="quarter" idx="14"/>
+          </p:nvPr>
+        </p:nvSpPr>
+        <p:spPr/>
+        <p:txBody>
+          <a:bodyPr/>
+          <a:lstStyle/>
+          <a:p>
+            <a:r>
+              <a:rPr lang="en-GB"/>
+              <a:t>christophe.parthoens</a:t>
+            </a:r>
+            <a:r>
+              <a:rPr lang="en-GB" dirty="0" err="1"/>
+              <a:t>@</a:t>
+            </a:r>
+            <a:r>
+              <a:rPr lang="en-GB" err="1"/>
+              <a:t>knx</a:t>
+            </a:r>
+            <a:r>
+              <a:rPr lang="en-GB"/>
+              <a:t>.org</a:t>
+            </a:r>
+          </a:p>
+        </p:txBody>
+      </p:sp>
+    </p:spTree>
+    <p:extLst>
+      <p:ext uri="{BB962C8B-B14F-4D97-AF65-F5344CB8AC3E}">
+        <p14:creationId xmlns:p14="http://schemas.microsoft.com/office/powerpoint/2010/main" val="149517314"/>
       </p:ext>
     </p:extLst>
   </p:cSld>
@@ -18303,7 +20694,7 @@
         <p:cNvPr id="1" name="">
           <a:extLst>
             <a:ext uri="{FF2B5EF4-FFF2-40B4-BE49-F238E27FC236}">
-              <a16:creationId xmlns:a16="http://schemas.microsoft.com/office/drawing/2014/main" id="{FC555A5F-F8FD-66FE-4E8C-28F4B253EC30}"/>
+              <a16:creationId xmlns:a16="http://schemas.microsoft.com/office/drawing/2014/main" id="{F317A602-CD02-D30C-9545-5EE229279F96}"/>
             </a:ext>
           </a:extLst>
         </p:cNvPr>
@@ -18323,7 +20714,7 @@
           <p:cNvPr id="4098" name="Picture 3">
             <a:extLst>
               <a:ext uri="{FF2B5EF4-FFF2-40B4-BE49-F238E27FC236}">
-                <a16:creationId xmlns:a16="http://schemas.microsoft.com/office/drawing/2014/main" id="{98C3EBC2-C3F2-A507-55E0-BC2B55B1450F}"/>
+                <a16:creationId xmlns:a16="http://schemas.microsoft.com/office/drawing/2014/main" id="{124E7DE2-3C1F-452E-57D8-FBB85C4C0B4B}"/>
               </a:ext>
             </a:extLst>
           </p:cNvPr>
@@ -18383,7 +20774,7 @@
           <p:cNvPr id="11" name="Rectángulo 17">
             <a:extLst>
               <a:ext uri="{FF2B5EF4-FFF2-40B4-BE49-F238E27FC236}">
-                <a16:creationId xmlns:a16="http://schemas.microsoft.com/office/drawing/2014/main" id="{6C89F901-6D96-80B0-E762-E477BBAC4269}"/>
+                <a16:creationId xmlns:a16="http://schemas.microsoft.com/office/drawing/2014/main" id="{8D50916B-7595-8869-9984-3535918660BB}"/>
               </a:ext>
             </a:extLst>
           </p:cNvPr>
@@ -18545,7 +20936,7 @@
           <p:cNvPr id="13" name="TextBox 7">
             <a:extLst>
               <a:ext uri="{FF2B5EF4-FFF2-40B4-BE49-F238E27FC236}">
-                <a16:creationId xmlns:a16="http://schemas.microsoft.com/office/drawing/2014/main" id="{78EF7164-A043-A964-5E08-0B199EEA3DEC}"/>
+                <a16:creationId xmlns:a16="http://schemas.microsoft.com/office/drawing/2014/main" id="{8886B22A-BAFE-0FDC-DF04-6D124AAFCA58}"/>
               </a:ext>
             </a:extLst>
           </p:cNvPr>
@@ -18719,7 +21110,7 @@
           <p:cNvPr id="4101" name="Imagen 21" descr="Worldmap.jpg">
             <a:extLst>
               <a:ext uri="{FF2B5EF4-FFF2-40B4-BE49-F238E27FC236}">
-                <a16:creationId xmlns:a16="http://schemas.microsoft.com/office/drawing/2014/main" id="{3D7867E7-D612-4888-5375-28614498A8A8}"/>
+                <a16:creationId xmlns:a16="http://schemas.microsoft.com/office/drawing/2014/main" id="{137C7BEA-BA01-6456-1AF0-A4214B5E5BC2}"/>
               </a:ext>
             </a:extLst>
           </p:cNvPr>
@@ -18779,7 +21170,7 @@
           <p:cNvPr id="4102" name="TextBox 11">
             <a:extLst>
               <a:ext uri="{FF2B5EF4-FFF2-40B4-BE49-F238E27FC236}">
-                <a16:creationId xmlns:a16="http://schemas.microsoft.com/office/drawing/2014/main" id="{C3680392-1160-B15F-FDEF-5F08E3D0FF7E}"/>
+                <a16:creationId xmlns:a16="http://schemas.microsoft.com/office/drawing/2014/main" id="{2CE659EA-88EF-F37B-B000-4D3E6F290302}"/>
               </a:ext>
             </a:extLst>
           </p:cNvPr>
@@ -19016,7 +21407,7 @@
           <p:cNvPr id="15" name="TextBox 14">
             <a:extLst>
               <a:ext uri="{FF2B5EF4-FFF2-40B4-BE49-F238E27FC236}">
-                <a16:creationId xmlns:a16="http://schemas.microsoft.com/office/drawing/2014/main" id="{B761114D-893F-8CC2-5800-584F36DAE58A}"/>
+                <a16:creationId xmlns:a16="http://schemas.microsoft.com/office/drawing/2014/main" id="{566D06C0-D8E7-2446-D3E9-44D493A7B071}"/>
               </a:ext>
             </a:extLst>
           </p:cNvPr>
@@ -19026,7 +21417,7 @@
         <p:spPr>
           <a:xfrm>
             <a:off x="690473" y="1296825"/>
-            <a:ext cx="8420073" cy="523220"/>
+            <a:ext cx="8420073" cy="954107"/>
           </a:xfrm>
           <a:prstGeom prst="rect">
             <a:avLst/>
@@ -19039,7 +21430,6 @@
           </a:bodyPr>
           <a:lstStyle/>
           <a:p>
-            <a:pPr algn="l"/>
             <a:r>
               <a:rPr lang="en-US" sz="2800" dirty="0">
                 <a:solidFill>
@@ -19051,7 +21441,24 @@
                 <a:latin typeface="Gotham Medium"/>
                 <a:cs typeface="Gotham Medium"/>
               </a:rPr>
-              <a:t>Central Energy Manager app (CEM)</a:t>
+              <a:t>PV app: how to link?</a:t>
+            </a:r>
+            <a:endParaRPr lang="en-US" sz="2800" dirty="0"/>
+          </a:p>
+          <a:p>
+            <a:pPr algn="l"/>
+            <a:r>
+              <a:rPr lang="en-US" sz="2800" dirty="0">
+                <a:solidFill>
+                  <a:schemeClr val="tx1">
+                    <a:lumMod val="75000"/>
+                    <a:lumOff val="25000"/>
+                  </a:schemeClr>
+                </a:solidFill>
+                <a:latin typeface="Gotham Medium"/>
+                <a:cs typeface="Gotham Medium"/>
+              </a:rPr>
+              <a:t> </a:t>
             </a:r>
             <a:endParaRPr lang="en-US" sz="2500" dirty="0">
               <a:solidFill>
@@ -19071,7 +21478,7 @@
           <p:cNvPr id="16" name="TextBox 15">
             <a:extLst>
               <a:ext uri="{FF2B5EF4-FFF2-40B4-BE49-F238E27FC236}">
-                <a16:creationId xmlns:a16="http://schemas.microsoft.com/office/drawing/2014/main" id="{869354A5-7FC0-428B-C1C3-2B6E924F2DF1}"/>
+                <a16:creationId xmlns:a16="http://schemas.microsoft.com/office/drawing/2014/main" id="{5088239F-31D7-8928-017D-AEE12FAFEE26}"/>
               </a:ext>
             </a:extLst>
           </p:cNvPr>
@@ -19080,8 +21487,8 @@
         </p:nvSpPr>
         <p:spPr>
           <a:xfrm>
-            <a:off x="687298" y="2004939"/>
-            <a:ext cx="10822830" cy="2031325"/>
+            <a:off x="6658604" y="2063105"/>
+            <a:ext cx="4841336" cy="3139321"/>
           </a:xfrm>
           <a:prstGeom prst="rect">
             <a:avLst/>
@@ -19094,13 +21501,9 @@
           </a:bodyPr>
           <a:lstStyle/>
           <a:p>
-            <a:pPr marL="285750" indent="-285750">
-              <a:buFontTx/>
-              <a:buChar char="-"/>
-            </a:pPr>
             <a:r>
               <a:rPr lang="en-US" dirty="0"/>
-              <a:t>Acts as the brain of the system</a:t>
+              <a:t>Technical details:</a:t>
             </a:r>
           </a:p>
           <a:p>
@@ -19117,7 +21520,7 @@
             </a:pPr>
             <a:r>
               <a:rPr lang="en-US" dirty="0"/>
-              <a:t>Two operation modes:</a:t>
+              <a:t>1 datapoint</a:t>
             </a:r>
           </a:p>
           <a:p>
@@ -19126,12 +21529,12 @@
               <a:buChar char="-"/>
             </a:pPr>
             <a:r>
-              <a:rPr lang="en-US" b="1" dirty="0"/>
-              <a:t>Sun Mode</a:t>
+              <a:rPr lang="en-US" dirty="0" err="1"/>
+              <a:t>cflags</a:t>
             </a:r>
             <a:r>
               <a:rPr lang="en-US" dirty="0"/>
-              <a:t>: EV charges only if present renewable energy ≥ 4 kW</a:t>
+              <a:t> = t : transmit to medium</a:t>
             </a:r>
           </a:p>
           <a:p>
@@ -19140,12 +21543,20 @@
               <a:buChar char="-"/>
             </a:pPr>
             <a:r>
-              <a:rPr lang="en-US" b="1" dirty="0"/>
-              <a:t>Mix Mode</a:t>
+              <a:rPr lang="en-US" dirty="0" err="1"/>
+              <a:t>url</a:t>
             </a:r>
             <a:r>
               <a:rPr lang="en-US" dirty="0"/>
-              <a:t>: EV charges at 4 kW regardless of present renewable energy</a:t>
+              <a:t> : /p/</a:t>
+            </a:r>
+            <a:r>
+              <a:rPr lang="en-US" dirty="0" err="1"/>
+              <a:t>pv</a:t>
+            </a:r>
+            <a:r>
+              <a:rPr lang="en-US" dirty="0"/>
+              <a:t> = present renewable energy</a:t>
             </a:r>
           </a:p>
           <a:p>
@@ -19162,7 +21573,41 @@
             </a:pPr>
             <a:r>
               <a:rPr lang="en-US" dirty="0"/>
-              <a:t>Calculates and sends out the appropriate charging rate</a:t>
+              <a:t>IPv6 multicast: groups the devices</a:t>
+            </a:r>
+          </a:p>
+          <a:p>
+            <a:pPr marL="285750" indent="-285750">
+              <a:buFontTx/>
+              <a:buChar char="-"/>
+            </a:pPr>
+            <a:endParaRPr lang="en-US" dirty="0"/>
+          </a:p>
+          <a:p>
+            <a:pPr marL="285750" indent="-285750">
+              <a:buFontTx/>
+              <a:buChar char="-"/>
+            </a:pPr>
+            <a:r>
+              <a:rPr lang="en-US" dirty="0"/>
+              <a:t>OSCORE: protection of the exchanged data</a:t>
+            </a:r>
+          </a:p>
+          <a:p>
+            <a:pPr marL="285750" indent="-285750">
+              <a:buFontTx/>
+              <a:buChar char="-"/>
+            </a:pPr>
+            <a:endParaRPr lang="en-US" dirty="0"/>
+          </a:p>
+          <a:p>
+            <a:pPr marL="285750" indent="-285750">
+              <a:buFontTx/>
+              <a:buChar char="-"/>
+            </a:pPr>
+            <a:r>
+              <a:rPr lang="en-US" dirty="0"/>
+              <a:t>‘Copy Certificate’: used by CEM for linking</a:t>
             </a:r>
           </a:p>
         </p:txBody>
@@ -19172,7 +21617,7 @@
           <p:cNvPr id="3" name="Picture 2">
             <a:extLst>
               <a:ext uri="{FF2B5EF4-FFF2-40B4-BE49-F238E27FC236}">
-                <a16:creationId xmlns:a16="http://schemas.microsoft.com/office/drawing/2014/main" id="{C3D4C2C0-5A23-2C75-2623-7B5EDA0AC410}"/>
+                <a16:creationId xmlns:a16="http://schemas.microsoft.com/office/drawing/2014/main" id="{D813D838-16C1-DDF0-BD60-F86FF4EC9202}"/>
               </a:ext>
             </a:extLst>
           </p:cNvPr>
@@ -19189,8 +21634,8 @@
         </p:blipFill>
         <p:spPr>
           <a:xfrm>
-            <a:off x="1580944" y="4130879"/>
-            <a:ext cx="3194214" cy="1835244"/>
+            <a:off x="1669336" y="2183924"/>
+            <a:ext cx="4108661" cy="3187864"/>
           </a:xfrm>
           <a:prstGeom prst="rect">
             <a:avLst/>
@@ -19200,7 +21645,7 @@
     </p:spTree>
     <p:extLst>
       <p:ext uri="{BB962C8B-B14F-4D97-AF65-F5344CB8AC3E}">
-        <p14:creationId xmlns:p14="http://schemas.microsoft.com/office/powerpoint/2010/main" val="1904208195"/>
+        <p14:creationId xmlns:p14="http://schemas.microsoft.com/office/powerpoint/2010/main" val="2891044113"/>
       </p:ext>
     </p:extLst>
   </p:cSld>
@@ -20081,7 +22526,7 @@
         <p:cNvPr id="1" name="">
           <a:extLst>
             <a:ext uri="{FF2B5EF4-FFF2-40B4-BE49-F238E27FC236}">
-              <a16:creationId xmlns:a16="http://schemas.microsoft.com/office/drawing/2014/main" id="{5077AAAE-1E03-CE8A-8F97-9F279C521F63}"/>
+              <a16:creationId xmlns:a16="http://schemas.microsoft.com/office/drawing/2014/main" id="{9558D97F-C278-B990-29E2-6C60CC319048}"/>
             </a:ext>
           </a:extLst>
         </p:cNvPr>
@@ -20101,7 +22546,7 @@
           <p:cNvPr id="4098" name="Picture 3">
             <a:extLst>
               <a:ext uri="{FF2B5EF4-FFF2-40B4-BE49-F238E27FC236}">
-                <a16:creationId xmlns:a16="http://schemas.microsoft.com/office/drawing/2014/main" id="{8700C211-3C10-6092-60D5-627305C89028}"/>
+                <a16:creationId xmlns:a16="http://schemas.microsoft.com/office/drawing/2014/main" id="{794714D3-D210-458D-20AE-369513C2831E}"/>
               </a:ext>
             </a:extLst>
           </p:cNvPr>
@@ -20161,7 +22606,7 @@
           <p:cNvPr id="11" name="Rectángulo 17">
             <a:extLst>
               <a:ext uri="{FF2B5EF4-FFF2-40B4-BE49-F238E27FC236}">
-                <a16:creationId xmlns:a16="http://schemas.microsoft.com/office/drawing/2014/main" id="{6882B226-C084-1800-C088-9A86873A4BC6}"/>
+                <a16:creationId xmlns:a16="http://schemas.microsoft.com/office/drawing/2014/main" id="{AC61C499-CAB5-DD08-920A-892EB7639F9D}"/>
               </a:ext>
             </a:extLst>
           </p:cNvPr>
@@ -20323,7 +22768,7 @@
           <p:cNvPr id="13" name="TextBox 7">
             <a:extLst>
               <a:ext uri="{FF2B5EF4-FFF2-40B4-BE49-F238E27FC236}">
-                <a16:creationId xmlns:a16="http://schemas.microsoft.com/office/drawing/2014/main" id="{1AB28C3F-6103-56BA-DE59-1AD9CAD6848A}"/>
+                <a16:creationId xmlns:a16="http://schemas.microsoft.com/office/drawing/2014/main" id="{211C0584-1437-B86A-AB83-659A01DAC46C}"/>
               </a:ext>
             </a:extLst>
           </p:cNvPr>
@@ -20497,7 +22942,7 @@
           <p:cNvPr id="4101" name="Imagen 21" descr="Worldmap.jpg">
             <a:extLst>
               <a:ext uri="{FF2B5EF4-FFF2-40B4-BE49-F238E27FC236}">
-                <a16:creationId xmlns:a16="http://schemas.microsoft.com/office/drawing/2014/main" id="{F0FC526B-4F76-1775-4175-742F225D858C}"/>
+                <a16:creationId xmlns:a16="http://schemas.microsoft.com/office/drawing/2014/main" id="{D312D97F-C887-C6A9-E33A-FF751F78F927}"/>
               </a:ext>
             </a:extLst>
           </p:cNvPr>
@@ -20557,7 +23002,7 @@
           <p:cNvPr id="4102" name="TextBox 11">
             <a:extLst>
               <a:ext uri="{FF2B5EF4-FFF2-40B4-BE49-F238E27FC236}">
-                <a16:creationId xmlns:a16="http://schemas.microsoft.com/office/drawing/2014/main" id="{AE8A2094-9517-8CD0-C061-FAABAEFA62B5}"/>
+                <a16:creationId xmlns:a16="http://schemas.microsoft.com/office/drawing/2014/main" id="{E0B556B3-19C0-51A4-E6AE-3DA521708195}"/>
               </a:ext>
             </a:extLst>
           </p:cNvPr>
@@ -20794,7 +23239,7 @@
           <p:cNvPr id="15" name="TextBox 14">
             <a:extLst>
               <a:ext uri="{FF2B5EF4-FFF2-40B4-BE49-F238E27FC236}">
-                <a16:creationId xmlns:a16="http://schemas.microsoft.com/office/drawing/2014/main" id="{D27D48F3-8D0C-0F32-4AA5-84E79B927D1D}"/>
+                <a16:creationId xmlns:a16="http://schemas.microsoft.com/office/drawing/2014/main" id="{FD23866F-96FE-AA95-29EB-1DC93C962D01}"/>
               </a:ext>
             </a:extLst>
           </p:cNvPr>
@@ -20828,12 +23273,9 @@
                 <a:latin typeface="Gotham Medium"/>
                 <a:cs typeface="Gotham Medium"/>
               </a:rPr>
-              <a:t>EMS apps: implemented demo c</a:t>
-            </a:r>
-            <a:r>
-              <a:rPr lang="en-US" sz="2800" dirty="0"/>
-              <a:t>onfiguration concept</a:t>
-            </a:r>
+              <a:t>Charger app: how to link?</a:t>
+            </a:r>
+            <a:endParaRPr lang="en-US" sz="2800" dirty="0"/>
           </a:p>
           <a:p>
             <a:pPr algn="l"/>
@@ -20868,7 +23310,7 @@
           <p:cNvPr id="16" name="TextBox 15">
             <a:extLst>
               <a:ext uri="{FF2B5EF4-FFF2-40B4-BE49-F238E27FC236}">
-                <a16:creationId xmlns:a16="http://schemas.microsoft.com/office/drawing/2014/main" id="{E83E76B5-DA64-5888-1FD3-C578B50FA1CC}"/>
+                <a16:creationId xmlns:a16="http://schemas.microsoft.com/office/drawing/2014/main" id="{D964451E-2F27-0B30-B7A2-D32B54263A43}"/>
               </a:ext>
             </a:extLst>
           </p:cNvPr>
@@ -20877,8 +23319,8 @@
         </p:nvSpPr>
         <p:spPr>
           <a:xfrm>
-            <a:off x="1028566" y="2137132"/>
-            <a:ext cx="8531644" cy="3877985"/>
+            <a:off x="6250406" y="2237885"/>
+            <a:ext cx="4961036" cy="3139321"/>
           </a:xfrm>
           <a:prstGeom prst="rect">
             <a:avLst/>
@@ -20891,161 +23333,143 @@
           </a:bodyPr>
           <a:lstStyle/>
           <a:p>
+            <a:r>
+              <a:rPr lang="en-US" dirty="0"/>
+              <a:t>Technical details:</a:t>
+            </a:r>
+          </a:p>
+          <a:p>
             <a:pPr marL="285750" indent="-285750">
               <a:buFontTx/>
               <a:buChar char="-"/>
             </a:pPr>
-            <a:r>
-              <a:rPr lang="en-US" sz="1600" dirty="0"/>
-              <a:t>For the linking (and unlinking) </a:t>
-            </a:r>
-            <a:r>
-              <a:rPr lang="en-US" sz="1600" u="sng" dirty="0"/>
-              <a:t>no</a:t>
-            </a:r>
-            <a:r>
-              <a:rPr lang="en-US" sz="1600" dirty="0"/>
-              <a:t> tool is required</a:t>
-            </a:r>
+            <a:endParaRPr lang="en-US" dirty="0"/>
           </a:p>
           <a:p>
             <a:pPr marL="285750" indent="-285750">
               <a:buFontTx/>
               <a:buChar char="-"/>
             </a:pPr>
-            <a:endParaRPr lang="en-US" sz="1600" dirty="0"/>
+            <a:r>
+              <a:rPr lang="en-US" dirty="0"/>
+              <a:t>1 datapoint</a:t>
+            </a:r>
+          </a:p>
+          <a:p>
+            <a:pPr marL="895335" lvl="1" indent="-285750">
+              <a:buFontTx/>
+              <a:buChar char="-"/>
+            </a:pPr>
+            <a:r>
+              <a:rPr lang="en-US" dirty="0" err="1"/>
+              <a:t>cflags</a:t>
+            </a:r>
+            <a:r>
+              <a:rPr lang="en-US" dirty="0"/>
+              <a:t> = w : write from medium</a:t>
+            </a:r>
+          </a:p>
+          <a:p>
+            <a:pPr marL="895335" lvl="1" indent="-285750">
+              <a:buFontTx/>
+              <a:buChar char="-"/>
+            </a:pPr>
+            <a:r>
+              <a:rPr lang="en-US" dirty="0" err="1"/>
+              <a:t>url</a:t>
+            </a:r>
+            <a:r>
+              <a:rPr lang="en-US" dirty="0"/>
+              <a:t> : /p/charger = requested charge rate</a:t>
+            </a:r>
           </a:p>
           <a:p>
             <a:pPr marL="285750" indent="-285750">
               <a:buFontTx/>
               <a:buChar char="-"/>
             </a:pPr>
-            <a:r>
-              <a:rPr lang="en-US" sz="1600" dirty="0"/>
-              <a:t>Base: </a:t>
-            </a:r>
-            <a:r>
-              <a:rPr lang="en-US" sz="1600" b="1" dirty="0"/>
-              <a:t>serial number of the CEM device</a:t>
-            </a:r>
+            <a:endParaRPr lang="en-US" dirty="0"/>
           </a:p>
           <a:p>
             <a:pPr marL="285750" indent="-285750">
               <a:buFontTx/>
               <a:buChar char="-"/>
             </a:pPr>
-            <a:endParaRPr lang="en-US" sz="1600" dirty="0"/>
+            <a:r>
+              <a:rPr lang="en-US" dirty="0"/>
+              <a:t>IPv6 multicast: groups the devices</a:t>
+            </a:r>
           </a:p>
           <a:p>
             <a:pPr marL="285750" indent="-285750">
               <a:buFontTx/>
               <a:buChar char="-"/>
             </a:pPr>
-            <a:r>
-              <a:rPr lang="en-US" sz="1600" dirty="0"/>
-              <a:t>Procedure, at start up:</a:t>
-            </a:r>
-          </a:p>
-          <a:p>
-            <a:pPr marL="895335" lvl="1" indent="-285750">
-              <a:buFontTx/>
-              <a:buChar char="-"/>
-            </a:pPr>
-            <a:r>
-              <a:rPr lang="en-US" sz="1600" dirty="0"/>
-              <a:t>The CEM device derives its settings from its own serial number</a:t>
-            </a:r>
-          </a:p>
-          <a:p>
-            <a:pPr marL="895335" lvl="1" indent="-285750">
-              <a:buFontTx/>
-              <a:buChar char="-"/>
-            </a:pPr>
-            <a:r>
-              <a:rPr lang="en-US" sz="1600" dirty="0"/>
-              <a:t>The PV device also derives its settings from this (CEM) serial number</a:t>
-            </a:r>
-          </a:p>
-          <a:p>
-            <a:pPr marL="895335" lvl="1" indent="-285750">
-              <a:buFontTx/>
-              <a:buChar char="-"/>
-            </a:pPr>
-            <a:r>
-              <a:rPr lang="en-US" sz="1600" dirty="0"/>
-              <a:t>And also, the Charger device derives its settings from this (CEM) serial number</a:t>
-            </a:r>
+            <a:endParaRPr lang="en-US" dirty="0"/>
           </a:p>
           <a:p>
             <a:pPr marL="285750" indent="-285750">
               <a:buFontTx/>
               <a:buChar char="-"/>
             </a:pPr>
-            <a:endParaRPr lang="en-US" sz="1600" dirty="0"/>
+            <a:r>
+              <a:rPr lang="en-US" dirty="0"/>
+              <a:t>OSCORE: protection of the exchanged data</a:t>
+            </a:r>
           </a:p>
           <a:p>
             <a:pPr marL="285750" indent="-285750">
               <a:buFontTx/>
               <a:buChar char="-"/>
             </a:pPr>
-            <a:r>
-              <a:rPr lang="en-US" sz="1600" dirty="0"/>
-              <a:t>User: the CEM device comes with a Link feature (= transferring its serial number)</a:t>
-            </a:r>
+            <a:endParaRPr lang="en-US" dirty="0"/>
           </a:p>
           <a:p>
             <a:pPr marL="285750" indent="-285750">
               <a:buFontTx/>
               <a:buChar char="-"/>
             </a:pPr>
-            <a:endParaRPr lang="en-US" sz="1600" dirty="0"/>
-          </a:p>
-          <a:p>
-            <a:pPr marL="285750" indent="-285750">
-              <a:buFontTx/>
-              <a:buChar char="-"/>
-            </a:pPr>
-            <a:r>
-              <a:rPr lang="en-US" sz="1600" dirty="0"/>
-              <a:t>Settings:</a:t>
-            </a:r>
-          </a:p>
-          <a:p>
-            <a:pPr marL="895335" lvl="1" indent="-285750">
-              <a:buFontTx/>
-              <a:buChar char="-"/>
-            </a:pPr>
-            <a:r>
-              <a:rPr lang="en-US" sz="1600" dirty="0"/>
-              <a:t>Datapoints</a:t>
-            </a:r>
-          </a:p>
-          <a:p>
-            <a:pPr marL="895335" lvl="1" indent="-285750">
-              <a:buFontTx/>
-              <a:buChar char="-"/>
-            </a:pPr>
-            <a:r>
-              <a:rPr lang="en-US" sz="1600" dirty="0"/>
-              <a:t>IPv6 multicast address</a:t>
-            </a:r>
-          </a:p>
-          <a:p>
-            <a:pPr marL="895335" lvl="1" indent="-285750">
-              <a:buFontTx/>
-              <a:buChar char="-"/>
-            </a:pPr>
-            <a:r>
-              <a:rPr lang="en-US" sz="1600" dirty="0"/>
-              <a:t>OSCORE: data protection</a:t>
+            <a:r>
+              <a:rPr lang="en-US" dirty="0"/>
+              <a:t>‘Copy Certificate’: used by CEM for linking</a:t>
             </a:r>
           </a:p>
         </p:txBody>
       </p:sp>
+      <p:pic>
+        <p:nvPicPr>
+          <p:cNvPr id="8" name="Picture 7">
+            <a:extLst>
+              <a:ext uri="{FF2B5EF4-FFF2-40B4-BE49-F238E27FC236}">
+                <a16:creationId xmlns:a16="http://schemas.microsoft.com/office/drawing/2014/main" id="{E5D38764-4F8D-1C9B-DB40-1205B29FAFBB}"/>
+              </a:ext>
+            </a:extLst>
+          </p:cNvPr>
+          <p:cNvPicPr>
+            <a:picLocks noChangeAspect="1"/>
+          </p:cNvPicPr>
+          <p:nvPr/>
+        </p:nvPicPr>
+        <p:blipFill>
+          <a:blip r:embed="rId4"/>
+          <a:stretch>
+            <a:fillRect/>
+          </a:stretch>
+        </p:blipFill>
+        <p:spPr>
+          <a:xfrm>
+            <a:off x="1173789" y="2250932"/>
+            <a:ext cx="4108661" cy="3187864"/>
+          </a:xfrm>
+          <a:prstGeom prst="rect">
+            <a:avLst/>
+          </a:prstGeom>
+        </p:spPr>
+      </p:pic>
     </p:spTree>
     <p:extLst>
       <p:ext uri="{BB962C8B-B14F-4D97-AF65-F5344CB8AC3E}">
-        <p14:creationId xmlns:p14="http://schemas.microsoft.com/office/powerpoint/2010/main" val="1642232130"/>
+        <p14:creationId xmlns:p14="http://schemas.microsoft.com/office/powerpoint/2010/main" val="3733356740"/>
       </p:ext>
     </p:extLst>
   </p:cSld>
